--- a/2026Teaching/0 - Introduction_LW.pptx
+++ b/2026Teaching/0 - Introduction_LW.pptx
@@ -1800,7 +1800,7 @@
               <a:pPr>
                 <a:defRPr/>
               </a:pPr>
-              <a:t>3/15/2026</a:t>
+              <a:t>3/16/2026</a:t>
             </a:fld>
             <a:endParaRPr lang="en-US"/>
           </a:p>
@@ -13920,10 +13920,10 @@
       </p:sp>
       <p:graphicFrame>
         <p:nvGraphicFramePr>
-          <p:cNvPr id="4" name="Table 3">
+          <p:cNvPr id="3" name="Table 2">
             <a:extLst>
               <a:ext uri="{FF2B5EF4-FFF2-40B4-BE49-F238E27FC236}">
-                <a16:creationId xmlns:a16="http://schemas.microsoft.com/office/drawing/2014/main" id="{18DA2716-82FF-7308-4132-7F2441E95A2A}"/>
+                <a16:creationId xmlns:a16="http://schemas.microsoft.com/office/drawing/2014/main" id="{4817C4E2-9021-D1C8-C98D-0EE62A2BCC70}"/>
               </a:ext>
             </a:extLst>
           </p:cNvPr>
@@ -13933,66 +13933,94 @@
           <p:nvPr>
             <p:extLst>
               <p:ext uri="{D42A27DB-BD31-4B8C-83A1-F6EECF244321}">
-                <p14:modId xmlns:p14="http://schemas.microsoft.com/office/powerpoint/2010/main" val="3828625107"/>
+                <p14:modId xmlns:p14="http://schemas.microsoft.com/office/powerpoint/2010/main" val="3925031471"/>
               </p:ext>
             </p:extLst>
           </p:nvPr>
         </p:nvGraphicFramePr>
         <p:xfrm>
-          <a:off x="1085472" y="1417638"/>
-          <a:ext cx="6973055" cy="4525967"/>
+          <a:off x="884254" y="1160362"/>
+          <a:ext cx="7802546" cy="5240432"/>
         </p:xfrm>
         <a:graphic>
           <a:graphicData uri="http://schemas.openxmlformats.org/drawingml/2006/table">
             <a:tbl>
               <a:tblPr firstRow="1" bandRow="1">
-                <a:tableStyleId>{5C22544A-7EE6-4342-B048-85BDC9FD1C3A}</a:tableStyleId>
+                <a:tableStyleId>{9D7B26C5-4107-4FEC-AEDC-1716B250A1EF}</a:tableStyleId>
               </a:tblPr>
               <a:tblGrid>
-                <a:gridCol w="825603">
+                <a:gridCol w="863874">
                   <a:extLst>
                     <a:ext uri="{9D8B030D-6E8A-4147-A177-3AD203B41FA5}">
-                      <a16:colId xmlns:a16="http://schemas.microsoft.com/office/drawing/2014/main" val="3891643519"/>
+                      <a16:colId xmlns:a16="http://schemas.microsoft.com/office/drawing/2014/main" val="303992285"/>
                     </a:ext>
                   </a:extLst>
                 </a:gridCol>
-                <a:gridCol w="599510">
+                <a:gridCol w="631196">
                   <a:extLst>
                     <a:ext uri="{9D8B030D-6E8A-4147-A177-3AD203B41FA5}">
-                      <a16:colId xmlns:a16="http://schemas.microsoft.com/office/drawing/2014/main" val="3960475647"/>
+                      <a16:colId xmlns:a16="http://schemas.microsoft.com/office/drawing/2014/main" val="782328914"/>
                     </a:ext>
                   </a:extLst>
                 </a:gridCol>
-                <a:gridCol w="1051697">
+                <a:gridCol w="1096551">
                   <a:extLst>
                     <a:ext uri="{9D8B030D-6E8A-4147-A177-3AD203B41FA5}">
-                      <a16:colId xmlns:a16="http://schemas.microsoft.com/office/drawing/2014/main" val="737031552"/>
+                      <a16:colId xmlns:a16="http://schemas.microsoft.com/office/drawing/2014/main" val="3313996719"/>
                     </a:ext>
                   </a:extLst>
                 </a:gridCol>
-                <a:gridCol w="753588">
+                <a:gridCol w="832849">
                   <a:extLst>
                     <a:ext uri="{9D8B030D-6E8A-4147-A177-3AD203B41FA5}">
-                      <a16:colId xmlns:a16="http://schemas.microsoft.com/office/drawing/2014/main" val="1946098333"/>
+                      <a16:colId xmlns:a16="http://schemas.microsoft.com/office/drawing/2014/main" val="1799692824"/>
                     </a:ext>
                   </a:extLst>
                 </a:gridCol>
-                <a:gridCol w="3344455">
+                <a:gridCol w="472753">
                   <a:extLst>
                     <a:ext uri="{9D8B030D-6E8A-4147-A177-3AD203B41FA5}">
-                      <a16:colId xmlns:a16="http://schemas.microsoft.com/office/drawing/2014/main" val="1744861812"/>
+                      <a16:colId xmlns:a16="http://schemas.microsoft.com/office/drawing/2014/main" val="2579409776"/>
                     </a:ext>
                   </a:extLst>
                 </a:gridCol>
-                <a:gridCol w="398202">
+                <a:gridCol w="2841487">
                   <a:extLst>
                     <a:ext uri="{9D8B030D-6E8A-4147-A177-3AD203B41FA5}">
-                      <a16:colId xmlns:a16="http://schemas.microsoft.com/office/drawing/2014/main" val="2773503990"/>
+                      <a16:colId xmlns:a16="http://schemas.microsoft.com/office/drawing/2014/main" val="1610348372"/>
+                    </a:ext>
+                  </a:extLst>
+                </a:gridCol>
+                <a:gridCol w="141834">
+                  <a:extLst>
+                    <a:ext uri="{9D8B030D-6E8A-4147-A177-3AD203B41FA5}">
+                      <a16:colId xmlns:a16="http://schemas.microsoft.com/office/drawing/2014/main" val="2596620914"/>
+                    </a:ext>
+                  </a:extLst>
+                </a:gridCol>
+                <a:gridCol w="452384">
+                  <a:extLst>
+                    <a:ext uri="{9D8B030D-6E8A-4147-A177-3AD203B41FA5}">
+                      <a16:colId xmlns:a16="http://schemas.microsoft.com/office/drawing/2014/main" val="3006900039"/>
+                    </a:ext>
+                  </a:extLst>
+                </a:gridCol>
+                <a:gridCol w="234809">
+                  <a:extLst>
+                    <a:ext uri="{9D8B030D-6E8A-4147-A177-3AD203B41FA5}">
+                      <a16:colId xmlns:a16="http://schemas.microsoft.com/office/drawing/2014/main" val="682040236"/>
+                    </a:ext>
+                  </a:extLst>
+                </a:gridCol>
+                <a:gridCol w="234809">
+                  <a:extLst>
+                    <a:ext uri="{9D8B030D-6E8A-4147-A177-3AD203B41FA5}">
+                      <a16:colId xmlns:a16="http://schemas.microsoft.com/office/drawing/2014/main" val="1376373373"/>
                     </a:ext>
                   </a:extLst>
                 </a:gridCol>
               </a:tblGrid>
-              <a:tr h="271317">
+              <a:tr h="296664">
                 <a:tc>
                   <a:txBody>
                     <a:bodyPr/>
@@ -14008,20 +14036,20 @@
                         <a:buNone/>
                       </a:pPr>
                       <a:r>
-                        <a:rPr lang="en-US" sz="1100" kern="100">
+                        <a:rPr lang="en-US" sz="1000" kern="100">
                           <a:effectLst/>
                         </a:rPr>
                         <a:t>Date</a:t>
                       </a:r>
-                      <a:endParaRPr lang="en-GB" sz="1100" kern="100">
+                      <a:endParaRPr lang="en-GB" sz="1000" kern="100">
                         <a:effectLst/>
                         <a:latin typeface="Aptos" panose="020B0004020202020204" pitchFamily="34" charset="0"/>
                         <a:ea typeface="DengXian" panose="02010600030101010101" pitchFamily="2" charset="-122"/>
-                        <a:cs typeface="Times New Roman" panose="02020603050405020304" pitchFamily="18" charset="0"/>
+                        <a:cs typeface="Arial" panose="020B0604020202020204" pitchFamily="34" charset="0"/>
                       </a:endParaRPr>
                     </a:p>
                   </a:txBody>
-                  <a:tcPr marL="58420" marR="58420" marT="29210" marB="29210"/>
+                  <a:tcPr marL="60165" marR="60165" marT="30082" marB="30082"/>
                 </a:tc>
                 <a:tc>
                   <a:txBody>
@@ -14034,13 +14062,13 @@
                         </a:lnSpc>
                         <a:buNone/>
                       </a:pPr>
-                      <a:endParaRPr lang="en-GB" sz="1100" kern="100">
+                      <a:endParaRPr lang="en-GB" sz="1000" kern="100">
                         <a:effectLst/>
                         <a:latin typeface="Aptos" panose="020B0004020202020204" pitchFamily="34" charset="0"/>
                       </a:endParaRPr>
                     </a:p>
                   </a:txBody>
-                  <a:tcPr marL="58420" marR="58420" marT="29210" marB="29210"/>
+                  <a:tcPr marL="60165" marR="60165" marT="30082" marB="30082"/>
                 </a:tc>
                 <a:tc>
                   <a:txBody>
@@ -14057,20 +14085,20 @@
                         <a:buNone/>
                       </a:pPr>
                       <a:r>
-                        <a:rPr lang="en-US" sz="1100" kern="100">
+                        <a:rPr lang="en-US" sz="1000" kern="100">
                           <a:effectLst/>
                         </a:rPr>
                         <a:t>Time</a:t>
                       </a:r>
-                      <a:endParaRPr lang="en-GB" sz="1100" kern="100">
+                      <a:endParaRPr lang="en-GB" sz="1000" kern="100">
                         <a:effectLst/>
                         <a:latin typeface="Aptos" panose="020B0004020202020204" pitchFamily="34" charset="0"/>
                         <a:ea typeface="DengXian" panose="02010600030101010101" pitchFamily="2" charset="-122"/>
-                        <a:cs typeface="Times New Roman" panose="02020603050405020304" pitchFamily="18" charset="0"/>
+                        <a:cs typeface="Arial" panose="020B0604020202020204" pitchFamily="34" charset="0"/>
                       </a:endParaRPr>
                     </a:p>
                   </a:txBody>
-                  <a:tcPr marL="58420" marR="58420" marT="29210" marB="29210"/>
+                  <a:tcPr marL="60165" marR="60165" marT="30082" marB="30082"/>
                 </a:tc>
                 <a:tc>
                   <a:txBody>
@@ -14087,22 +14115,22 @@
                         <a:buNone/>
                       </a:pPr>
                       <a:r>
-                        <a:rPr lang="en-US" sz="1100" kern="100">
+                        <a:rPr lang="en-US" sz="1000" kern="100">
                           <a:effectLst/>
                         </a:rPr>
                         <a:t>Where</a:t>
                       </a:r>
-                      <a:endParaRPr lang="en-GB" sz="1100" kern="100">
+                      <a:endParaRPr lang="en-GB" sz="1000" kern="100">
                         <a:effectLst/>
                         <a:latin typeface="Aptos" panose="020B0004020202020204" pitchFamily="34" charset="0"/>
                         <a:ea typeface="DengXian" panose="02010600030101010101" pitchFamily="2" charset="-122"/>
-                        <a:cs typeface="Times New Roman" panose="02020603050405020304" pitchFamily="18" charset="0"/>
+                        <a:cs typeface="Arial" panose="020B0604020202020204" pitchFamily="34" charset="0"/>
                       </a:endParaRPr>
                     </a:p>
                   </a:txBody>
-                  <a:tcPr marL="58420" marR="58420" marT="29210" marB="29210"/>
+                  <a:tcPr marL="60165" marR="60165" marT="30082" marB="30082"/>
                 </a:tc>
-                <a:tc>
+                <a:tc gridSpan="3">
                   <a:txBody>
                     <a:bodyPr/>
                     <a:lstStyle/>
@@ -14113,2641 +14141,13 @@
                         </a:lnSpc>
                         <a:buNone/>
                       </a:pPr>
-                      <a:endParaRPr lang="en-GB" sz="1100" kern="100" dirty="0">
+                      <a:endParaRPr lang="en-GB" sz="1000" kern="100">
                         <a:effectLst/>
                         <a:latin typeface="Aptos" panose="020B0004020202020204" pitchFamily="34" charset="0"/>
                       </a:endParaRPr>
                     </a:p>
                   </a:txBody>
-                  <a:tcPr marL="58420" marR="58420" marT="29210" marB="29210"/>
-                </a:tc>
-                <a:tc>
-                  <a:txBody>
-                    <a:bodyPr/>
-                    <a:lstStyle/>
-                    <a:p>
-                      <a:pPr>
-                        <a:lnSpc>
-                          <a:spcPct val="115000"/>
-                        </a:lnSpc>
-                        <a:buNone/>
-                      </a:pPr>
-                      <a:endParaRPr lang="en-GB" sz="1100" kern="100">
-                        <a:effectLst/>
-                        <a:latin typeface="Aptos" panose="020B0004020202020204" pitchFamily="34" charset="0"/>
-                      </a:endParaRPr>
-                    </a:p>
-                  </a:txBody>
-                  <a:tcPr marL="58420" marR="58420" marT="29210" marB="29210"/>
-                </a:tc>
-                <a:extLst>
-                  <a:ext uri="{0D108BD9-81ED-4DB2-BD59-A6C34878D82A}">
-                    <a16:rowId xmlns:a16="http://schemas.microsoft.com/office/drawing/2014/main" val="3151065146"/>
-                  </a:ext>
-                </a:extLst>
-              </a:tr>
-              <a:tr h="271317">
-                <a:tc>
-                  <a:txBody>
-                    <a:bodyPr/>
-                    <a:lstStyle/>
-                    <a:p>
-                      <a:pPr>
-                        <a:lnSpc>
-                          <a:spcPct val="115000"/>
-                        </a:lnSpc>
-                        <a:spcAft>
-                          <a:spcPts val="800"/>
-                        </a:spcAft>
-                        <a:buNone/>
-                      </a:pPr>
-                      <a:r>
-                        <a:rPr lang="en-US" sz="1100" kern="100">
-                          <a:effectLst/>
-                        </a:rPr>
-                        <a:t>16 March</a:t>
-                      </a:r>
-                      <a:endParaRPr lang="en-GB" sz="1100" kern="100">
-                        <a:effectLst/>
-                        <a:latin typeface="Aptos" panose="020B0004020202020204" pitchFamily="34" charset="0"/>
-                        <a:ea typeface="DengXian" panose="02010600030101010101" pitchFamily="2" charset="-122"/>
-                        <a:cs typeface="Times New Roman" panose="02020603050405020304" pitchFamily="18" charset="0"/>
-                      </a:endParaRPr>
-                    </a:p>
-                  </a:txBody>
-                  <a:tcPr marL="58420" marR="58420" marT="29210" marB="29210"/>
-                </a:tc>
-                <a:tc>
-                  <a:txBody>
-                    <a:bodyPr/>
-                    <a:lstStyle/>
-                    <a:p>
-                      <a:pPr>
-                        <a:lnSpc>
-                          <a:spcPct val="115000"/>
-                        </a:lnSpc>
-                        <a:spcAft>
-                          <a:spcPts val="800"/>
-                        </a:spcAft>
-                        <a:buNone/>
-                      </a:pPr>
-                      <a:r>
-                        <a:rPr lang="en-US" sz="1100" kern="100">
-                          <a:effectLst/>
-                        </a:rPr>
-                        <a:t>1</a:t>
-                      </a:r>
-                      <a:endParaRPr lang="en-GB" sz="1100" kern="100">
-                        <a:effectLst/>
-                        <a:latin typeface="Aptos" panose="020B0004020202020204" pitchFamily="34" charset="0"/>
-                        <a:ea typeface="DengXian" panose="02010600030101010101" pitchFamily="2" charset="-122"/>
-                        <a:cs typeface="Times New Roman" panose="02020603050405020304" pitchFamily="18" charset="0"/>
-                      </a:endParaRPr>
-                    </a:p>
-                  </a:txBody>
-                  <a:tcPr marL="58420" marR="58420" marT="29210" marB="29210"/>
-                </a:tc>
-                <a:tc>
-                  <a:txBody>
-                    <a:bodyPr/>
-                    <a:lstStyle/>
-                    <a:p>
-                      <a:pPr>
-                        <a:lnSpc>
-                          <a:spcPct val="115000"/>
-                        </a:lnSpc>
-                        <a:spcAft>
-                          <a:spcPts val="800"/>
-                        </a:spcAft>
-                        <a:buNone/>
-                      </a:pPr>
-                      <a:r>
-                        <a:rPr lang="en-GB" sz="1100" kern="100">
-                          <a:effectLst/>
-                        </a:rPr>
-                        <a:t>9-12</a:t>
-                      </a:r>
-                      <a:endParaRPr lang="en-GB" sz="1100" kern="100">
-                        <a:effectLst/>
-                        <a:latin typeface="Aptos" panose="020B0004020202020204" pitchFamily="34" charset="0"/>
-                        <a:ea typeface="DengXian" panose="02010600030101010101" pitchFamily="2" charset="-122"/>
-                        <a:cs typeface="Times New Roman" panose="02020603050405020304" pitchFamily="18" charset="0"/>
-                      </a:endParaRPr>
-                    </a:p>
-                  </a:txBody>
-                  <a:tcPr marL="58420" marR="58420" marT="29210" marB="29210"/>
-                </a:tc>
-                <a:tc>
-                  <a:txBody>
-                    <a:bodyPr/>
-                    <a:lstStyle/>
-                    <a:p>
-                      <a:pPr>
-                        <a:lnSpc>
-                          <a:spcPct val="115000"/>
-                        </a:lnSpc>
-                        <a:spcAft>
-                          <a:spcPts val="800"/>
-                        </a:spcAft>
-                        <a:buNone/>
-                      </a:pPr>
-                      <a:r>
-                        <a:rPr lang="en-GB" sz="1100" kern="100">
-                          <a:effectLst/>
-                        </a:rPr>
-                        <a:t>CCZ269</a:t>
-                      </a:r>
-                      <a:endParaRPr lang="en-GB" sz="1100" kern="100">
-                        <a:effectLst/>
-                        <a:latin typeface="Aptos" panose="020B0004020202020204" pitchFamily="34" charset="0"/>
-                        <a:ea typeface="DengXian" panose="02010600030101010101" pitchFamily="2" charset="-122"/>
-                        <a:cs typeface="Times New Roman" panose="02020603050405020304" pitchFamily="18" charset="0"/>
-                      </a:endParaRPr>
-                    </a:p>
-                  </a:txBody>
-                  <a:tcPr marL="58420" marR="58420" marT="29210" marB="29210"/>
-                </a:tc>
-                <a:tc>
-                  <a:txBody>
-                    <a:bodyPr/>
-                    <a:lstStyle/>
-                    <a:p>
-                      <a:pPr>
-                        <a:lnSpc>
-                          <a:spcPct val="115000"/>
-                        </a:lnSpc>
-                        <a:spcAft>
-                          <a:spcPts val="800"/>
-                        </a:spcAft>
-                        <a:buNone/>
-                      </a:pPr>
-                      <a:r>
-                        <a:rPr lang="en-US" sz="1100" kern="100">
-                          <a:effectLst/>
-                        </a:rPr>
-                        <a:t>Introduction, Market and Development</a:t>
-                      </a:r>
-                      <a:endParaRPr lang="en-GB" sz="1100" kern="100">
-                        <a:effectLst/>
-                        <a:latin typeface="Aptos" panose="020B0004020202020204" pitchFamily="34" charset="0"/>
-                        <a:ea typeface="DengXian" panose="02010600030101010101" pitchFamily="2" charset="-122"/>
-                        <a:cs typeface="Times New Roman" panose="02020603050405020304" pitchFamily="18" charset="0"/>
-                      </a:endParaRPr>
-                    </a:p>
-                  </a:txBody>
-                  <a:tcPr marL="58420" marR="58420" marT="29210" marB="29210"/>
-                </a:tc>
-                <a:tc>
-                  <a:txBody>
-                    <a:bodyPr/>
-                    <a:lstStyle/>
-                    <a:p>
-                      <a:pPr>
-                        <a:lnSpc>
-                          <a:spcPct val="115000"/>
-                        </a:lnSpc>
-                        <a:buNone/>
-                      </a:pPr>
-                      <a:endParaRPr lang="en-GB" sz="1100" kern="100">
-                        <a:effectLst/>
-                        <a:latin typeface="Aptos" panose="020B0004020202020204" pitchFamily="34" charset="0"/>
-                      </a:endParaRPr>
-                    </a:p>
-                  </a:txBody>
-                  <a:tcPr marL="58420" marR="58420" marT="29210" marB="29210"/>
-                </a:tc>
-                <a:extLst>
-                  <a:ext uri="{0D108BD9-81ED-4DB2-BD59-A6C34878D82A}">
-                    <a16:rowId xmlns:a16="http://schemas.microsoft.com/office/drawing/2014/main" val="3557586900"/>
-                  </a:ext>
-                </a:extLst>
-              </a:tr>
-              <a:tr h="271317">
-                <a:tc>
-                  <a:txBody>
-                    <a:bodyPr/>
-                    <a:lstStyle/>
-                    <a:p>
-                      <a:pPr>
-                        <a:lnSpc>
-                          <a:spcPct val="115000"/>
-                        </a:lnSpc>
-                        <a:spcAft>
-                          <a:spcPts val="800"/>
-                        </a:spcAft>
-                        <a:buNone/>
-                      </a:pPr>
-                      <a:r>
-                        <a:rPr lang="en-US" sz="1100" kern="100">
-                          <a:effectLst/>
-                        </a:rPr>
-                        <a:t>23 March</a:t>
-                      </a:r>
-                      <a:endParaRPr lang="en-GB" sz="1100" kern="100">
-                        <a:effectLst/>
-                        <a:latin typeface="Aptos" panose="020B0004020202020204" pitchFamily="34" charset="0"/>
-                        <a:ea typeface="DengXian" panose="02010600030101010101" pitchFamily="2" charset="-122"/>
-                        <a:cs typeface="Times New Roman" panose="02020603050405020304" pitchFamily="18" charset="0"/>
-                      </a:endParaRPr>
-                    </a:p>
-                  </a:txBody>
-                  <a:tcPr marL="58420" marR="58420" marT="29210" marB="29210"/>
-                </a:tc>
-                <a:tc>
-                  <a:txBody>
-                    <a:bodyPr/>
-                    <a:lstStyle/>
-                    <a:p>
-                      <a:pPr>
-                        <a:lnSpc>
-                          <a:spcPct val="115000"/>
-                        </a:lnSpc>
-                        <a:spcAft>
-                          <a:spcPts val="800"/>
-                        </a:spcAft>
-                        <a:buNone/>
-                      </a:pPr>
-                      <a:r>
-                        <a:rPr lang="en-US" sz="1100" kern="100">
-                          <a:effectLst/>
-                        </a:rPr>
-                        <a:t>2</a:t>
-                      </a:r>
-                      <a:endParaRPr lang="en-GB" sz="1100" kern="100">
-                        <a:effectLst/>
-                        <a:latin typeface="Aptos" panose="020B0004020202020204" pitchFamily="34" charset="0"/>
-                        <a:ea typeface="DengXian" panose="02010600030101010101" pitchFamily="2" charset="-122"/>
-                        <a:cs typeface="Times New Roman" panose="02020603050405020304" pitchFamily="18" charset="0"/>
-                      </a:endParaRPr>
-                    </a:p>
-                  </a:txBody>
-                  <a:tcPr marL="58420" marR="58420" marT="29210" marB="29210"/>
-                </a:tc>
-                <a:tc>
-                  <a:txBody>
-                    <a:bodyPr/>
-                    <a:lstStyle/>
-                    <a:p>
-                      <a:pPr>
-                        <a:lnSpc>
-                          <a:spcPct val="115000"/>
-                        </a:lnSpc>
-                        <a:spcAft>
-                          <a:spcPts val="800"/>
-                        </a:spcAft>
-                        <a:buNone/>
-                      </a:pPr>
-                      <a:r>
-                        <a:rPr lang="en-US" sz="1100" kern="100">
-                          <a:effectLst/>
-                        </a:rPr>
-                        <a:t>9-12</a:t>
-                      </a:r>
-                      <a:endParaRPr lang="en-GB" sz="1100" kern="100">
-                        <a:effectLst/>
-                        <a:latin typeface="Aptos" panose="020B0004020202020204" pitchFamily="34" charset="0"/>
-                        <a:ea typeface="DengXian" panose="02010600030101010101" pitchFamily="2" charset="-122"/>
-                        <a:cs typeface="Times New Roman" panose="02020603050405020304" pitchFamily="18" charset="0"/>
-                      </a:endParaRPr>
-                    </a:p>
-                  </a:txBody>
-                  <a:tcPr marL="58420" marR="58420" marT="29210" marB="29210"/>
-                </a:tc>
-                <a:tc>
-                  <a:txBody>
-                    <a:bodyPr/>
-                    <a:lstStyle/>
-                    <a:p>
-                      <a:pPr>
-                        <a:lnSpc>
-                          <a:spcPct val="115000"/>
-                        </a:lnSpc>
-                        <a:spcAft>
-                          <a:spcPts val="800"/>
-                        </a:spcAft>
-                        <a:buNone/>
-                      </a:pPr>
-                      <a:r>
-                        <a:rPr lang="en-GB" sz="1100" kern="100">
-                          <a:effectLst/>
-                        </a:rPr>
-                        <a:t>CCZ269</a:t>
-                      </a:r>
-                      <a:endParaRPr lang="en-GB" sz="1100" kern="100">
-                        <a:effectLst/>
-                        <a:latin typeface="Aptos" panose="020B0004020202020204" pitchFamily="34" charset="0"/>
-                        <a:ea typeface="DengXian" panose="02010600030101010101" pitchFamily="2" charset="-122"/>
-                        <a:cs typeface="Times New Roman" panose="02020603050405020304" pitchFamily="18" charset="0"/>
-                      </a:endParaRPr>
-                    </a:p>
-                  </a:txBody>
-                  <a:tcPr marL="58420" marR="58420" marT="29210" marB="29210"/>
-                </a:tc>
-                <a:tc>
-                  <a:txBody>
-                    <a:bodyPr/>
-                    <a:lstStyle/>
-                    <a:p>
-                      <a:pPr>
-                        <a:lnSpc>
-                          <a:spcPct val="115000"/>
-                        </a:lnSpc>
-                        <a:spcAft>
-                          <a:spcPts val="800"/>
-                        </a:spcAft>
-                        <a:buNone/>
-                      </a:pPr>
-                      <a:r>
-                        <a:rPr lang="en-US" sz="1100" kern="100">
-                          <a:effectLst/>
-                        </a:rPr>
-                        <a:t>Signals</a:t>
-                      </a:r>
-                      <a:endParaRPr lang="en-GB" sz="1100" kern="100">
-                        <a:effectLst/>
-                        <a:latin typeface="Aptos" panose="020B0004020202020204" pitchFamily="34" charset="0"/>
-                        <a:ea typeface="DengXian" panose="02010600030101010101" pitchFamily="2" charset="-122"/>
-                        <a:cs typeface="Times New Roman" panose="02020603050405020304" pitchFamily="18" charset="0"/>
-                      </a:endParaRPr>
-                    </a:p>
-                  </a:txBody>
-                  <a:tcPr marL="58420" marR="58420" marT="29210" marB="29210"/>
-                </a:tc>
-                <a:tc>
-                  <a:txBody>
-                    <a:bodyPr/>
-                    <a:lstStyle/>
-                    <a:p>
-                      <a:pPr>
-                        <a:lnSpc>
-                          <a:spcPct val="115000"/>
-                        </a:lnSpc>
-                        <a:buNone/>
-                      </a:pPr>
-                      <a:endParaRPr lang="en-GB" sz="1100" kern="100">
-                        <a:effectLst/>
-                        <a:latin typeface="Aptos" panose="020B0004020202020204" pitchFamily="34" charset="0"/>
-                      </a:endParaRPr>
-                    </a:p>
-                  </a:txBody>
-                  <a:tcPr marL="58420" marR="58420" marT="29210" marB="29210"/>
-                </a:tc>
-                <a:extLst>
-                  <a:ext uri="{0D108BD9-81ED-4DB2-BD59-A6C34878D82A}">
-                    <a16:rowId xmlns:a16="http://schemas.microsoft.com/office/drawing/2014/main" val="1338305764"/>
-                  </a:ext>
-                </a:extLst>
-              </a:tr>
-              <a:tr h="271317">
-                <a:tc>
-                  <a:txBody>
-                    <a:bodyPr/>
-                    <a:lstStyle/>
-                    <a:p>
-                      <a:pPr>
-                        <a:lnSpc>
-                          <a:spcPct val="115000"/>
-                        </a:lnSpc>
-                        <a:spcAft>
-                          <a:spcPts val="800"/>
-                        </a:spcAft>
-                        <a:buNone/>
-                      </a:pPr>
-                      <a:r>
-                        <a:rPr lang="en-US" sz="1100" kern="100">
-                          <a:effectLst/>
-                        </a:rPr>
-                        <a:t>24 March</a:t>
-                      </a:r>
-                      <a:endParaRPr lang="en-GB" sz="1100" kern="100">
-                        <a:effectLst/>
-                        <a:latin typeface="Aptos" panose="020B0004020202020204" pitchFamily="34" charset="0"/>
-                        <a:ea typeface="DengXian" panose="02010600030101010101" pitchFamily="2" charset="-122"/>
-                        <a:cs typeface="Times New Roman" panose="02020603050405020304" pitchFamily="18" charset="0"/>
-                      </a:endParaRPr>
-                    </a:p>
-                  </a:txBody>
-                  <a:tcPr marL="58420" marR="58420" marT="29210" marB="29210"/>
-                </a:tc>
-                <a:tc>
-                  <a:txBody>
-                    <a:bodyPr/>
-                    <a:lstStyle/>
-                    <a:p>
-                      <a:pPr>
-                        <a:lnSpc>
-                          <a:spcPct val="115000"/>
-                        </a:lnSpc>
-                        <a:spcAft>
-                          <a:spcPts val="800"/>
-                        </a:spcAft>
-                        <a:buNone/>
-                      </a:pPr>
-                      <a:r>
-                        <a:rPr lang="en-US" sz="1100" kern="100">
-                          <a:effectLst/>
-                        </a:rPr>
-                        <a:t>3</a:t>
-                      </a:r>
-                      <a:endParaRPr lang="en-GB" sz="1100" kern="100">
-                        <a:effectLst/>
-                        <a:latin typeface="Aptos" panose="020B0004020202020204" pitchFamily="34" charset="0"/>
-                        <a:ea typeface="DengXian" panose="02010600030101010101" pitchFamily="2" charset="-122"/>
-                        <a:cs typeface="Times New Roman" panose="02020603050405020304" pitchFamily="18" charset="0"/>
-                      </a:endParaRPr>
-                    </a:p>
-                  </a:txBody>
-                  <a:tcPr marL="58420" marR="58420" marT="29210" marB="29210"/>
-                </a:tc>
-                <a:tc>
-                  <a:txBody>
-                    <a:bodyPr/>
-                    <a:lstStyle/>
-                    <a:p>
-                      <a:pPr>
-                        <a:lnSpc>
-                          <a:spcPct val="115000"/>
-                        </a:lnSpc>
-                        <a:spcAft>
-                          <a:spcPts val="800"/>
-                        </a:spcAft>
-                        <a:buNone/>
-                      </a:pPr>
-                      <a:r>
-                        <a:rPr lang="en-US" sz="1100" kern="100">
-                          <a:effectLst/>
-                        </a:rPr>
-                        <a:t>9-12</a:t>
-                      </a:r>
-                      <a:endParaRPr lang="en-GB" sz="1100" kern="100">
-                        <a:effectLst/>
-                        <a:latin typeface="Aptos" panose="020B0004020202020204" pitchFamily="34" charset="0"/>
-                        <a:ea typeface="DengXian" panose="02010600030101010101" pitchFamily="2" charset="-122"/>
-                        <a:cs typeface="Times New Roman" panose="02020603050405020304" pitchFamily="18" charset="0"/>
-                      </a:endParaRPr>
-                    </a:p>
-                  </a:txBody>
-                  <a:tcPr marL="58420" marR="58420" marT="29210" marB="29210"/>
-                </a:tc>
-                <a:tc>
-                  <a:txBody>
-                    <a:bodyPr/>
-                    <a:lstStyle/>
-                    <a:p>
-                      <a:pPr>
-                        <a:lnSpc>
-                          <a:spcPct val="115000"/>
-                        </a:lnSpc>
-                        <a:spcAft>
-                          <a:spcPts val="800"/>
-                        </a:spcAft>
-                        <a:buNone/>
-                      </a:pPr>
-                      <a:r>
-                        <a:rPr lang="en-GB" sz="1100" kern="100">
-                          <a:effectLst/>
-                        </a:rPr>
-                        <a:t>CCZ312</a:t>
-                      </a:r>
-                      <a:endParaRPr lang="en-GB" sz="1100" kern="100">
-                        <a:effectLst/>
-                        <a:latin typeface="Aptos" panose="020B0004020202020204" pitchFamily="34" charset="0"/>
-                        <a:ea typeface="DengXian" panose="02010600030101010101" pitchFamily="2" charset="-122"/>
-                        <a:cs typeface="Times New Roman" panose="02020603050405020304" pitchFamily="18" charset="0"/>
-                      </a:endParaRPr>
-                    </a:p>
-                  </a:txBody>
-                  <a:tcPr marL="58420" marR="58420" marT="29210" marB="29210"/>
-                </a:tc>
-                <a:tc>
-                  <a:txBody>
-                    <a:bodyPr/>
-                    <a:lstStyle/>
-                    <a:p>
-                      <a:pPr>
-                        <a:lnSpc>
-                          <a:spcPct val="115000"/>
-                        </a:lnSpc>
-                        <a:spcAft>
-                          <a:spcPts val="800"/>
-                        </a:spcAft>
-                        <a:buNone/>
-                      </a:pPr>
-                      <a:r>
-                        <a:rPr lang="en-US" sz="1100" kern="100">
-                          <a:effectLst/>
-                        </a:rPr>
-                        <a:t>Transmission Media</a:t>
-                      </a:r>
-                      <a:endParaRPr lang="en-GB" sz="1100" kern="100">
-                        <a:effectLst/>
-                        <a:latin typeface="Aptos" panose="020B0004020202020204" pitchFamily="34" charset="0"/>
-                        <a:ea typeface="DengXian" panose="02010600030101010101" pitchFamily="2" charset="-122"/>
-                        <a:cs typeface="Times New Roman" panose="02020603050405020304" pitchFamily="18" charset="0"/>
-                      </a:endParaRPr>
-                    </a:p>
-                  </a:txBody>
-                  <a:tcPr marL="58420" marR="58420" marT="29210" marB="29210"/>
-                </a:tc>
-                <a:tc>
-                  <a:txBody>
-                    <a:bodyPr/>
-                    <a:lstStyle/>
-                    <a:p>
-                      <a:pPr>
-                        <a:lnSpc>
-                          <a:spcPct val="115000"/>
-                        </a:lnSpc>
-                        <a:buNone/>
-                      </a:pPr>
-                      <a:endParaRPr lang="en-GB" sz="1100" kern="100">
-                        <a:effectLst/>
-                        <a:latin typeface="Aptos" panose="020B0004020202020204" pitchFamily="34" charset="0"/>
-                      </a:endParaRPr>
-                    </a:p>
-                  </a:txBody>
-                  <a:tcPr marL="58420" marR="58420" marT="29210" marB="29210"/>
-                </a:tc>
-                <a:extLst>
-                  <a:ext uri="{0D108BD9-81ED-4DB2-BD59-A6C34878D82A}">
-                    <a16:rowId xmlns:a16="http://schemas.microsoft.com/office/drawing/2014/main" val="3689709530"/>
-                  </a:ext>
-                </a:extLst>
-              </a:tr>
-              <a:tr h="271317">
-                <a:tc>
-                  <a:txBody>
-                    <a:bodyPr/>
-                    <a:lstStyle/>
-                    <a:p>
-                      <a:pPr>
-                        <a:lnSpc>
-                          <a:spcPct val="115000"/>
-                        </a:lnSpc>
-                        <a:spcAft>
-                          <a:spcPts val="800"/>
-                        </a:spcAft>
-                        <a:buNone/>
-                      </a:pPr>
-                      <a:r>
-                        <a:rPr lang="en-US" sz="1100" kern="100">
-                          <a:effectLst/>
-                        </a:rPr>
-                        <a:t>25 March</a:t>
-                      </a:r>
-                      <a:endParaRPr lang="en-GB" sz="1100" kern="100">
-                        <a:effectLst/>
-                        <a:latin typeface="Aptos" panose="020B0004020202020204" pitchFamily="34" charset="0"/>
-                        <a:ea typeface="DengXian" panose="02010600030101010101" pitchFamily="2" charset="-122"/>
-                        <a:cs typeface="Times New Roman" panose="02020603050405020304" pitchFamily="18" charset="0"/>
-                      </a:endParaRPr>
-                    </a:p>
-                  </a:txBody>
-                  <a:tcPr marL="58420" marR="58420" marT="29210" marB="29210"/>
-                </a:tc>
-                <a:tc>
-                  <a:txBody>
-                    <a:bodyPr/>
-                    <a:lstStyle/>
-                    <a:p>
-                      <a:pPr>
-                        <a:lnSpc>
-                          <a:spcPct val="115000"/>
-                        </a:lnSpc>
-                        <a:spcAft>
-                          <a:spcPts val="800"/>
-                        </a:spcAft>
-                        <a:buNone/>
-                      </a:pPr>
-                      <a:r>
-                        <a:rPr lang="en-US" sz="1100" kern="100">
-                          <a:effectLst/>
-                        </a:rPr>
-                        <a:t>4</a:t>
-                      </a:r>
-                      <a:endParaRPr lang="en-GB" sz="1100" kern="100">
-                        <a:effectLst/>
-                        <a:latin typeface="Aptos" panose="020B0004020202020204" pitchFamily="34" charset="0"/>
-                        <a:ea typeface="DengXian" panose="02010600030101010101" pitchFamily="2" charset="-122"/>
-                        <a:cs typeface="Times New Roman" panose="02020603050405020304" pitchFamily="18" charset="0"/>
-                      </a:endParaRPr>
-                    </a:p>
-                  </a:txBody>
-                  <a:tcPr marL="58420" marR="58420" marT="29210" marB="29210"/>
-                </a:tc>
-                <a:tc>
-                  <a:txBody>
-                    <a:bodyPr/>
-                    <a:lstStyle/>
-                    <a:p>
-                      <a:pPr>
-                        <a:lnSpc>
-                          <a:spcPct val="115000"/>
-                        </a:lnSpc>
-                        <a:spcAft>
-                          <a:spcPts val="800"/>
-                        </a:spcAft>
-                        <a:buNone/>
-                      </a:pPr>
-                      <a:r>
-                        <a:rPr lang="en-US" sz="1100" kern="100">
-                          <a:effectLst/>
-                        </a:rPr>
-                        <a:t>9-12</a:t>
-                      </a:r>
-                      <a:endParaRPr lang="en-GB" sz="1100" kern="100">
-                        <a:effectLst/>
-                        <a:latin typeface="Aptos" panose="020B0004020202020204" pitchFamily="34" charset="0"/>
-                        <a:ea typeface="DengXian" panose="02010600030101010101" pitchFamily="2" charset="-122"/>
-                        <a:cs typeface="Times New Roman" panose="02020603050405020304" pitchFamily="18" charset="0"/>
-                      </a:endParaRPr>
-                    </a:p>
-                  </a:txBody>
-                  <a:tcPr marL="58420" marR="58420" marT="29210" marB="29210"/>
-                </a:tc>
-                <a:tc>
-                  <a:txBody>
-                    <a:bodyPr/>
-                    <a:lstStyle/>
-                    <a:p>
-                      <a:pPr>
-                        <a:lnSpc>
-                          <a:spcPct val="115000"/>
-                        </a:lnSpc>
-                        <a:spcAft>
-                          <a:spcPts val="800"/>
-                        </a:spcAft>
-                        <a:buNone/>
-                      </a:pPr>
-                      <a:r>
-                        <a:rPr lang="en-GB" sz="1100" kern="100">
-                          <a:effectLst/>
-                        </a:rPr>
-                        <a:t>CMP168</a:t>
-                      </a:r>
-                      <a:endParaRPr lang="en-GB" sz="1100" kern="100">
-                        <a:effectLst/>
-                        <a:latin typeface="Aptos" panose="020B0004020202020204" pitchFamily="34" charset="0"/>
-                        <a:ea typeface="DengXian" panose="02010600030101010101" pitchFamily="2" charset="-122"/>
-                        <a:cs typeface="Times New Roman" panose="02020603050405020304" pitchFamily="18" charset="0"/>
-                      </a:endParaRPr>
-                    </a:p>
-                  </a:txBody>
-                  <a:tcPr marL="58420" marR="58420" marT="29210" marB="29210"/>
-                </a:tc>
-                <a:tc>
-                  <a:txBody>
-                    <a:bodyPr/>
-                    <a:lstStyle/>
-                    <a:p>
-                      <a:pPr>
-                        <a:lnSpc>
-                          <a:spcPct val="115000"/>
-                        </a:lnSpc>
-                        <a:spcAft>
-                          <a:spcPts val="800"/>
-                        </a:spcAft>
-                        <a:buNone/>
-                      </a:pPr>
-                      <a:r>
-                        <a:rPr lang="en-US" sz="1100" kern="100">
-                          <a:effectLst/>
-                        </a:rPr>
-                        <a:t>Electrics, Shielding, Connectors</a:t>
-                      </a:r>
-                      <a:endParaRPr lang="en-GB" sz="1100" kern="100">
-                        <a:effectLst/>
-                        <a:latin typeface="Aptos" panose="020B0004020202020204" pitchFamily="34" charset="0"/>
-                        <a:ea typeface="DengXian" panose="02010600030101010101" pitchFamily="2" charset="-122"/>
-                        <a:cs typeface="Times New Roman" panose="02020603050405020304" pitchFamily="18" charset="0"/>
-                      </a:endParaRPr>
-                    </a:p>
-                  </a:txBody>
-                  <a:tcPr marL="58420" marR="58420" marT="29210" marB="29210"/>
-                </a:tc>
-                <a:tc>
-                  <a:txBody>
-                    <a:bodyPr/>
-                    <a:lstStyle/>
-                    <a:p>
-                      <a:pPr>
-                        <a:lnSpc>
-                          <a:spcPct val="115000"/>
-                        </a:lnSpc>
-                        <a:buNone/>
-                      </a:pPr>
-                      <a:endParaRPr lang="en-GB" sz="1100" kern="100">
-                        <a:effectLst/>
-                        <a:latin typeface="Aptos" panose="020B0004020202020204" pitchFamily="34" charset="0"/>
-                      </a:endParaRPr>
-                    </a:p>
-                  </a:txBody>
-                  <a:tcPr marL="58420" marR="58420" marT="29210" marB="29210"/>
-                </a:tc>
-                <a:extLst>
-                  <a:ext uri="{0D108BD9-81ED-4DB2-BD59-A6C34878D82A}">
-                    <a16:rowId xmlns:a16="http://schemas.microsoft.com/office/drawing/2014/main" val="1886287878"/>
-                  </a:ext>
-                </a:extLst>
-              </a:tr>
-              <a:tr h="271317">
-                <a:tc>
-                  <a:txBody>
-                    <a:bodyPr/>
-                    <a:lstStyle/>
-                    <a:p>
-                      <a:pPr>
-                        <a:lnSpc>
-                          <a:spcPct val="115000"/>
-                        </a:lnSpc>
-                        <a:spcAft>
-                          <a:spcPts val="800"/>
-                        </a:spcAft>
-                        <a:buNone/>
-                      </a:pPr>
-                      <a:r>
-                        <a:rPr lang="en-US" sz="1100" kern="100">
-                          <a:effectLst/>
-                        </a:rPr>
-                        <a:t>26 March</a:t>
-                      </a:r>
-                      <a:endParaRPr lang="en-GB" sz="1100" kern="100">
-                        <a:effectLst/>
-                        <a:latin typeface="Aptos" panose="020B0004020202020204" pitchFamily="34" charset="0"/>
-                        <a:ea typeface="DengXian" panose="02010600030101010101" pitchFamily="2" charset="-122"/>
-                        <a:cs typeface="Times New Roman" panose="02020603050405020304" pitchFamily="18" charset="0"/>
-                      </a:endParaRPr>
-                    </a:p>
-                  </a:txBody>
-                  <a:tcPr marL="58420" marR="58420" marT="29210" marB="29210"/>
-                </a:tc>
-                <a:tc>
-                  <a:txBody>
-                    <a:bodyPr/>
-                    <a:lstStyle/>
-                    <a:p>
-                      <a:pPr>
-                        <a:lnSpc>
-                          <a:spcPct val="115000"/>
-                        </a:lnSpc>
-                        <a:spcAft>
-                          <a:spcPts val="800"/>
-                        </a:spcAft>
-                        <a:buNone/>
-                      </a:pPr>
-                      <a:r>
-                        <a:rPr lang="en-GB" sz="1100" kern="100">
-                          <a:effectLst/>
-                        </a:rPr>
-                        <a:t>5</a:t>
-                      </a:r>
-                      <a:endParaRPr lang="en-GB" sz="1100" kern="100">
-                        <a:effectLst/>
-                        <a:latin typeface="Aptos" panose="020B0004020202020204" pitchFamily="34" charset="0"/>
-                        <a:ea typeface="DengXian" panose="02010600030101010101" pitchFamily="2" charset="-122"/>
-                        <a:cs typeface="Times New Roman" panose="02020603050405020304" pitchFamily="18" charset="0"/>
-                      </a:endParaRPr>
-                    </a:p>
-                  </a:txBody>
-                  <a:tcPr marL="58420" marR="58420" marT="29210" marB="29210"/>
-                </a:tc>
-                <a:tc>
-                  <a:txBody>
-                    <a:bodyPr/>
-                    <a:lstStyle/>
-                    <a:p>
-                      <a:pPr>
-                        <a:lnSpc>
-                          <a:spcPct val="115000"/>
-                        </a:lnSpc>
-                        <a:spcAft>
-                          <a:spcPts val="800"/>
-                        </a:spcAft>
-                        <a:buNone/>
-                      </a:pPr>
-                      <a:r>
-                        <a:rPr lang="en-US" sz="1100" kern="100">
-                          <a:effectLst/>
-                        </a:rPr>
-                        <a:t>9-12</a:t>
-                      </a:r>
-                      <a:endParaRPr lang="en-GB" sz="1100" kern="100">
-                        <a:effectLst/>
-                        <a:latin typeface="Aptos" panose="020B0004020202020204" pitchFamily="34" charset="0"/>
-                        <a:ea typeface="DengXian" panose="02010600030101010101" pitchFamily="2" charset="-122"/>
-                        <a:cs typeface="Times New Roman" panose="02020603050405020304" pitchFamily="18" charset="0"/>
-                      </a:endParaRPr>
-                    </a:p>
-                  </a:txBody>
-                  <a:tcPr marL="58420" marR="58420" marT="29210" marB="29210"/>
-                </a:tc>
-                <a:tc>
-                  <a:txBody>
-                    <a:bodyPr/>
-                    <a:lstStyle/>
-                    <a:p>
-                      <a:pPr>
-                        <a:lnSpc>
-                          <a:spcPct val="115000"/>
-                        </a:lnSpc>
-                        <a:spcAft>
-                          <a:spcPts val="800"/>
-                        </a:spcAft>
-                        <a:buNone/>
-                      </a:pPr>
-                      <a:r>
-                        <a:rPr lang="en-GB" sz="1100" kern="100">
-                          <a:effectLst/>
-                        </a:rPr>
-                        <a:t>CMP211</a:t>
-                      </a:r>
-                      <a:endParaRPr lang="en-GB" sz="1100" kern="100">
-                        <a:effectLst/>
-                        <a:latin typeface="Aptos" panose="020B0004020202020204" pitchFamily="34" charset="0"/>
-                        <a:ea typeface="DengXian" panose="02010600030101010101" pitchFamily="2" charset="-122"/>
-                        <a:cs typeface="Times New Roman" panose="02020603050405020304" pitchFamily="18" charset="0"/>
-                      </a:endParaRPr>
-                    </a:p>
-                  </a:txBody>
-                  <a:tcPr marL="58420" marR="58420" marT="29210" marB="29210"/>
-                </a:tc>
-                <a:tc>
-                  <a:txBody>
-                    <a:bodyPr/>
-                    <a:lstStyle/>
-                    <a:p>
-                      <a:pPr>
-                        <a:lnSpc>
-                          <a:spcPct val="115000"/>
-                        </a:lnSpc>
-                        <a:spcAft>
-                          <a:spcPts val="800"/>
-                        </a:spcAft>
-                        <a:buNone/>
-                      </a:pPr>
-                      <a:r>
-                        <a:rPr lang="en-US" sz="1100" kern="100">
-                          <a:effectLst/>
-                        </a:rPr>
-                        <a:t>Modulation and Multiplexing</a:t>
-                      </a:r>
-                      <a:endParaRPr lang="en-GB" sz="1100" kern="100">
-                        <a:effectLst/>
-                        <a:latin typeface="Aptos" panose="020B0004020202020204" pitchFamily="34" charset="0"/>
-                        <a:ea typeface="DengXian" panose="02010600030101010101" pitchFamily="2" charset="-122"/>
-                        <a:cs typeface="Times New Roman" panose="02020603050405020304" pitchFamily="18" charset="0"/>
-                      </a:endParaRPr>
-                    </a:p>
-                  </a:txBody>
-                  <a:tcPr marL="58420" marR="58420" marT="29210" marB="29210"/>
-                </a:tc>
-                <a:tc>
-                  <a:txBody>
-                    <a:bodyPr/>
-                    <a:lstStyle/>
-                    <a:p>
-                      <a:pPr>
-                        <a:lnSpc>
-                          <a:spcPct val="115000"/>
-                        </a:lnSpc>
-                        <a:buNone/>
-                      </a:pPr>
-                      <a:endParaRPr lang="en-GB" sz="1100" kern="100">
-                        <a:effectLst/>
-                        <a:latin typeface="Aptos" panose="020B0004020202020204" pitchFamily="34" charset="0"/>
-                      </a:endParaRPr>
-                    </a:p>
-                  </a:txBody>
-                  <a:tcPr marL="58420" marR="58420" marT="29210" marB="29210"/>
-                </a:tc>
-                <a:extLst>
-                  <a:ext uri="{0D108BD9-81ED-4DB2-BD59-A6C34878D82A}">
-                    <a16:rowId xmlns:a16="http://schemas.microsoft.com/office/drawing/2014/main" val="3390471380"/>
-                  </a:ext>
-                </a:extLst>
-              </a:tr>
-              <a:tr h="271317">
-                <a:tc>
-                  <a:txBody>
-                    <a:bodyPr/>
-                    <a:lstStyle/>
-                    <a:p>
-                      <a:pPr>
-                        <a:lnSpc>
-                          <a:spcPct val="115000"/>
-                        </a:lnSpc>
-                        <a:spcAft>
-                          <a:spcPts val="800"/>
-                        </a:spcAft>
-                        <a:buNone/>
-                      </a:pPr>
-                      <a:r>
-                        <a:rPr lang="en-US" sz="1100" kern="100">
-                          <a:effectLst/>
-                        </a:rPr>
-                        <a:t>13 April </a:t>
-                      </a:r>
-                      <a:endParaRPr lang="en-GB" sz="1100" kern="100">
-                        <a:effectLst/>
-                        <a:latin typeface="Aptos" panose="020B0004020202020204" pitchFamily="34" charset="0"/>
-                        <a:ea typeface="DengXian" panose="02010600030101010101" pitchFamily="2" charset="-122"/>
-                        <a:cs typeface="Times New Roman" panose="02020603050405020304" pitchFamily="18" charset="0"/>
-                      </a:endParaRPr>
-                    </a:p>
-                  </a:txBody>
-                  <a:tcPr marL="58420" marR="58420" marT="29210" marB="29210"/>
-                </a:tc>
-                <a:tc>
-                  <a:txBody>
-                    <a:bodyPr/>
-                    <a:lstStyle/>
-                    <a:p>
-                      <a:pPr>
-                        <a:lnSpc>
-                          <a:spcPct val="115000"/>
-                        </a:lnSpc>
-                        <a:spcAft>
-                          <a:spcPts val="800"/>
-                        </a:spcAft>
-                        <a:buNone/>
-                      </a:pPr>
-                      <a:r>
-                        <a:rPr lang="en-GB" sz="1100" kern="100">
-                          <a:effectLst/>
-                        </a:rPr>
-                        <a:t>6</a:t>
-                      </a:r>
-                      <a:endParaRPr lang="en-GB" sz="1100" kern="100">
-                        <a:effectLst/>
-                        <a:latin typeface="Aptos" panose="020B0004020202020204" pitchFamily="34" charset="0"/>
-                        <a:ea typeface="DengXian" panose="02010600030101010101" pitchFamily="2" charset="-122"/>
-                        <a:cs typeface="Times New Roman" panose="02020603050405020304" pitchFamily="18" charset="0"/>
-                      </a:endParaRPr>
-                    </a:p>
-                  </a:txBody>
-                  <a:tcPr marL="58420" marR="58420" marT="29210" marB="29210"/>
-                </a:tc>
-                <a:tc>
-                  <a:txBody>
-                    <a:bodyPr/>
-                    <a:lstStyle/>
-                    <a:p>
-                      <a:pPr>
-                        <a:lnSpc>
-                          <a:spcPct val="115000"/>
-                        </a:lnSpc>
-                        <a:spcAft>
-                          <a:spcPts val="800"/>
-                        </a:spcAft>
-                        <a:buNone/>
-                      </a:pPr>
-                      <a:r>
-                        <a:rPr lang="en-US" sz="1100" kern="100">
-                          <a:effectLst/>
-                        </a:rPr>
-                        <a:t>9-12</a:t>
-                      </a:r>
-                      <a:endParaRPr lang="en-GB" sz="1100" kern="100">
-                        <a:effectLst/>
-                        <a:latin typeface="Aptos" panose="020B0004020202020204" pitchFamily="34" charset="0"/>
-                        <a:ea typeface="DengXian" panose="02010600030101010101" pitchFamily="2" charset="-122"/>
-                        <a:cs typeface="Times New Roman" panose="02020603050405020304" pitchFamily="18" charset="0"/>
-                      </a:endParaRPr>
-                    </a:p>
-                  </a:txBody>
-                  <a:tcPr marL="58420" marR="58420" marT="29210" marB="29210"/>
-                </a:tc>
-                <a:tc>
-                  <a:txBody>
-                    <a:bodyPr/>
-                    <a:lstStyle/>
-                    <a:p>
-                      <a:pPr>
-                        <a:lnSpc>
-                          <a:spcPct val="115000"/>
-                        </a:lnSpc>
-                        <a:spcAft>
-                          <a:spcPts val="800"/>
-                        </a:spcAft>
-                        <a:buNone/>
-                      </a:pPr>
-                      <a:r>
-                        <a:rPr lang="en-GB" sz="1100" kern="100">
-                          <a:effectLst/>
-                        </a:rPr>
-                        <a:t>CCZ269</a:t>
-                      </a:r>
-                      <a:endParaRPr lang="en-GB" sz="1100" kern="100">
-                        <a:effectLst/>
-                        <a:latin typeface="Aptos" panose="020B0004020202020204" pitchFamily="34" charset="0"/>
-                        <a:ea typeface="DengXian" panose="02010600030101010101" pitchFamily="2" charset="-122"/>
-                        <a:cs typeface="Times New Roman" panose="02020603050405020304" pitchFamily="18" charset="0"/>
-                      </a:endParaRPr>
-                    </a:p>
-                  </a:txBody>
-                  <a:tcPr marL="58420" marR="58420" marT="29210" marB="29210"/>
-                </a:tc>
-                <a:tc>
-                  <a:txBody>
-                    <a:bodyPr/>
-                    <a:lstStyle/>
-                    <a:p>
-                      <a:pPr>
-                        <a:lnSpc>
-                          <a:spcPct val="115000"/>
-                        </a:lnSpc>
-                        <a:spcAft>
-                          <a:spcPts val="800"/>
-                        </a:spcAft>
-                        <a:buNone/>
-                      </a:pPr>
-                      <a:r>
-                        <a:rPr lang="en-US" sz="1100" kern="100">
-                          <a:effectLst/>
-                        </a:rPr>
-                        <a:t>Gamma, OOTF, PQ</a:t>
-                      </a:r>
-                      <a:endParaRPr lang="en-GB" sz="1100" kern="100">
-                        <a:effectLst/>
-                        <a:latin typeface="Aptos" panose="020B0004020202020204" pitchFamily="34" charset="0"/>
-                        <a:ea typeface="DengXian" panose="02010600030101010101" pitchFamily="2" charset="-122"/>
-                        <a:cs typeface="Times New Roman" panose="02020603050405020304" pitchFamily="18" charset="0"/>
-                      </a:endParaRPr>
-                    </a:p>
-                  </a:txBody>
-                  <a:tcPr marL="58420" marR="58420" marT="29210" marB="29210"/>
-                </a:tc>
-                <a:tc>
-                  <a:txBody>
-                    <a:bodyPr/>
-                    <a:lstStyle/>
-                    <a:p>
-                      <a:pPr>
-                        <a:lnSpc>
-                          <a:spcPct val="115000"/>
-                        </a:lnSpc>
-                        <a:buNone/>
-                      </a:pPr>
-                      <a:endParaRPr lang="en-GB" sz="1100" kern="100">
-                        <a:effectLst/>
-                        <a:latin typeface="Aptos" panose="020B0004020202020204" pitchFamily="34" charset="0"/>
-                      </a:endParaRPr>
-                    </a:p>
-                  </a:txBody>
-                  <a:tcPr marL="58420" marR="58420" marT="29210" marB="29210"/>
-                </a:tc>
-                <a:extLst>
-                  <a:ext uri="{0D108BD9-81ED-4DB2-BD59-A6C34878D82A}">
-                    <a16:rowId xmlns:a16="http://schemas.microsoft.com/office/drawing/2014/main" val="1892670609"/>
-                  </a:ext>
-                </a:extLst>
-              </a:tr>
-              <a:tr h="271317">
-                <a:tc>
-                  <a:txBody>
-                    <a:bodyPr/>
-                    <a:lstStyle/>
-                    <a:p>
-                      <a:pPr>
-                        <a:lnSpc>
-                          <a:spcPct val="115000"/>
-                        </a:lnSpc>
-                        <a:spcAft>
-                          <a:spcPts val="800"/>
-                        </a:spcAft>
-                        <a:buNone/>
-                      </a:pPr>
-                      <a:r>
-                        <a:rPr lang="en-US" sz="1100" kern="100">
-                          <a:effectLst/>
-                        </a:rPr>
-                        <a:t>14 April</a:t>
-                      </a:r>
-                      <a:endParaRPr lang="en-GB" sz="1100" kern="100">
-                        <a:effectLst/>
-                        <a:latin typeface="Aptos" panose="020B0004020202020204" pitchFamily="34" charset="0"/>
-                        <a:ea typeface="DengXian" panose="02010600030101010101" pitchFamily="2" charset="-122"/>
-                        <a:cs typeface="Times New Roman" panose="02020603050405020304" pitchFamily="18" charset="0"/>
-                      </a:endParaRPr>
-                    </a:p>
-                  </a:txBody>
-                  <a:tcPr marL="58420" marR="58420" marT="29210" marB="29210"/>
-                </a:tc>
-                <a:tc>
-                  <a:txBody>
-                    <a:bodyPr/>
-                    <a:lstStyle/>
-                    <a:p>
-                      <a:pPr>
-                        <a:lnSpc>
-                          <a:spcPct val="115000"/>
-                        </a:lnSpc>
-                        <a:spcAft>
-                          <a:spcPts val="800"/>
-                        </a:spcAft>
-                        <a:buNone/>
-                      </a:pPr>
-                      <a:r>
-                        <a:rPr lang="en-GB" sz="1100" kern="100">
-                          <a:effectLst/>
-                        </a:rPr>
-                        <a:t>7</a:t>
-                      </a:r>
-                      <a:endParaRPr lang="en-GB" sz="1100" kern="100">
-                        <a:effectLst/>
-                        <a:latin typeface="Aptos" panose="020B0004020202020204" pitchFamily="34" charset="0"/>
-                        <a:ea typeface="DengXian" panose="02010600030101010101" pitchFamily="2" charset="-122"/>
-                        <a:cs typeface="Times New Roman" panose="02020603050405020304" pitchFamily="18" charset="0"/>
-                      </a:endParaRPr>
-                    </a:p>
-                  </a:txBody>
-                  <a:tcPr marL="58420" marR="58420" marT="29210" marB="29210"/>
-                </a:tc>
-                <a:tc>
-                  <a:txBody>
-                    <a:bodyPr/>
-                    <a:lstStyle/>
-                    <a:p>
-                      <a:pPr>
-                        <a:lnSpc>
-                          <a:spcPct val="115000"/>
-                        </a:lnSpc>
-                        <a:spcAft>
-                          <a:spcPts val="800"/>
-                        </a:spcAft>
-                        <a:buNone/>
-                      </a:pPr>
-                      <a:r>
-                        <a:rPr lang="en-US" sz="1100" kern="100">
-                          <a:effectLst/>
-                        </a:rPr>
-                        <a:t>9-12</a:t>
-                      </a:r>
-                      <a:endParaRPr lang="en-GB" sz="1100" kern="100">
-                        <a:effectLst/>
-                        <a:latin typeface="Aptos" panose="020B0004020202020204" pitchFamily="34" charset="0"/>
-                        <a:ea typeface="DengXian" panose="02010600030101010101" pitchFamily="2" charset="-122"/>
-                        <a:cs typeface="Times New Roman" panose="02020603050405020304" pitchFamily="18" charset="0"/>
-                      </a:endParaRPr>
-                    </a:p>
-                  </a:txBody>
-                  <a:tcPr marL="58420" marR="58420" marT="29210" marB="29210"/>
-                </a:tc>
-                <a:tc>
-                  <a:txBody>
-                    <a:bodyPr/>
-                    <a:lstStyle/>
-                    <a:p>
-                      <a:pPr>
-                        <a:lnSpc>
-                          <a:spcPct val="115000"/>
-                        </a:lnSpc>
-                        <a:spcAft>
-                          <a:spcPts val="800"/>
-                        </a:spcAft>
-                        <a:buNone/>
-                      </a:pPr>
-                      <a:r>
-                        <a:rPr lang="en-GB" sz="1100" kern="100">
-                          <a:effectLst/>
-                        </a:rPr>
-                        <a:t>CCZ312</a:t>
-                      </a:r>
-                      <a:endParaRPr lang="en-GB" sz="1100" kern="100">
-                        <a:effectLst/>
-                        <a:latin typeface="Aptos" panose="020B0004020202020204" pitchFamily="34" charset="0"/>
-                        <a:ea typeface="DengXian" panose="02010600030101010101" pitchFamily="2" charset="-122"/>
-                        <a:cs typeface="Times New Roman" panose="02020603050405020304" pitchFamily="18" charset="0"/>
-                      </a:endParaRPr>
-                    </a:p>
-                  </a:txBody>
-                  <a:tcPr marL="58420" marR="58420" marT="29210" marB="29210"/>
-                </a:tc>
-                <a:tc>
-                  <a:txBody>
-                    <a:bodyPr/>
-                    <a:lstStyle/>
-                    <a:p>
-                      <a:pPr>
-                        <a:lnSpc>
-                          <a:spcPct val="115000"/>
-                        </a:lnSpc>
-                        <a:spcAft>
-                          <a:spcPts val="800"/>
-                        </a:spcAft>
-                        <a:buNone/>
-                      </a:pPr>
-                      <a:r>
-                        <a:rPr lang="en-US" sz="1100" kern="100">
-                          <a:effectLst/>
-                        </a:rPr>
-                        <a:t>SDI; Video Test and Measurement</a:t>
-                      </a:r>
-                      <a:endParaRPr lang="en-GB" sz="1100" kern="100">
-                        <a:effectLst/>
-                        <a:latin typeface="Aptos" panose="020B0004020202020204" pitchFamily="34" charset="0"/>
-                        <a:ea typeface="DengXian" panose="02010600030101010101" pitchFamily="2" charset="-122"/>
-                        <a:cs typeface="Times New Roman" panose="02020603050405020304" pitchFamily="18" charset="0"/>
-                      </a:endParaRPr>
-                    </a:p>
-                  </a:txBody>
-                  <a:tcPr marL="58420" marR="58420" marT="29210" marB="29210"/>
-                </a:tc>
-                <a:tc>
-                  <a:txBody>
-                    <a:bodyPr/>
-                    <a:lstStyle/>
-                    <a:p>
-                      <a:pPr>
-                        <a:lnSpc>
-                          <a:spcPct val="115000"/>
-                        </a:lnSpc>
-                        <a:buNone/>
-                      </a:pPr>
-                      <a:endParaRPr lang="en-GB" sz="1100" kern="100">
-                        <a:effectLst/>
-                        <a:latin typeface="Aptos" panose="020B0004020202020204" pitchFamily="34" charset="0"/>
-                      </a:endParaRPr>
-                    </a:p>
-                  </a:txBody>
-                  <a:tcPr marL="58420" marR="58420" marT="29210" marB="29210"/>
-                </a:tc>
-                <a:extLst>
-                  <a:ext uri="{0D108BD9-81ED-4DB2-BD59-A6C34878D82A}">
-                    <a16:rowId xmlns:a16="http://schemas.microsoft.com/office/drawing/2014/main" val="4024183465"/>
-                  </a:ext>
-                </a:extLst>
-              </a:tr>
-              <a:tr h="271317">
-                <a:tc>
-                  <a:txBody>
-                    <a:bodyPr/>
-                    <a:lstStyle/>
-                    <a:p>
-                      <a:pPr>
-                        <a:lnSpc>
-                          <a:spcPct val="115000"/>
-                        </a:lnSpc>
-                        <a:spcAft>
-                          <a:spcPts val="800"/>
-                        </a:spcAft>
-                        <a:buNone/>
-                      </a:pPr>
-                      <a:r>
-                        <a:rPr lang="en-US" sz="1100" kern="100">
-                          <a:effectLst/>
-                        </a:rPr>
-                        <a:t>15 April</a:t>
-                      </a:r>
-                      <a:endParaRPr lang="en-GB" sz="1100" kern="100">
-                        <a:effectLst/>
-                        <a:latin typeface="Aptos" panose="020B0004020202020204" pitchFamily="34" charset="0"/>
-                        <a:ea typeface="DengXian" panose="02010600030101010101" pitchFamily="2" charset="-122"/>
-                        <a:cs typeface="Times New Roman" panose="02020603050405020304" pitchFamily="18" charset="0"/>
-                      </a:endParaRPr>
-                    </a:p>
-                  </a:txBody>
-                  <a:tcPr marL="58420" marR="58420" marT="29210" marB="29210"/>
-                </a:tc>
-                <a:tc>
-                  <a:txBody>
-                    <a:bodyPr/>
-                    <a:lstStyle/>
-                    <a:p>
-                      <a:pPr>
-                        <a:lnSpc>
-                          <a:spcPct val="115000"/>
-                        </a:lnSpc>
-                        <a:spcAft>
-                          <a:spcPts val="800"/>
-                        </a:spcAft>
-                        <a:buNone/>
-                      </a:pPr>
-                      <a:r>
-                        <a:rPr lang="en-US" sz="1100" kern="100">
-                          <a:effectLst/>
-                        </a:rPr>
-                        <a:t>8</a:t>
-                      </a:r>
-                      <a:endParaRPr lang="en-GB" sz="1100" kern="100">
-                        <a:effectLst/>
-                        <a:latin typeface="Aptos" panose="020B0004020202020204" pitchFamily="34" charset="0"/>
-                        <a:ea typeface="DengXian" panose="02010600030101010101" pitchFamily="2" charset="-122"/>
-                        <a:cs typeface="Times New Roman" panose="02020603050405020304" pitchFamily="18" charset="0"/>
-                      </a:endParaRPr>
-                    </a:p>
-                  </a:txBody>
-                  <a:tcPr marL="58420" marR="58420" marT="29210" marB="29210"/>
-                </a:tc>
-                <a:tc>
-                  <a:txBody>
-                    <a:bodyPr/>
-                    <a:lstStyle/>
-                    <a:p>
-                      <a:pPr>
-                        <a:lnSpc>
-                          <a:spcPct val="115000"/>
-                        </a:lnSpc>
-                        <a:spcAft>
-                          <a:spcPts val="800"/>
-                        </a:spcAft>
-                        <a:buNone/>
-                      </a:pPr>
-                      <a:r>
-                        <a:rPr lang="en-US" sz="1100" kern="100">
-                          <a:effectLst/>
-                        </a:rPr>
-                        <a:t>9-12</a:t>
-                      </a:r>
-                      <a:endParaRPr lang="en-GB" sz="1100" kern="100">
-                        <a:effectLst/>
-                        <a:latin typeface="Aptos" panose="020B0004020202020204" pitchFamily="34" charset="0"/>
-                        <a:ea typeface="DengXian" panose="02010600030101010101" pitchFamily="2" charset="-122"/>
-                        <a:cs typeface="Times New Roman" panose="02020603050405020304" pitchFamily="18" charset="0"/>
-                      </a:endParaRPr>
-                    </a:p>
-                  </a:txBody>
-                  <a:tcPr marL="58420" marR="58420" marT="29210" marB="29210"/>
-                </a:tc>
-                <a:tc>
-                  <a:txBody>
-                    <a:bodyPr/>
-                    <a:lstStyle/>
-                    <a:p>
-                      <a:pPr>
-                        <a:lnSpc>
-                          <a:spcPct val="115000"/>
-                        </a:lnSpc>
-                        <a:spcAft>
-                          <a:spcPts val="800"/>
-                        </a:spcAft>
-                        <a:buNone/>
-                      </a:pPr>
-                      <a:r>
-                        <a:rPr lang="en-US" sz="1100" kern="100">
-                          <a:effectLst/>
-                        </a:rPr>
-                        <a:t>CMP168</a:t>
-                      </a:r>
-                      <a:endParaRPr lang="en-GB" sz="1100" kern="100">
-                        <a:effectLst/>
-                        <a:latin typeface="Aptos" panose="020B0004020202020204" pitchFamily="34" charset="0"/>
-                        <a:ea typeface="DengXian" panose="02010600030101010101" pitchFamily="2" charset="-122"/>
-                        <a:cs typeface="Times New Roman" panose="02020603050405020304" pitchFamily="18" charset="0"/>
-                      </a:endParaRPr>
-                    </a:p>
-                  </a:txBody>
-                  <a:tcPr marL="58420" marR="58420" marT="29210" marB="29210"/>
-                </a:tc>
-                <a:tc>
-                  <a:txBody>
-                    <a:bodyPr/>
-                    <a:lstStyle/>
-                    <a:p>
-                      <a:pPr>
-                        <a:lnSpc>
-                          <a:spcPct val="115000"/>
-                        </a:lnSpc>
-                        <a:spcAft>
-                          <a:spcPts val="800"/>
-                        </a:spcAft>
-                        <a:buNone/>
-                      </a:pPr>
-                      <a:r>
-                        <a:rPr lang="en-US" sz="1100" kern="100">
-                          <a:effectLst/>
-                        </a:rPr>
-                        <a:t>Packet Media, Compression</a:t>
-                      </a:r>
-                      <a:endParaRPr lang="en-GB" sz="1100" kern="100">
-                        <a:effectLst/>
-                        <a:latin typeface="Aptos" panose="020B0004020202020204" pitchFamily="34" charset="0"/>
-                        <a:ea typeface="DengXian" panose="02010600030101010101" pitchFamily="2" charset="-122"/>
-                        <a:cs typeface="Times New Roman" panose="02020603050405020304" pitchFamily="18" charset="0"/>
-                      </a:endParaRPr>
-                    </a:p>
-                  </a:txBody>
-                  <a:tcPr marL="58420" marR="58420" marT="29210" marB="29210"/>
-                </a:tc>
-                <a:tc>
-                  <a:txBody>
-                    <a:bodyPr/>
-                    <a:lstStyle/>
-                    <a:p>
-                      <a:pPr>
-                        <a:lnSpc>
-                          <a:spcPct val="115000"/>
-                        </a:lnSpc>
-                        <a:buNone/>
-                      </a:pPr>
-                      <a:endParaRPr lang="en-GB" sz="1100" kern="100">
-                        <a:effectLst/>
-                        <a:latin typeface="Aptos" panose="020B0004020202020204" pitchFamily="34" charset="0"/>
-                      </a:endParaRPr>
-                    </a:p>
-                  </a:txBody>
-                  <a:tcPr marL="58420" marR="58420" marT="29210" marB="29210"/>
-                </a:tc>
-                <a:extLst>
-                  <a:ext uri="{0D108BD9-81ED-4DB2-BD59-A6C34878D82A}">
-                    <a16:rowId xmlns:a16="http://schemas.microsoft.com/office/drawing/2014/main" val="3577636344"/>
-                  </a:ext>
-                </a:extLst>
-              </a:tr>
-              <a:tr h="271317">
-                <a:tc>
-                  <a:txBody>
-                    <a:bodyPr/>
-                    <a:lstStyle/>
-                    <a:p>
-                      <a:pPr>
-                        <a:lnSpc>
-                          <a:spcPct val="115000"/>
-                        </a:lnSpc>
-                        <a:spcAft>
-                          <a:spcPts val="800"/>
-                        </a:spcAft>
-                        <a:buNone/>
-                      </a:pPr>
-                      <a:r>
-                        <a:rPr lang="en-US" sz="1100" kern="100">
-                          <a:effectLst/>
-                        </a:rPr>
-                        <a:t>16 April</a:t>
-                      </a:r>
-                      <a:endParaRPr lang="en-GB" sz="1100" kern="100">
-                        <a:effectLst/>
-                        <a:latin typeface="Aptos" panose="020B0004020202020204" pitchFamily="34" charset="0"/>
-                        <a:ea typeface="DengXian" panose="02010600030101010101" pitchFamily="2" charset="-122"/>
-                        <a:cs typeface="Times New Roman" panose="02020603050405020304" pitchFamily="18" charset="0"/>
-                      </a:endParaRPr>
-                    </a:p>
-                  </a:txBody>
-                  <a:tcPr marL="58420" marR="58420" marT="29210" marB="29210"/>
-                </a:tc>
-                <a:tc>
-                  <a:txBody>
-                    <a:bodyPr/>
-                    <a:lstStyle/>
-                    <a:p>
-                      <a:pPr>
-                        <a:lnSpc>
-                          <a:spcPct val="115000"/>
-                        </a:lnSpc>
-                        <a:spcAft>
-                          <a:spcPts val="800"/>
-                        </a:spcAft>
-                        <a:buNone/>
-                      </a:pPr>
-                      <a:r>
-                        <a:rPr lang="en-US" sz="1100" kern="100">
-                          <a:effectLst/>
-                        </a:rPr>
-                        <a:t>9</a:t>
-                      </a:r>
-                      <a:endParaRPr lang="en-GB" sz="1100" kern="100">
-                        <a:effectLst/>
-                        <a:latin typeface="Aptos" panose="020B0004020202020204" pitchFamily="34" charset="0"/>
-                        <a:ea typeface="DengXian" panose="02010600030101010101" pitchFamily="2" charset="-122"/>
-                        <a:cs typeface="Times New Roman" panose="02020603050405020304" pitchFamily="18" charset="0"/>
-                      </a:endParaRPr>
-                    </a:p>
-                  </a:txBody>
-                  <a:tcPr marL="58420" marR="58420" marT="29210" marB="29210"/>
-                </a:tc>
-                <a:tc>
-                  <a:txBody>
-                    <a:bodyPr/>
-                    <a:lstStyle/>
-                    <a:p>
-                      <a:pPr>
-                        <a:lnSpc>
-                          <a:spcPct val="115000"/>
-                        </a:lnSpc>
-                        <a:spcAft>
-                          <a:spcPts val="800"/>
-                        </a:spcAft>
-                        <a:buNone/>
-                      </a:pPr>
-                      <a:r>
-                        <a:rPr lang="en-US" sz="1100" kern="100">
-                          <a:effectLst/>
-                        </a:rPr>
-                        <a:t>9-12</a:t>
-                      </a:r>
-                      <a:endParaRPr lang="en-GB" sz="1100" kern="100">
-                        <a:effectLst/>
-                        <a:latin typeface="Aptos" panose="020B0004020202020204" pitchFamily="34" charset="0"/>
-                        <a:ea typeface="DengXian" panose="02010600030101010101" pitchFamily="2" charset="-122"/>
-                        <a:cs typeface="Times New Roman" panose="02020603050405020304" pitchFamily="18" charset="0"/>
-                      </a:endParaRPr>
-                    </a:p>
-                  </a:txBody>
-                  <a:tcPr marL="58420" marR="58420" marT="29210" marB="29210"/>
-                </a:tc>
-                <a:tc>
-                  <a:txBody>
-                    <a:bodyPr/>
-                    <a:lstStyle/>
-                    <a:p>
-                      <a:pPr>
-                        <a:lnSpc>
-                          <a:spcPct val="115000"/>
-                        </a:lnSpc>
-                        <a:spcAft>
-                          <a:spcPts val="800"/>
-                        </a:spcAft>
-                        <a:buNone/>
-                      </a:pPr>
-                      <a:r>
-                        <a:rPr lang="en-GB" sz="1100" kern="100">
-                          <a:effectLst/>
-                        </a:rPr>
-                        <a:t>CMP211</a:t>
-                      </a:r>
-                      <a:endParaRPr lang="en-GB" sz="1100" kern="100">
-                        <a:effectLst/>
-                        <a:latin typeface="Aptos" panose="020B0004020202020204" pitchFamily="34" charset="0"/>
-                        <a:ea typeface="DengXian" panose="02010600030101010101" pitchFamily="2" charset="-122"/>
-                        <a:cs typeface="Times New Roman" panose="02020603050405020304" pitchFamily="18" charset="0"/>
-                      </a:endParaRPr>
-                    </a:p>
-                  </a:txBody>
-                  <a:tcPr marL="58420" marR="58420" marT="29210" marB="29210"/>
-                </a:tc>
-                <a:tc>
-                  <a:txBody>
-                    <a:bodyPr/>
-                    <a:lstStyle/>
-                    <a:p>
-                      <a:pPr>
-                        <a:lnSpc>
-                          <a:spcPct val="115000"/>
-                        </a:lnSpc>
-                        <a:spcAft>
-                          <a:spcPts val="800"/>
-                        </a:spcAft>
-                        <a:buNone/>
-                      </a:pPr>
-                      <a:r>
-                        <a:rPr lang="en-US" sz="1100" kern="100">
-                          <a:effectLst/>
-                        </a:rPr>
-                        <a:t>Compression (cont’d), Packet Media Transport</a:t>
-                      </a:r>
-                      <a:endParaRPr lang="en-GB" sz="1100" kern="100">
-                        <a:effectLst/>
-                        <a:latin typeface="Aptos" panose="020B0004020202020204" pitchFamily="34" charset="0"/>
-                        <a:ea typeface="DengXian" panose="02010600030101010101" pitchFamily="2" charset="-122"/>
-                        <a:cs typeface="Times New Roman" panose="02020603050405020304" pitchFamily="18" charset="0"/>
-                      </a:endParaRPr>
-                    </a:p>
-                  </a:txBody>
-                  <a:tcPr marL="58420" marR="58420" marT="29210" marB="29210"/>
-                </a:tc>
-                <a:tc>
-                  <a:txBody>
-                    <a:bodyPr/>
-                    <a:lstStyle/>
-                    <a:p>
-                      <a:pPr>
-                        <a:lnSpc>
-                          <a:spcPct val="115000"/>
-                        </a:lnSpc>
-                        <a:buNone/>
-                      </a:pPr>
-                      <a:endParaRPr lang="en-GB" sz="1100" kern="100">
-                        <a:effectLst/>
-                        <a:latin typeface="Aptos" panose="020B0004020202020204" pitchFamily="34" charset="0"/>
-                      </a:endParaRPr>
-                    </a:p>
-                  </a:txBody>
-                  <a:tcPr marL="58420" marR="58420" marT="29210" marB="29210"/>
-                </a:tc>
-                <a:extLst>
-                  <a:ext uri="{0D108BD9-81ED-4DB2-BD59-A6C34878D82A}">
-                    <a16:rowId xmlns:a16="http://schemas.microsoft.com/office/drawing/2014/main" val="605137752"/>
-                  </a:ext>
-                </a:extLst>
-              </a:tr>
-              <a:tr h="271317">
-                <a:tc>
-                  <a:txBody>
-                    <a:bodyPr/>
-                    <a:lstStyle/>
-                    <a:p>
-                      <a:pPr>
-                        <a:lnSpc>
-                          <a:spcPct val="115000"/>
-                        </a:lnSpc>
-                        <a:spcAft>
-                          <a:spcPts val="800"/>
-                        </a:spcAft>
-                        <a:buNone/>
-                      </a:pPr>
-                      <a:r>
-                        <a:rPr lang="en-US" sz="1100" kern="100">
-                          <a:effectLst/>
-                        </a:rPr>
-                        <a:t>21 April</a:t>
-                      </a:r>
-                      <a:endParaRPr lang="en-GB" sz="1100" kern="100">
-                        <a:effectLst/>
-                        <a:latin typeface="Aptos" panose="020B0004020202020204" pitchFamily="34" charset="0"/>
-                        <a:ea typeface="DengXian" panose="02010600030101010101" pitchFamily="2" charset="-122"/>
-                        <a:cs typeface="Times New Roman" panose="02020603050405020304" pitchFamily="18" charset="0"/>
-                      </a:endParaRPr>
-                    </a:p>
-                  </a:txBody>
-                  <a:tcPr marL="58420" marR="58420" marT="29210" marB="29210"/>
-                </a:tc>
-                <a:tc>
-                  <a:txBody>
-                    <a:bodyPr/>
-                    <a:lstStyle/>
-                    <a:p>
-                      <a:pPr>
-                        <a:lnSpc>
-                          <a:spcPct val="115000"/>
-                        </a:lnSpc>
-                        <a:spcAft>
-                          <a:spcPts val="800"/>
-                        </a:spcAft>
-                        <a:buNone/>
-                      </a:pPr>
-                      <a:r>
-                        <a:rPr lang="en-US" sz="1100" kern="100">
-                          <a:effectLst/>
-                        </a:rPr>
-                        <a:t>10</a:t>
-                      </a:r>
-                      <a:endParaRPr lang="en-GB" sz="1100" kern="100">
-                        <a:effectLst/>
-                        <a:latin typeface="Aptos" panose="020B0004020202020204" pitchFamily="34" charset="0"/>
-                        <a:ea typeface="DengXian" panose="02010600030101010101" pitchFamily="2" charset="-122"/>
-                        <a:cs typeface="Times New Roman" panose="02020603050405020304" pitchFamily="18" charset="0"/>
-                      </a:endParaRPr>
-                    </a:p>
-                  </a:txBody>
-                  <a:tcPr marL="58420" marR="58420" marT="29210" marB="29210"/>
-                </a:tc>
-                <a:tc>
-                  <a:txBody>
-                    <a:bodyPr/>
-                    <a:lstStyle/>
-                    <a:p>
-                      <a:pPr>
-                        <a:lnSpc>
-                          <a:spcPct val="115000"/>
-                        </a:lnSpc>
-                        <a:spcAft>
-                          <a:spcPts val="800"/>
-                        </a:spcAft>
-                        <a:buNone/>
-                      </a:pPr>
-                      <a:r>
-                        <a:rPr lang="en-US" sz="1100" kern="100">
-                          <a:effectLst/>
-                        </a:rPr>
-                        <a:t>9-12</a:t>
-                      </a:r>
-                      <a:endParaRPr lang="en-GB" sz="1100" kern="100">
-                        <a:effectLst/>
-                        <a:latin typeface="Aptos" panose="020B0004020202020204" pitchFamily="34" charset="0"/>
-                        <a:ea typeface="DengXian" panose="02010600030101010101" pitchFamily="2" charset="-122"/>
-                        <a:cs typeface="Times New Roman" panose="02020603050405020304" pitchFamily="18" charset="0"/>
-                      </a:endParaRPr>
-                    </a:p>
-                  </a:txBody>
-                  <a:tcPr marL="58420" marR="58420" marT="29210" marB="29210"/>
-                </a:tc>
-                <a:tc>
-                  <a:txBody>
-                    <a:bodyPr/>
-                    <a:lstStyle/>
-                    <a:p>
-                      <a:pPr>
-                        <a:lnSpc>
-                          <a:spcPct val="115000"/>
-                        </a:lnSpc>
-                        <a:spcAft>
-                          <a:spcPts val="800"/>
-                        </a:spcAft>
-                        <a:buNone/>
-                      </a:pPr>
-                      <a:r>
-                        <a:rPr lang="en-GB" sz="1100" kern="100">
-                          <a:effectLst/>
-                        </a:rPr>
-                        <a:t>online</a:t>
-                      </a:r>
-                      <a:endParaRPr lang="en-GB" sz="1100" kern="100">
-                        <a:effectLst/>
-                        <a:latin typeface="Aptos" panose="020B0004020202020204" pitchFamily="34" charset="0"/>
-                        <a:ea typeface="DengXian" panose="02010600030101010101" pitchFamily="2" charset="-122"/>
-                        <a:cs typeface="Times New Roman" panose="02020603050405020304" pitchFamily="18" charset="0"/>
-                      </a:endParaRPr>
-                    </a:p>
-                  </a:txBody>
-                  <a:tcPr marL="58420" marR="58420" marT="29210" marB="29210"/>
-                </a:tc>
-                <a:tc>
-                  <a:txBody>
-                    <a:bodyPr/>
-                    <a:lstStyle/>
-                    <a:p>
-                      <a:pPr>
-                        <a:lnSpc>
-                          <a:spcPct val="115000"/>
-                        </a:lnSpc>
-                        <a:spcAft>
-                          <a:spcPts val="800"/>
-                        </a:spcAft>
-                        <a:buNone/>
-                      </a:pPr>
-                      <a:r>
-                        <a:rPr lang="en-US" sz="1100" kern="100">
-                          <a:effectLst/>
-                        </a:rPr>
-                        <a:t>The Legacy of Analogue; Light and Control</a:t>
-                      </a:r>
-                      <a:endParaRPr lang="en-GB" sz="1100" kern="100">
-                        <a:effectLst/>
-                        <a:latin typeface="Aptos" panose="020B0004020202020204" pitchFamily="34" charset="0"/>
-                        <a:ea typeface="DengXian" panose="02010600030101010101" pitchFamily="2" charset="-122"/>
-                        <a:cs typeface="Times New Roman" panose="02020603050405020304" pitchFamily="18" charset="0"/>
-                      </a:endParaRPr>
-                    </a:p>
-                  </a:txBody>
-                  <a:tcPr marL="58420" marR="58420" marT="29210" marB="29210"/>
-                </a:tc>
-                <a:tc>
-                  <a:txBody>
-                    <a:bodyPr/>
-                    <a:lstStyle/>
-                    <a:p>
-                      <a:pPr>
-                        <a:lnSpc>
-                          <a:spcPct val="115000"/>
-                        </a:lnSpc>
-                        <a:buNone/>
-                      </a:pPr>
-                      <a:endParaRPr lang="en-GB" sz="1100" kern="100">
-                        <a:effectLst/>
-                        <a:latin typeface="Aptos" panose="020B0004020202020204" pitchFamily="34" charset="0"/>
-                      </a:endParaRPr>
-                    </a:p>
-                  </a:txBody>
-                  <a:tcPr marL="58420" marR="58420" marT="29210" marB="29210"/>
-                </a:tc>
-                <a:extLst>
-                  <a:ext uri="{0D108BD9-81ED-4DB2-BD59-A6C34878D82A}">
-                    <a16:rowId xmlns:a16="http://schemas.microsoft.com/office/drawing/2014/main" val="2052684594"/>
-                  </a:ext>
-                </a:extLst>
-              </a:tr>
-              <a:tr h="271317">
-                <a:tc>
-                  <a:txBody>
-                    <a:bodyPr/>
-                    <a:lstStyle/>
-                    <a:p>
-                      <a:pPr>
-                        <a:lnSpc>
-                          <a:spcPct val="115000"/>
-                        </a:lnSpc>
-                        <a:spcAft>
-                          <a:spcPts val="800"/>
-                        </a:spcAft>
-                        <a:buNone/>
-                      </a:pPr>
-                      <a:r>
-                        <a:rPr lang="en-US" sz="1100" kern="100">
-                          <a:effectLst/>
-                        </a:rPr>
-                        <a:t>27 April</a:t>
-                      </a:r>
-                      <a:endParaRPr lang="en-GB" sz="1100" kern="100">
-                        <a:effectLst/>
-                        <a:latin typeface="Aptos" panose="020B0004020202020204" pitchFamily="34" charset="0"/>
-                        <a:ea typeface="DengXian" panose="02010600030101010101" pitchFamily="2" charset="-122"/>
-                        <a:cs typeface="Times New Roman" panose="02020603050405020304" pitchFamily="18" charset="0"/>
-                      </a:endParaRPr>
-                    </a:p>
-                  </a:txBody>
-                  <a:tcPr marL="58420" marR="58420" marT="29210" marB="29210"/>
-                </a:tc>
-                <a:tc>
-                  <a:txBody>
-                    <a:bodyPr/>
-                    <a:lstStyle/>
-                    <a:p>
-                      <a:pPr>
-                        <a:lnSpc>
-                          <a:spcPct val="115000"/>
-                        </a:lnSpc>
-                        <a:spcAft>
-                          <a:spcPts val="800"/>
-                        </a:spcAft>
-                        <a:buNone/>
-                      </a:pPr>
-                      <a:r>
-                        <a:rPr lang="en-US" sz="1100" kern="100">
-                          <a:effectLst/>
-                        </a:rPr>
-                        <a:t>11</a:t>
-                      </a:r>
-                      <a:endParaRPr lang="en-GB" sz="1100" kern="100">
-                        <a:effectLst/>
-                        <a:latin typeface="Aptos" panose="020B0004020202020204" pitchFamily="34" charset="0"/>
-                        <a:ea typeface="DengXian" panose="02010600030101010101" pitchFamily="2" charset="-122"/>
-                        <a:cs typeface="Times New Roman" panose="02020603050405020304" pitchFamily="18" charset="0"/>
-                      </a:endParaRPr>
-                    </a:p>
-                  </a:txBody>
-                  <a:tcPr marL="58420" marR="58420" marT="29210" marB="29210"/>
-                </a:tc>
-                <a:tc>
-                  <a:txBody>
-                    <a:bodyPr/>
-                    <a:lstStyle/>
-                    <a:p>
-                      <a:pPr>
-                        <a:lnSpc>
-                          <a:spcPct val="115000"/>
-                        </a:lnSpc>
-                        <a:spcAft>
-                          <a:spcPts val="800"/>
-                        </a:spcAft>
-                        <a:buNone/>
-                      </a:pPr>
-                      <a:r>
-                        <a:rPr lang="en-US" sz="1100" kern="100">
-                          <a:effectLst/>
-                        </a:rPr>
-                        <a:t>9-12</a:t>
-                      </a:r>
-                      <a:endParaRPr lang="en-GB" sz="1100" kern="100">
-                        <a:effectLst/>
-                        <a:latin typeface="Aptos" panose="020B0004020202020204" pitchFamily="34" charset="0"/>
-                        <a:ea typeface="DengXian" panose="02010600030101010101" pitchFamily="2" charset="-122"/>
-                        <a:cs typeface="Times New Roman" panose="02020603050405020304" pitchFamily="18" charset="0"/>
-                      </a:endParaRPr>
-                    </a:p>
-                  </a:txBody>
-                  <a:tcPr marL="58420" marR="58420" marT="29210" marB="29210"/>
-                </a:tc>
-                <a:tc>
-                  <a:txBody>
-                    <a:bodyPr/>
-                    <a:lstStyle/>
-                    <a:p>
-                      <a:pPr>
-                        <a:lnSpc>
-                          <a:spcPct val="115000"/>
-                        </a:lnSpc>
-                        <a:spcAft>
-                          <a:spcPts val="800"/>
-                        </a:spcAft>
-                        <a:buNone/>
-                      </a:pPr>
-                      <a:r>
-                        <a:rPr lang="en-GB" sz="1100" kern="100">
-                          <a:effectLst/>
-                        </a:rPr>
-                        <a:t>CCZ269</a:t>
-                      </a:r>
-                      <a:endParaRPr lang="en-GB" sz="1100" kern="100">
-                        <a:effectLst/>
-                        <a:latin typeface="Aptos" panose="020B0004020202020204" pitchFamily="34" charset="0"/>
-                        <a:ea typeface="DengXian" panose="02010600030101010101" pitchFamily="2" charset="-122"/>
-                        <a:cs typeface="Times New Roman" panose="02020603050405020304" pitchFamily="18" charset="0"/>
-                      </a:endParaRPr>
-                    </a:p>
-                  </a:txBody>
-                  <a:tcPr marL="58420" marR="58420" marT="29210" marB="29210"/>
-                </a:tc>
-                <a:tc>
-                  <a:txBody>
-                    <a:bodyPr/>
-                    <a:lstStyle/>
-                    <a:p>
-                      <a:pPr>
-                        <a:lnSpc>
-                          <a:spcPct val="115000"/>
-                        </a:lnSpc>
-                        <a:spcAft>
-                          <a:spcPts val="800"/>
-                        </a:spcAft>
-                        <a:buNone/>
-                      </a:pPr>
-                      <a:r>
-                        <a:rPr lang="en-US" sz="1100" kern="100">
-                          <a:effectLst/>
-                        </a:rPr>
-                        <a:t>TV Standards</a:t>
-                      </a:r>
-                      <a:endParaRPr lang="en-GB" sz="1100" kern="100">
-                        <a:effectLst/>
-                        <a:latin typeface="Aptos" panose="020B0004020202020204" pitchFamily="34" charset="0"/>
-                        <a:ea typeface="DengXian" panose="02010600030101010101" pitchFamily="2" charset="-122"/>
-                        <a:cs typeface="Times New Roman" panose="02020603050405020304" pitchFamily="18" charset="0"/>
-                      </a:endParaRPr>
-                    </a:p>
-                  </a:txBody>
-                  <a:tcPr marL="58420" marR="58420" marT="29210" marB="29210"/>
-                </a:tc>
-                <a:tc>
-                  <a:txBody>
-                    <a:bodyPr/>
-                    <a:lstStyle/>
-                    <a:p>
-                      <a:pPr>
-                        <a:lnSpc>
-                          <a:spcPct val="115000"/>
-                        </a:lnSpc>
-                        <a:buNone/>
-                      </a:pPr>
-                      <a:endParaRPr lang="en-GB" sz="1100" kern="100">
-                        <a:effectLst/>
-                        <a:latin typeface="Aptos" panose="020B0004020202020204" pitchFamily="34" charset="0"/>
-                      </a:endParaRPr>
-                    </a:p>
-                  </a:txBody>
-                  <a:tcPr marL="58420" marR="58420" marT="29210" marB="29210"/>
-                </a:tc>
-                <a:extLst>
-                  <a:ext uri="{0D108BD9-81ED-4DB2-BD59-A6C34878D82A}">
-                    <a16:rowId xmlns:a16="http://schemas.microsoft.com/office/drawing/2014/main" val="4069672518"/>
-                  </a:ext>
-                </a:extLst>
-              </a:tr>
-              <a:tr h="271317">
-                <a:tc>
-                  <a:txBody>
-                    <a:bodyPr/>
-                    <a:lstStyle/>
-                    <a:p>
-                      <a:pPr>
-                        <a:lnSpc>
-                          <a:spcPct val="115000"/>
-                        </a:lnSpc>
-                        <a:spcAft>
-                          <a:spcPts val="800"/>
-                        </a:spcAft>
-                        <a:buNone/>
-                      </a:pPr>
-                      <a:r>
-                        <a:rPr lang="en-US" sz="1100" kern="100">
-                          <a:effectLst/>
-                        </a:rPr>
-                        <a:t>5 May</a:t>
-                      </a:r>
-                      <a:endParaRPr lang="en-GB" sz="1100" kern="100">
-                        <a:effectLst/>
-                        <a:latin typeface="Aptos" panose="020B0004020202020204" pitchFamily="34" charset="0"/>
-                        <a:ea typeface="DengXian" panose="02010600030101010101" pitchFamily="2" charset="-122"/>
-                        <a:cs typeface="Times New Roman" panose="02020603050405020304" pitchFamily="18" charset="0"/>
-                      </a:endParaRPr>
-                    </a:p>
-                  </a:txBody>
-                  <a:tcPr marL="58420" marR="58420" marT="29210" marB="29210"/>
-                </a:tc>
-                <a:tc>
-                  <a:txBody>
-                    <a:bodyPr/>
-                    <a:lstStyle/>
-                    <a:p>
-                      <a:pPr>
-                        <a:lnSpc>
-                          <a:spcPct val="115000"/>
-                        </a:lnSpc>
-                        <a:spcAft>
-                          <a:spcPts val="800"/>
-                        </a:spcAft>
-                        <a:buNone/>
-                      </a:pPr>
-                      <a:r>
-                        <a:rPr lang="en-US" sz="1100" kern="100">
-                          <a:effectLst/>
-                        </a:rPr>
-                        <a:t>12</a:t>
-                      </a:r>
-                      <a:endParaRPr lang="en-GB" sz="1100" kern="100">
-                        <a:effectLst/>
-                        <a:latin typeface="Aptos" panose="020B0004020202020204" pitchFamily="34" charset="0"/>
-                        <a:ea typeface="DengXian" panose="02010600030101010101" pitchFamily="2" charset="-122"/>
-                        <a:cs typeface="Times New Roman" panose="02020603050405020304" pitchFamily="18" charset="0"/>
-                      </a:endParaRPr>
-                    </a:p>
-                  </a:txBody>
-                  <a:tcPr marL="58420" marR="58420" marT="29210" marB="29210"/>
-                </a:tc>
-                <a:tc>
-                  <a:txBody>
-                    <a:bodyPr/>
-                    <a:lstStyle/>
-                    <a:p>
-                      <a:pPr>
-                        <a:lnSpc>
-                          <a:spcPct val="115000"/>
-                        </a:lnSpc>
-                        <a:spcAft>
-                          <a:spcPts val="800"/>
-                        </a:spcAft>
-                        <a:buNone/>
-                      </a:pPr>
-                      <a:r>
-                        <a:rPr lang="en-US" sz="1100" kern="100">
-                          <a:effectLst/>
-                        </a:rPr>
-                        <a:t>9-12</a:t>
-                      </a:r>
-                      <a:endParaRPr lang="en-GB" sz="1100" kern="100">
-                        <a:effectLst/>
-                        <a:latin typeface="Aptos" panose="020B0004020202020204" pitchFamily="34" charset="0"/>
-                        <a:ea typeface="DengXian" panose="02010600030101010101" pitchFamily="2" charset="-122"/>
-                        <a:cs typeface="Times New Roman" panose="02020603050405020304" pitchFamily="18" charset="0"/>
-                      </a:endParaRPr>
-                    </a:p>
-                  </a:txBody>
-                  <a:tcPr marL="58420" marR="58420" marT="29210" marB="29210"/>
-                </a:tc>
-                <a:tc>
-                  <a:txBody>
-                    <a:bodyPr/>
-                    <a:lstStyle/>
-                    <a:p>
-                      <a:pPr>
-                        <a:lnSpc>
-                          <a:spcPct val="115000"/>
-                        </a:lnSpc>
-                        <a:spcAft>
-                          <a:spcPts val="800"/>
-                        </a:spcAft>
-                        <a:buNone/>
-                      </a:pPr>
-                      <a:r>
-                        <a:rPr lang="en-US" sz="1100" kern="100">
-                          <a:effectLst/>
-                        </a:rPr>
-                        <a:t>online</a:t>
-                      </a:r>
-                      <a:endParaRPr lang="en-GB" sz="1100" kern="100">
-                        <a:effectLst/>
-                        <a:latin typeface="Aptos" panose="020B0004020202020204" pitchFamily="34" charset="0"/>
-                        <a:ea typeface="DengXian" panose="02010600030101010101" pitchFamily="2" charset="-122"/>
-                        <a:cs typeface="Times New Roman" panose="02020603050405020304" pitchFamily="18" charset="0"/>
-                      </a:endParaRPr>
-                    </a:p>
-                  </a:txBody>
-                  <a:tcPr marL="58420" marR="58420" marT="29210" marB="29210"/>
-                </a:tc>
-                <a:tc>
-                  <a:txBody>
-                    <a:bodyPr/>
-                    <a:lstStyle/>
-                    <a:p>
-                      <a:pPr>
-                        <a:lnSpc>
-                          <a:spcPct val="115000"/>
-                        </a:lnSpc>
-                        <a:spcAft>
-                          <a:spcPts val="800"/>
-                        </a:spcAft>
-                        <a:buNone/>
-                      </a:pPr>
-                      <a:r>
-                        <a:rPr lang="en-US" sz="1100" kern="100">
-                          <a:effectLst/>
-                        </a:rPr>
-                        <a:t>Media Distribution Networks</a:t>
-                      </a:r>
-                      <a:endParaRPr lang="en-GB" sz="1100" kern="100">
-                        <a:effectLst/>
-                        <a:latin typeface="Aptos" panose="020B0004020202020204" pitchFamily="34" charset="0"/>
-                        <a:ea typeface="DengXian" panose="02010600030101010101" pitchFamily="2" charset="-122"/>
-                        <a:cs typeface="Times New Roman" panose="02020603050405020304" pitchFamily="18" charset="0"/>
-                      </a:endParaRPr>
-                    </a:p>
-                  </a:txBody>
-                  <a:tcPr marL="58420" marR="58420" marT="29210" marB="29210"/>
-                </a:tc>
-                <a:tc>
-                  <a:txBody>
-                    <a:bodyPr/>
-                    <a:lstStyle/>
-                    <a:p>
-                      <a:pPr>
-                        <a:lnSpc>
-                          <a:spcPct val="115000"/>
-                        </a:lnSpc>
-                        <a:buNone/>
-                      </a:pPr>
-                      <a:endParaRPr lang="en-GB" sz="1100" kern="100">
-                        <a:effectLst/>
-                        <a:latin typeface="Aptos" panose="020B0004020202020204" pitchFamily="34" charset="0"/>
-                      </a:endParaRPr>
-                    </a:p>
-                  </a:txBody>
-                  <a:tcPr marL="58420" marR="58420" marT="29210" marB="29210"/>
-                </a:tc>
-                <a:extLst>
-                  <a:ext uri="{0D108BD9-81ED-4DB2-BD59-A6C34878D82A}">
-                    <a16:rowId xmlns:a16="http://schemas.microsoft.com/office/drawing/2014/main" val="2284434988"/>
-                  </a:ext>
-                </a:extLst>
-              </a:tr>
-              <a:tr h="456212">
-                <a:tc>
-                  <a:txBody>
-                    <a:bodyPr/>
-                    <a:lstStyle/>
-                    <a:p>
-                      <a:pPr>
-                        <a:lnSpc>
-                          <a:spcPct val="115000"/>
-                        </a:lnSpc>
-                        <a:spcAft>
-                          <a:spcPts val="800"/>
-                        </a:spcAft>
-                        <a:buNone/>
-                      </a:pPr>
-                      <a:r>
-                        <a:rPr lang="en-US" sz="1100" kern="100">
-                          <a:effectLst/>
-                        </a:rPr>
-                        <a:t>12 May</a:t>
-                      </a:r>
-                      <a:endParaRPr lang="en-GB" sz="1100" kern="100">
-                        <a:effectLst/>
-                        <a:latin typeface="Aptos" panose="020B0004020202020204" pitchFamily="34" charset="0"/>
-                        <a:ea typeface="DengXian" panose="02010600030101010101" pitchFamily="2" charset="-122"/>
-                        <a:cs typeface="Times New Roman" panose="02020603050405020304" pitchFamily="18" charset="0"/>
-                      </a:endParaRPr>
-                    </a:p>
-                  </a:txBody>
-                  <a:tcPr marL="58420" marR="58420" marT="29210" marB="29210"/>
-                </a:tc>
-                <a:tc>
-                  <a:txBody>
-                    <a:bodyPr/>
-                    <a:lstStyle/>
-                    <a:p>
-                      <a:pPr>
-                        <a:lnSpc>
-                          <a:spcPct val="115000"/>
-                        </a:lnSpc>
-                        <a:spcAft>
-                          <a:spcPts val="800"/>
-                        </a:spcAft>
-                        <a:buNone/>
-                      </a:pPr>
-                      <a:r>
-                        <a:rPr lang="en-US" sz="1100" kern="100">
-                          <a:effectLst/>
-                        </a:rPr>
-                        <a:t>13</a:t>
-                      </a:r>
-                      <a:endParaRPr lang="en-GB" sz="1100" kern="100">
-                        <a:effectLst/>
-                        <a:latin typeface="Aptos" panose="020B0004020202020204" pitchFamily="34" charset="0"/>
-                        <a:ea typeface="DengXian" panose="02010600030101010101" pitchFamily="2" charset="-122"/>
-                        <a:cs typeface="Times New Roman" panose="02020603050405020304" pitchFamily="18" charset="0"/>
-                      </a:endParaRPr>
-                    </a:p>
-                  </a:txBody>
-                  <a:tcPr marL="58420" marR="58420" marT="29210" marB="29210"/>
-                </a:tc>
-                <a:tc>
-                  <a:txBody>
-                    <a:bodyPr/>
-                    <a:lstStyle/>
-                    <a:p>
-                      <a:pPr>
-                        <a:lnSpc>
-                          <a:spcPct val="115000"/>
-                        </a:lnSpc>
-                        <a:spcAft>
-                          <a:spcPts val="800"/>
-                        </a:spcAft>
-                        <a:buNone/>
-                      </a:pPr>
-                      <a:r>
-                        <a:rPr lang="en-GB" sz="1100" kern="100">
-                          <a:effectLst/>
-                        </a:rPr>
-                        <a:t>13-16</a:t>
-                      </a:r>
-                      <a:endParaRPr lang="en-GB" sz="1100" kern="100">
-                        <a:effectLst/>
-                        <a:latin typeface="Aptos" panose="020B0004020202020204" pitchFamily="34" charset="0"/>
-                        <a:ea typeface="DengXian" panose="02010600030101010101" pitchFamily="2" charset="-122"/>
-                        <a:cs typeface="Times New Roman" panose="02020603050405020304" pitchFamily="18" charset="0"/>
-                      </a:endParaRPr>
-                    </a:p>
-                  </a:txBody>
-                  <a:tcPr marL="58420" marR="58420" marT="29210" marB="29210"/>
-                </a:tc>
-                <a:tc>
-                  <a:txBody>
-                    <a:bodyPr/>
-                    <a:lstStyle/>
-                    <a:p>
-                      <a:pPr>
-                        <a:lnSpc>
-                          <a:spcPct val="115000"/>
-                        </a:lnSpc>
-                        <a:spcAft>
-                          <a:spcPts val="800"/>
-                        </a:spcAft>
-                        <a:buNone/>
-                      </a:pPr>
-                      <a:r>
-                        <a:rPr lang="en-GB" sz="1100" kern="100">
-                          <a:effectLst/>
-                        </a:rPr>
-                        <a:t>CMP211</a:t>
-                      </a:r>
-                      <a:endParaRPr lang="en-GB" sz="1100" kern="100">
-                        <a:effectLst/>
-                        <a:latin typeface="Aptos" panose="020B0004020202020204" pitchFamily="34" charset="0"/>
-                        <a:ea typeface="DengXian" panose="02010600030101010101" pitchFamily="2" charset="-122"/>
-                        <a:cs typeface="Times New Roman" panose="02020603050405020304" pitchFamily="18" charset="0"/>
-                      </a:endParaRPr>
-                    </a:p>
-                  </a:txBody>
-                  <a:tcPr marL="58420" marR="58420" marT="29210" marB="29210"/>
-                </a:tc>
-                <a:tc>
-                  <a:txBody>
-                    <a:bodyPr/>
-                    <a:lstStyle/>
-                    <a:p>
-                      <a:pPr>
-                        <a:lnSpc>
-                          <a:spcPct val="115000"/>
-                        </a:lnSpc>
-                        <a:spcAft>
-                          <a:spcPts val="800"/>
-                        </a:spcAft>
-                        <a:buNone/>
-                      </a:pPr>
-                      <a:r>
-                        <a:rPr lang="en-US" sz="1100" kern="100">
-                          <a:effectLst/>
-                        </a:rPr>
-                        <a:t>Media Distribution Networks (cont’d), Broadcast Workflow</a:t>
-                      </a:r>
-                      <a:endParaRPr lang="en-GB" sz="1100" kern="100">
-                        <a:effectLst/>
-                        <a:latin typeface="Aptos" panose="020B0004020202020204" pitchFamily="34" charset="0"/>
-                        <a:ea typeface="DengXian" panose="02010600030101010101" pitchFamily="2" charset="-122"/>
-                        <a:cs typeface="Times New Roman" panose="02020603050405020304" pitchFamily="18" charset="0"/>
-                      </a:endParaRPr>
-                    </a:p>
-                  </a:txBody>
-                  <a:tcPr marL="58420" marR="58420" marT="29210" marB="29210"/>
-                </a:tc>
-                <a:tc>
-                  <a:txBody>
-                    <a:bodyPr/>
-                    <a:lstStyle/>
-                    <a:p>
-                      <a:pPr>
-                        <a:lnSpc>
-                          <a:spcPct val="115000"/>
-                        </a:lnSpc>
-                        <a:buNone/>
-                      </a:pPr>
-                      <a:endParaRPr lang="en-GB" sz="1100" kern="100">
-                        <a:effectLst/>
-                        <a:latin typeface="Aptos" panose="020B0004020202020204" pitchFamily="34" charset="0"/>
-                      </a:endParaRPr>
-                    </a:p>
-                  </a:txBody>
-                  <a:tcPr marL="58420" marR="58420" marT="29210" marB="29210"/>
-                </a:tc>
-                <a:extLst>
-                  <a:ext uri="{0D108BD9-81ED-4DB2-BD59-A6C34878D82A}">
-                    <a16:rowId xmlns:a16="http://schemas.microsoft.com/office/drawing/2014/main" val="3266291923"/>
-                  </a:ext>
-                </a:extLst>
-              </a:tr>
-              <a:tr h="271317">
-                <a:tc>
-                  <a:txBody>
-                    <a:bodyPr/>
-                    <a:lstStyle/>
-                    <a:p>
-                      <a:pPr>
-                        <a:lnSpc>
-                          <a:spcPct val="115000"/>
-                        </a:lnSpc>
-                        <a:spcAft>
-                          <a:spcPts val="800"/>
-                        </a:spcAft>
-                        <a:buNone/>
-                      </a:pPr>
-                      <a:r>
-                        <a:rPr lang="en-US" sz="1100" kern="100">
-                          <a:effectLst/>
-                        </a:rPr>
-                        <a:t>21 May</a:t>
-                      </a:r>
-                      <a:endParaRPr lang="en-GB" sz="1100" kern="100">
-                        <a:effectLst/>
-                        <a:latin typeface="Aptos" panose="020B0004020202020204" pitchFamily="34" charset="0"/>
-                        <a:ea typeface="DengXian" panose="02010600030101010101" pitchFamily="2" charset="-122"/>
-                        <a:cs typeface="Times New Roman" panose="02020603050405020304" pitchFamily="18" charset="0"/>
-                      </a:endParaRPr>
-                    </a:p>
-                  </a:txBody>
-                  <a:tcPr marL="58420" marR="58420" marT="29210" marB="29210"/>
-                </a:tc>
-                <a:tc>
-                  <a:txBody>
-                    <a:bodyPr/>
-                    <a:lstStyle/>
-                    <a:p>
-                      <a:pPr>
-                        <a:lnSpc>
-                          <a:spcPct val="115000"/>
-                        </a:lnSpc>
-                        <a:spcAft>
-                          <a:spcPts val="800"/>
-                        </a:spcAft>
-                        <a:buNone/>
-                      </a:pPr>
-                      <a:r>
-                        <a:rPr lang="en-US" sz="1100" kern="100">
-                          <a:effectLst/>
-                        </a:rPr>
-                        <a:t>14,15</a:t>
-                      </a:r>
-                      <a:endParaRPr lang="en-GB" sz="1100" kern="100">
-                        <a:effectLst/>
-                        <a:latin typeface="Aptos" panose="020B0004020202020204" pitchFamily="34" charset="0"/>
-                        <a:ea typeface="DengXian" panose="02010600030101010101" pitchFamily="2" charset="-122"/>
-                        <a:cs typeface="Times New Roman" panose="02020603050405020304" pitchFamily="18" charset="0"/>
-                      </a:endParaRPr>
-                    </a:p>
-                  </a:txBody>
-                  <a:tcPr marL="58420" marR="58420" marT="29210" marB="29210"/>
-                </a:tc>
-                <a:tc>
-                  <a:txBody>
-                    <a:bodyPr/>
-                    <a:lstStyle/>
-                    <a:p>
-                      <a:pPr>
-                        <a:lnSpc>
-                          <a:spcPct val="115000"/>
-                        </a:lnSpc>
-                        <a:spcAft>
-                          <a:spcPts val="800"/>
-                        </a:spcAft>
-                        <a:buNone/>
-                      </a:pPr>
-                      <a:r>
-                        <a:rPr lang="en-US" sz="1100" kern="100">
-                          <a:effectLst/>
-                        </a:rPr>
-                        <a:t>9-12;</a:t>
-                      </a:r>
-                      <a:r>
-                        <a:rPr lang="en-GB" sz="1100" kern="100">
-                          <a:effectLst/>
-                        </a:rPr>
-                        <a:t> 13-16</a:t>
-                      </a:r>
-                      <a:endParaRPr lang="en-GB" sz="1100" kern="100">
-                        <a:effectLst/>
-                        <a:latin typeface="Aptos" panose="020B0004020202020204" pitchFamily="34" charset="0"/>
-                        <a:ea typeface="DengXian" panose="02010600030101010101" pitchFamily="2" charset="-122"/>
-                        <a:cs typeface="Times New Roman" panose="02020603050405020304" pitchFamily="18" charset="0"/>
-                      </a:endParaRPr>
-                    </a:p>
-                  </a:txBody>
-                  <a:tcPr marL="58420" marR="58420" marT="29210" marB="29210"/>
-                </a:tc>
-                <a:tc>
-                  <a:txBody>
-                    <a:bodyPr/>
-                    <a:lstStyle/>
-                    <a:p>
-                      <a:pPr>
-                        <a:lnSpc>
-                          <a:spcPct val="115000"/>
-                        </a:lnSpc>
-                        <a:spcAft>
-                          <a:spcPts val="800"/>
-                        </a:spcAft>
-                        <a:buNone/>
-                      </a:pPr>
-                      <a:r>
-                        <a:rPr lang="en-GB" sz="1100" kern="100">
-                          <a:effectLst/>
-                        </a:rPr>
-                        <a:t>CMP211</a:t>
-                      </a:r>
-                      <a:endParaRPr lang="en-GB" sz="1100" kern="100">
-                        <a:effectLst/>
-                        <a:latin typeface="Aptos" panose="020B0004020202020204" pitchFamily="34" charset="0"/>
-                        <a:ea typeface="DengXian" panose="02010600030101010101" pitchFamily="2" charset="-122"/>
-                        <a:cs typeface="Times New Roman" panose="02020603050405020304" pitchFamily="18" charset="0"/>
-                      </a:endParaRPr>
-                    </a:p>
-                  </a:txBody>
-                  <a:tcPr marL="58420" marR="58420" marT="29210" marB="29210"/>
-                </a:tc>
-                <a:tc>
-                  <a:txBody>
-                    <a:bodyPr/>
-                    <a:lstStyle/>
-                    <a:p>
-                      <a:pPr>
-                        <a:lnSpc>
-                          <a:spcPct val="115000"/>
-                        </a:lnSpc>
-                        <a:spcAft>
-                          <a:spcPts val="800"/>
-                        </a:spcAft>
-                        <a:buNone/>
-                      </a:pPr>
-                      <a:r>
-                        <a:rPr lang="en-US" sz="1100" kern="100">
-                          <a:effectLst/>
-                        </a:rPr>
-                        <a:t>New Topics and Module Review</a:t>
-                      </a:r>
-                      <a:endParaRPr lang="en-GB" sz="1100" kern="100">
-                        <a:effectLst/>
-                        <a:latin typeface="Aptos" panose="020B0004020202020204" pitchFamily="34" charset="0"/>
-                        <a:ea typeface="DengXian" panose="02010600030101010101" pitchFamily="2" charset="-122"/>
-                        <a:cs typeface="Times New Roman" panose="02020603050405020304" pitchFamily="18" charset="0"/>
-                      </a:endParaRPr>
-                    </a:p>
-                  </a:txBody>
-                  <a:tcPr marL="58420" marR="58420" marT="29210" marB="29210"/>
-                </a:tc>
-                <a:tc>
-                  <a:txBody>
-                    <a:bodyPr/>
-                    <a:lstStyle/>
-                    <a:p>
-                      <a:pPr>
-                        <a:lnSpc>
-                          <a:spcPct val="115000"/>
-                        </a:lnSpc>
-                        <a:buNone/>
-                      </a:pPr>
-                      <a:endParaRPr lang="en-GB" sz="1100" kern="100">
-                        <a:effectLst/>
-                        <a:latin typeface="Aptos" panose="020B0004020202020204" pitchFamily="34" charset="0"/>
-                      </a:endParaRPr>
-                    </a:p>
-                  </a:txBody>
-                  <a:tcPr marL="58420" marR="58420" marT="29210" marB="29210"/>
-                </a:tc>
-                <a:extLst>
-                  <a:ext uri="{0D108BD9-81ED-4DB2-BD59-A6C34878D82A}">
-                    <a16:rowId xmlns:a16="http://schemas.microsoft.com/office/drawing/2014/main" val="2459469082"/>
-                  </a:ext>
-                </a:extLst>
-              </a:tr>
-              <a:tr h="271317">
-                <a:tc>
-                  <a:txBody>
-                    <a:bodyPr/>
-                    <a:lstStyle/>
-                    <a:p>
-                      <a:pPr>
-                        <a:lnSpc>
-                          <a:spcPct val="115000"/>
-                        </a:lnSpc>
-                        <a:spcAft>
-                          <a:spcPts val="800"/>
-                        </a:spcAft>
-                        <a:buNone/>
-                      </a:pPr>
-                      <a:r>
-                        <a:rPr lang="en-US" sz="1100" kern="100">
-                          <a:effectLst/>
-                        </a:rPr>
-                        <a:t>25</a:t>
-                      </a:r>
-                      <a:r>
-                        <a:rPr lang="en-US" sz="1100" kern="100" baseline="30000">
-                          <a:effectLst/>
-                        </a:rPr>
-                        <a:t>th</a:t>
-                      </a:r>
-                      <a:r>
-                        <a:rPr lang="en-US" sz="1100" kern="100">
-                          <a:effectLst/>
-                        </a:rPr>
-                        <a:t> June</a:t>
-                      </a:r>
-                      <a:endParaRPr lang="en-GB" sz="1100" kern="100">
-                        <a:effectLst/>
-                        <a:latin typeface="Aptos" panose="020B0004020202020204" pitchFamily="34" charset="0"/>
-                        <a:ea typeface="DengXian" panose="02010600030101010101" pitchFamily="2" charset="-122"/>
-                        <a:cs typeface="Times New Roman" panose="02020603050405020304" pitchFamily="18" charset="0"/>
-                      </a:endParaRPr>
-                    </a:p>
-                  </a:txBody>
-                  <a:tcPr marL="58420" marR="58420" marT="29210" marB="29210"/>
-                </a:tc>
-                <a:tc>
-                  <a:txBody>
-                    <a:bodyPr/>
-                    <a:lstStyle/>
-                    <a:p>
-                      <a:pPr>
-                        <a:lnSpc>
-                          <a:spcPct val="115000"/>
-                        </a:lnSpc>
-                        <a:spcAft>
-                          <a:spcPts val="800"/>
-                        </a:spcAft>
-                        <a:buNone/>
-                      </a:pPr>
-                      <a:r>
-                        <a:rPr lang="en-US" sz="1100" kern="100">
-                          <a:effectLst/>
-                        </a:rPr>
-                        <a:t>16</a:t>
-                      </a:r>
-                      <a:endParaRPr lang="en-GB" sz="1100" kern="100">
-                        <a:effectLst/>
-                        <a:latin typeface="Aptos" panose="020B0004020202020204" pitchFamily="34" charset="0"/>
-                        <a:ea typeface="DengXian" panose="02010600030101010101" pitchFamily="2" charset="-122"/>
-                        <a:cs typeface="Times New Roman" panose="02020603050405020304" pitchFamily="18" charset="0"/>
-                      </a:endParaRPr>
-                    </a:p>
-                  </a:txBody>
-                  <a:tcPr marL="58420" marR="58420" marT="29210" marB="29210"/>
-                </a:tc>
-                <a:tc>
-                  <a:txBody>
-                    <a:bodyPr/>
-                    <a:lstStyle/>
-                    <a:p>
-                      <a:pPr>
-                        <a:lnSpc>
-                          <a:spcPct val="115000"/>
-                        </a:lnSpc>
-                        <a:spcAft>
-                          <a:spcPts val="800"/>
-                        </a:spcAft>
-                        <a:buNone/>
-                      </a:pPr>
-                      <a:r>
-                        <a:rPr lang="en-GB" sz="1100" kern="100">
-                          <a:effectLst/>
-                        </a:rPr>
-                        <a:t>9-12;</a:t>
-                      </a:r>
-                      <a:endParaRPr lang="en-GB" sz="1100" kern="100">
-                        <a:effectLst/>
-                        <a:latin typeface="Aptos" panose="020B0004020202020204" pitchFamily="34" charset="0"/>
-                        <a:ea typeface="DengXian" panose="02010600030101010101" pitchFamily="2" charset="-122"/>
-                        <a:cs typeface="Times New Roman" panose="02020603050405020304" pitchFamily="18" charset="0"/>
-                      </a:endParaRPr>
-                    </a:p>
-                  </a:txBody>
-                  <a:tcPr marL="58420" marR="58420" marT="29210" marB="29210"/>
-                </a:tc>
-                <a:tc gridSpan="3">
-                  <a:txBody>
-                    <a:bodyPr/>
-                    <a:lstStyle/>
-                    <a:p>
-                      <a:pPr>
-                        <a:lnSpc>
-                          <a:spcPct val="115000"/>
-                        </a:lnSpc>
-                        <a:spcAft>
-                          <a:spcPts val="800"/>
-                        </a:spcAft>
-                        <a:buNone/>
-                      </a:pPr>
-                      <a:r>
-                        <a:rPr lang="en-GB" sz="1100" kern="100" dirty="0">
-                          <a:effectLst/>
-                        </a:rPr>
-                        <a:t>CMP211 / EXAM</a:t>
-                      </a:r>
-                      <a:endParaRPr lang="en-GB" sz="1100" kern="100" dirty="0">
-                        <a:effectLst/>
-                        <a:latin typeface="Aptos" panose="020B0004020202020204" pitchFamily="34" charset="0"/>
-                        <a:ea typeface="DengXian" panose="02010600030101010101" pitchFamily="2" charset="-122"/>
-                        <a:cs typeface="Times New Roman" panose="02020603050405020304" pitchFamily="18" charset="0"/>
-                      </a:endParaRPr>
-                    </a:p>
-                  </a:txBody>
-                  <a:tcPr marL="58420" marR="58420" marT="29210" marB="29210"/>
+                  <a:tcPr marL="60165" marR="60165" marT="30082" marB="30082"/>
                 </a:tc>
                 <a:tc hMerge="1">
                   <a:txBody>
@@ -16769,9 +14169,3894 @@
                   </a:txBody>
                   <a:tcPr/>
                 </a:tc>
+                <a:tc>
+                  <a:txBody>
+                    <a:bodyPr/>
+                    <a:lstStyle/>
+                    <a:p>
+                      <a:pPr>
+                        <a:lnSpc>
+                          <a:spcPct val="115000"/>
+                        </a:lnSpc>
+                        <a:buNone/>
+                      </a:pPr>
+                      <a:endParaRPr lang="en-GB" sz="1000" kern="100">
+                        <a:effectLst/>
+                        <a:latin typeface="Aptos" panose="020B0004020202020204" pitchFamily="34" charset="0"/>
+                      </a:endParaRPr>
+                    </a:p>
+                  </a:txBody>
+                  <a:tcPr marL="60165" marR="60165" marT="30082" marB="30082"/>
+                </a:tc>
+                <a:tc gridSpan="2">
+                  <a:txBody>
+                    <a:bodyPr/>
+                    <a:lstStyle/>
+                    <a:p>
+                      <a:pPr>
+                        <a:lnSpc>
+                          <a:spcPct val="115000"/>
+                        </a:lnSpc>
+                        <a:spcAft>
+                          <a:spcPts val="800"/>
+                        </a:spcAft>
+                        <a:buNone/>
+                      </a:pPr>
+                      <a:r>
+                        <a:rPr lang="en-GB" sz="1000" kern="100">
+                          <a:effectLst/>
+                        </a:rPr>
+                        <a:t> </a:t>
+                      </a:r>
+                      <a:endParaRPr lang="en-GB" sz="1000" kern="100">
+                        <a:effectLst/>
+                        <a:latin typeface="Aptos" panose="020B0004020202020204" pitchFamily="34" charset="0"/>
+                        <a:ea typeface="DengXian" panose="02010600030101010101" pitchFamily="2" charset="-122"/>
+                        <a:cs typeface="Arial" panose="020B0604020202020204" pitchFamily="34" charset="0"/>
+                      </a:endParaRPr>
+                    </a:p>
+                  </a:txBody>
+                  <a:tcPr marL="0" marR="0" marT="0" marB="0" anchor="ctr"/>
+                </a:tc>
+                <a:tc hMerge="1">
+                  <a:txBody>
+                    <a:bodyPr/>
+                    <a:lstStyle/>
+                    <a:p>
+                      <a:endParaRPr lang="en-GB"/>
+                    </a:p>
+                  </a:txBody>
+                  <a:tcPr/>
+                </a:tc>
                 <a:extLst>
                   <a:ext uri="{0D108BD9-81ED-4DB2-BD59-A6C34878D82A}">
-                    <a16:rowId xmlns:a16="http://schemas.microsoft.com/office/drawing/2014/main" val="1155757524"/>
+                    <a16:rowId xmlns:a16="http://schemas.microsoft.com/office/drawing/2014/main" val="2073117651"/>
+                  </a:ext>
+                </a:extLst>
+              </a:tr>
+              <a:tr h="296664">
+                <a:tc>
+                  <a:txBody>
+                    <a:bodyPr/>
+                    <a:lstStyle/>
+                    <a:p>
+                      <a:pPr>
+                        <a:lnSpc>
+                          <a:spcPct val="115000"/>
+                        </a:lnSpc>
+                        <a:spcAft>
+                          <a:spcPts val="800"/>
+                        </a:spcAft>
+                        <a:buNone/>
+                      </a:pPr>
+                      <a:r>
+                        <a:rPr lang="en-US" sz="1000" kern="100">
+                          <a:effectLst/>
+                        </a:rPr>
+                        <a:t>16 March</a:t>
+                      </a:r>
+                      <a:endParaRPr lang="en-GB" sz="1000" kern="100">
+                        <a:effectLst/>
+                        <a:latin typeface="Aptos" panose="020B0004020202020204" pitchFamily="34" charset="0"/>
+                        <a:ea typeface="DengXian" panose="02010600030101010101" pitchFamily="2" charset="-122"/>
+                        <a:cs typeface="Arial" panose="020B0604020202020204" pitchFamily="34" charset="0"/>
+                      </a:endParaRPr>
+                    </a:p>
+                  </a:txBody>
+                  <a:tcPr marL="60165" marR="60165" marT="30082" marB="30082"/>
+                </a:tc>
+                <a:tc>
+                  <a:txBody>
+                    <a:bodyPr/>
+                    <a:lstStyle/>
+                    <a:p>
+                      <a:pPr>
+                        <a:lnSpc>
+                          <a:spcPct val="115000"/>
+                        </a:lnSpc>
+                        <a:spcAft>
+                          <a:spcPts val="800"/>
+                        </a:spcAft>
+                        <a:buNone/>
+                      </a:pPr>
+                      <a:r>
+                        <a:rPr lang="en-US" sz="1000" kern="100">
+                          <a:effectLst/>
+                        </a:rPr>
+                        <a:t>1</a:t>
+                      </a:r>
+                      <a:endParaRPr lang="en-GB" sz="1000" kern="100">
+                        <a:effectLst/>
+                        <a:latin typeface="Aptos" panose="020B0004020202020204" pitchFamily="34" charset="0"/>
+                        <a:ea typeface="DengXian" panose="02010600030101010101" pitchFamily="2" charset="-122"/>
+                        <a:cs typeface="Arial" panose="020B0604020202020204" pitchFamily="34" charset="0"/>
+                      </a:endParaRPr>
+                    </a:p>
+                  </a:txBody>
+                  <a:tcPr marL="60165" marR="60165" marT="30082" marB="30082"/>
+                </a:tc>
+                <a:tc>
+                  <a:txBody>
+                    <a:bodyPr/>
+                    <a:lstStyle/>
+                    <a:p>
+                      <a:pPr>
+                        <a:lnSpc>
+                          <a:spcPct val="115000"/>
+                        </a:lnSpc>
+                        <a:spcAft>
+                          <a:spcPts val="800"/>
+                        </a:spcAft>
+                        <a:buNone/>
+                      </a:pPr>
+                      <a:r>
+                        <a:rPr lang="en-GB" sz="1000" kern="100">
+                          <a:effectLst/>
+                        </a:rPr>
+                        <a:t>9-12</a:t>
+                      </a:r>
+                      <a:endParaRPr lang="en-GB" sz="1000" kern="100">
+                        <a:effectLst/>
+                        <a:latin typeface="Aptos" panose="020B0004020202020204" pitchFamily="34" charset="0"/>
+                        <a:ea typeface="DengXian" panose="02010600030101010101" pitchFamily="2" charset="-122"/>
+                        <a:cs typeface="Arial" panose="020B0604020202020204" pitchFamily="34" charset="0"/>
+                      </a:endParaRPr>
+                    </a:p>
+                  </a:txBody>
+                  <a:tcPr marL="60165" marR="60165" marT="30082" marB="30082"/>
+                </a:tc>
+                <a:tc>
+                  <a:txBody>
+                    <a:bodyPr/>
+                    <a:lstStyle/>
+                    <a:p>
+                      <a:pPr>
+                        <a:lnSpc>
+                          <a:spcPct val="115000"/>
+                        </a:lnSpc>
+                        <a:spcAft>
+                          <a:spcPts val="800"/>
+                        </a:spcAft>
+                        <a:buNone/>
+                      </a:pPr>
+                      <a:r>
+                        <a:rPr lang="en-GB" sz="1000" kern="100">
+                          <a:effectLst/>
+                        </a:rPr>
+                        <a:t>CCZ269</a:t>
+                      </a:r>
+                      <a:endParaRPr lang="en-GB" sz="1000" kern="100">
+                        <a:effectLst/>
+                        <a:latin typeface="Aptos" panose="020B0004020202020204" pitchFamily="34" charset="0"/>
+                        <a:ea typeface="DengXian" panose="02010600030101010101" pitchFamily="2" charset="-122"/>
+                        <a:cs typeface="Arial" panose="020B0604020202020204" pitchFamily="34" charset="0"/>
+                      </a:endParaRPr>
+                    </a:p>
+                  </a:txBody>
+                  <a:tcPr marL="60165" marR="60165" marT="30082" marB="30082"/>
+                </a:tc>
+                <a:tc gridSpan="3">
+                  <a:txBody>
+                    <a:bodyPr/>
+                    <a:lstStyle/>
+                    <a:p>
+                      <a:pPr>
+                        <a:lnSpc>
+                          <a:spcPct val="115000"/>
+                        </a:lnSpc>
+                        <a:spcAft>
+                          <a:spcPts val="800"/>
+                        </a:spcAft>
+                        <a:buNone/>
+                      </a:pPr>
+                      <a:r>
+                        <a:rPr lang="en-US" sz="1000" kern="100" dirty="0">
+                          <a:effectLst/>
+                        </a:rPr>
+                        <a:t>Introduction, Market and Development</a:t>
+                      </a:r>
+                      <a:endParaRPr lang="en-GB" sz="1000" kern="100" dirty="0">
+                        <a:effectLst/>
+                        <a:latin typeface="Aptos" panose="020B0004020202020204" pitchFamily="34" charset="0"/>
+                        <a:ea typeface="DengXian" panose="02010600030101010101" pitchFamily="2" charset="-122"/>
+                        <a:cs typeface="Arial" panose="020B0604020202020204" pitchFamily="34" charset="0"/>
+                      </a:endParaRPr>
+                    </a:p>
+                  </a:txBody>
+                  <a:tcPr marL="60165" marR="60165" marT="30082" marB="30082"/>
+                </a:tc>
+                <a:tc hMerge="1">
+                  <a:txBody>
+                    <a:bodyPr/>
+                    <a:lstStyle/>
+                    <a:p>
+                      <a:endParaRPr lang="en-GB"/>
+                    </a:p>
+                  </a:txBody>
+                  <a:tcPr/>
+                </a:tc>
+                <a:tc hMerge="1">
+                  <a:txBody>
+                    <a:bodyPr/>
+                    <a:lstStyle/>
+                    <a:p>
+                      <a:endParaRPr lang="en-GB"/>
+                    </a:p>
+                  </a:txBody>
+                  <a:tcPr/>
+                </a:tc>
+                <a:tc>
+                  <a:txBody>
+                    <a:bodyPr/>
+                    <a:lstStyle/>
+                    <a:p>
+                      <a:pPr>
+                        <a:lnSpc>
+                          <a:spcPct val="115000"/>
+                        </a:lnSpc>
+                        <a:buNone/>
+                      </a:pPr>
+                      <a:endParaRPr lang="en-GB" sz="1000" kern="100">
+                        <a:effectLst/>
+                        <a:latin typeface="Aptos" panose="020B0004020202020204" pitchFamily="34" charset="0"/>
+                      </a:endParaRPr>
+                    </a:p>
+                  </a:txBody>
+                  <a:tcPr marL="60165" marR="60165" marT="30082" marB="30082"/>
+                </a:tc>
+                <a:tc gridSpan="2">
+                  <a:txBody>
+                    <a:bodyPr/>
+                    <a:lstStyle/>
+                    <a:p>
+                      <a:pPr>
+                        <a:lnSpc>
+                          <a:spcPct val="115000"/>
+                        </a:lnSpc>
+                        <a:spcAft>
+                          <a:spcPts val="800"/>
+                        </a:spcAft>
+                        <a:buNone/>
+                      </a:pPr>
+                      <a:r>
+                        <a:rPr lang="en-GB" sz="1000" kern="100">
+                          <a:effectLst/>
+                        </a:rPr>
+                        <a:t> </a:t>
+                      </a:r>
+                      <a:endParaRPr lang="en-GB" sz="1000" kern="100">
+                        <a:effectLst/>
+                        <a:latin typeface="Aptos" panose="020B0004020202020204" pitchFamily="34" charset="0"/>
+                        <a:ea typeface="DengXian" panose="02010600030101010101" pitchFamily="2" charset="-122"/>
+                        <a:cs typeface="Arial" panose="020B0604020202020204" pitchFamily="34" charset="0"/>
+                      </a:endParaRPr>
+                    </a:p>
+                  </a:txBody>
+                  <a:tcPr marL="0" marR="0" marT="0" marB="0" anchor="ctr"/>
+                </a:tc>
+                <a:tc hMerge="1">
+                  <a:txBody>
+                    <a:bodyPr/>
+                    <a:lstStyle/>
+                    <a:p>
+                      <a:endParaRPr lang="en-GB"/>
+                    </a:p>
+                  </a:txBody>
+                  <a:tcPr/>
+                </a:tc>
+                <a:extLst>
+                  <a:ext uri="{0D108BD9-81ED-4DB2-BD59-A6C34878D82A}">
+                    <a16:rowId xmlns:a16="http://schemas.microsoft.com/office/drawing/2014/main" val="518868867"/>
+                  </a:ext>
+                </a:extLst>
+              </a:tr>
+              <a:tr h="296664">
+                <a:tc>
+                  <a:txBody>
+                    <a:bodyPr/>
+                    <a:lstStyle/>
+                    <a:p>
+                      <a:pPr>
+                        <a:lnSpc>
+                          <a:spcPct val="115000"/>
+                        </a:lnSpc>
+                        <a:spcAft>
+                          <a:spcPts val="800"/>
+                        </a:spcAft>
+                        <a:buNone/>
+                      </a:pPr>
+                      <a:r>
+                        <a:rPr lang="en-US" sz="1000" kern="100">
+                          <a:effectLst/>
+                        </a:rPr>
+                        <a:t>23 March</a:t>
+                      </a:r>
+                      <a:endParaRPr lang="en-GB" sz="1000" kern="100">
+                        <a:effectLst/>
+                        <a:latin typeface="Aptos" panose="020B0004020202020204" pitchFamily="34" charset="0"/>
+                        <a:ea typeface="DengXian" panose="02010600030101010101" pitchFamily="2" charset="-122"/>
+                        <a:cs typeface="Arial" panose="020B0604020202020204" pitchFamily="34" charset="0"/>
+                      </a:endParaRPr>
+                    </a:p>
+                  </a:txBody>
+                  <a:tcPr marL="60165" marR="60165" marT="30082" marB="30082"/>
+                </a:tc>
+                <a:tc>
+                  <a:txBody>
+                    <a:bodyPr/>
+                    <a:lstStyle/>
+                    <a:p>
+                      <a:pPr>
+                        <a:lnSpc>
+                          <a:spcPct val="115000"/>
+                        </a:lnSpc>
+                        <a:spcAft>
+                          <a:spcPts val="800"/>
+                        </a:spcAft>
+                        <a:buNone/>
+                      </a:pPr>
+                      <a:r>
+                        <a:rPr lang="en-US" sz="1000" kern="100">
+                          <a:effectLst/>
+                        </a:rPr>
+                        <a:t>2</a:t>
+                      </a:r>
+                      <a:endParaRPr lang="en-GB" sz="1000" kern="100">
+                        <a:effectLst/>
+                        <a:latin typeface="Aptos" panose="020B0004020202020204" pitchFamily="34" charset="0"/>
+                        <a:ea typeface="DengXian" panose="02010600030101010101" pitchFamily="2" charset="-122"/>
+                        <a:cs typeface="Arial" panose="020B0604020202020204" pitchFamily="34" charset="0"/>
+                      </a:endParaRPr>
+                    </a:p>
+                  </a:txBody>
+                  <a:tcPr marL="60165" marR="60165" marT="30082" marB="30082"/>
+                </a:tc>
+                <a:tc>
+                  <a:txBody>
+                    <a:bodyPr/>
+                    <a:lstStyle/>
+                    <a:p>
+                      <a:pPr>
+                        <a:lnSpc>
+                          <a:spcPct val="115000"/>
+                        </a:lnSpc>
+                        <a:spcAft>
+                          <a:spcPts val="800"/>
+                        </a:spcAft>
+                        <a:buNone/>
+                      </a:pPr>
+                      <a:r>
+                        <a:rPr lang="en-US" sz="1000" kern="100">
+                          <a:effectLst/>
+                        </a:rPr>
+                        <a:t>9-12</a:t>
+                      </a:r>
+                      <a:endParaRPr lang="en-GB" sz="1000" kern="100">
+                        <a:effectLst/>
+                        <a:latin typeface="Aptos" panose="020B0004020202020204" pitchFamily="34" charset="0"/>
+                        <a:ea typeface="DengXian" panose="02010600030101010101" pitchFamily="2" charset="-122"/>
+                        <a:cs typeface="Arial" panose="020B0604020202020204" pitchFamily="34" charset="0"/>
+                      </a:endParaRPr>
+                    </a:p>
+                  </a:txBody>
+                  <a:tcPr marL="60165" marR="60165" marT="30082" marB="30082"/>
+                </a:tc>
+                <a:tc>
+                  <a:txBody>
+                    <a:bodyPr/>
+                    <a:lstStyle/>
+                    <a:p>
+                      <a:pPr>
+                        <a:lnSpc>
+                          <a:spcPct val="115000"/>
+                        </a:lnSpc>
+                        <a:spcAft>
+                          <a:spcPts val="800"/>
+                        </a:spcAft>
+                        <a:buNone/>
+                      </a:pPr>
+                      <a:r>
+                        <a:rPr lang="en-GB" sz="1000" kern="100">
+                          <a:effectLst/>
+                        </a:rPr>
+                        <a:t>CCZ269</a:t>
+                      </a:r>
+                      <a:endParaRPr lang="en-GB" sz="1000" kern="100">
+                        <a:effectLst/>
+                        <a:latin typeface="Aptos" panose="020B0004020202020204" pitchFamily="34" charset="0"/>
+                        <a:ea typeface="DengXian" panose="02010600030101010101" pitchFamily="2" charset="-122"/>
+                        <a:cs typeface="Arial" panose="020B0604020202020204" pitchFamily="34" charset="0"/>
+                      </a:endParaRPr>
+                    </a:p>
+                  </a:txBody>
+                  <a:tcPr marL="60165" marR="60165" marT="30082" marB="30082"/>
+                </a:tc>
+                <a:tc gridSpan="3">
+                  <a:txBody>
+                    <a:bodyPr/>
+                    <a:lstStyle/>
+                    <a:p>
+                      <a:pPr>
+                        <a:lnSpc>
+                          <a:spcPct val="115000"/>
+                        </a:lnSpc>
+                        <a:spcAft>
+                          <a:spcPts val="800"/>
+                        </a:spcAft>
+                        <a:buNone/>
+                      </a:pPr>
+                      <a:r>
+                        <a:rPr lang="en-US" sz="1000" kern="100">
+                          <a:effectLst/>
+                        </a:rPr>
+                        <a:t>Signals</a:t>
+                      </a:r>
+                      <a:endParaRPr lang="en-GB" sz="1000" kern="100">
+                        <a:effectLst/>
+                        <a:latin typeface="Aptos" panose="020B0004020202020204" pitchFamily="34" charset="0"/>
+                        <a:ea typeface="DengXian" panose="02010600030101010101" pitchFamily="2" charset="-122"/>
+                        <a:cs typeface="Arial" panose="020B0604020202020204" pitchFamily="34" charset="0"/>
+                      </a:endParaRPr>
+                    </a:p>
+                  </a:txBody>
+                  <a:tcPr marL="60165" marR="60165" marT="30082" marB="30082"/>
+                </a:tc>
+                <a:tc hMerge="1">
+                  <a:txBody>
+                    <a:bodyPr/>
+                    <a:lstStyle/>
+                    <a:p>
+                      <a:endParaRPr lang="en-GB"/>
+                    </a:p>
+                  </a:txBody>
+                  <a:tcPr/>
+                </a:tc>
+                <a:tc hMerge="1">
+                  <a:txBody>
+                    <a:bodyPr/>
+                    <a:lstStyle/>
+                    <a:p>
+                      <a:endParaRPr lang="en-GB"/>
+                    </a:p>
+                  </a:txBody>
+                  <a:tcPr/>
+                </a:tc>
+                <a:tc>
+                  <a:txBody>
+                    <a:bodyPr/>
+                    <a:lstStyle/>
+                    <a:p>
+                      <a:pPr>
+                        <a:lnSpc>
+                          <a:spcPct val="115000"/>
+                        </a:lnSpc>
+                        <a:buNone/>
+                      </a:pPr>
+                      <a:endParaRPr lang="en-GB" sz="1000" kern="100">
+                        <a:effectLst/>
+                        <a:latin typeface="Aptos" panose="020B0004020202020204" pitchFamily="34" charset="0"/>
+                      </a:endParaRPr>
+                    </a:p>
+                  </a:txBody>
+                  <a:tcPr marL="60165" marR="60165" marT="30082" marB="30082"/>
+                </a:tc>
+                <a:tc gridSpan="2">
+                  <a:txBody>
+                    <a:bodyPr/>
+                    <a:lstStyle/>
+                    <a:p>
+                      <a:pPr>
+                        <a:lnSpc>
+                          <a:spcPct val="115000"/>
+                        </a:lnSpc>
+                        <a:spcAft>
+                          <a:spcPts val="800"/>
+                        </a:spcAft>
+                        <a:buNone/>
+                      </a:pPr>
+                      <a:r>
+                        <a:rPr lang="en-GB" sz="1000" kern="100">
+                          <a:effectLst/>
+                        </a:rPr>
+                        <a:t> </a:t>
+                      </a:r>
+                      <a:endParaRPr lang="en-GB" sz="1000" kern="100">
+                        <a:effectLst/>
+                        <a:latin typeface="Aptos" panose="020B0004020202020204" pitchFamily="34" charset="0"/>
+                        <a:ea typeface="DengXian" panose="02010600030101010101" pitchFamily="2" charset="-122"/>
+                        <a:cs typeface="Arial" panose="020B0604020202020204" pitchFamily="34" charset="0"/>
+                      </a:endParaRPr>
+                    </a:p>
+                  </a:txBody>
+                  <a:tcPr marL="0" marR="0" marT="0" marB="0" anchor="ctr"/>
+                </a:tc>
+                <a:tc hMerge="1">
+                  <a:txBody>
+                    <a:bodyPr/>
+                    <a:lstStyle/>
+                    <a:p>
+                      <a:endParaRPr lang="en-GB"/>
+                    </a:p>
+                  </a:txBody>
+                  <a:tcPr/>
+                </a:tc>
+                <a:extLst>
+                  <a:ext uri="{0D108BD9-81ED-4DB2-BD59-A6C34878D82A}">
+                    <a16:rowId xmlns:a16="http://schemas.microsoft.com/office/drawing/2014/main" val="1059292240"/>
+                  </a:ext>
+                </a:extLst>
+              </a:tr>
+              <a:tr h="296664">
+                <a:tc>
+                  <a:txBody>
+                    <a:bodyPr/>
+                    <a:lstStyle/>
+                    <a:p>
+                      <a:pPr>
+                        <a:lnSpc>
+                          <a:spcPct val="115000"/>
+                        </a:lnSpc>
+                        <a:spcAft>
+                          <a:spcPts val="800"/>
+                        </a:spcAft>
+                        <a:buNone/>
+                      </a:pPr>
+                      <a:r>
+                        <a:rPr lang="en-US" sz="1000" kern="100">
+                          <a:effectLst/>
+                        </a:rPr>
+                        <a:t>24 March</a:t>
+                      </a:r>
+                      <a:endParaRPr lang="en-GB" sz="1000" kern="100">
+                        <a:effectLst/>
+                        <a:latin typeface="Aptos" panose="020B0004020202020204" pitchFamily="34" charset="0"/>
+                        <a:ea typeface="DengXian" panose="02010600030101010101" pitchFamily="2" charset="-122"/>
+                        <a:cs typeface="Arial" panose="020B0604020202020204" pitchFamily="34" charset="0"/>
+                      </a:endParaRPr>
+                    </a:p>
+                  </a:txBody>
+                  <a:tcPr marL="60165" marR="60165" marT="30082" marB="30082"/>
+                </a:tc>
+                <a:tc>
+                  <a:txBody>
+                    <a:bodyPr/>
+                    <a:lstStyle/>
+                    <a:p>
+                      <a:pPr>
+                        <a:lnSpc>
+                          <a:spcPct val="115000"/>
+                        </a:lnSpc>
+                        <a:spcAft>
+                          <a:spcPts val="800"/>
+                        </a:spcAft>
+                        <a:buNone/>
+                      </a:pPr>
+                      <a:r>
+                        <a:rPr lang="en-US" sz="1000" kern="100">
+                          <a:effectLst/>
+                        </a:rPr>
+                        <a:t>3</a:t>
+                      </a:r>
+                      <a:endParaRPr lang="en-GB" sz="1000" kern="100">
+                        <a:effectLst/>
+                        <a:latin typeface="Aptos" panose="020B0004020202020204" pitchFamily="34" charset="0"/>
+                        <a:ea typeface="DengXian" panose="02010600030101010101" pitchFamily="2" charset="-122"/>
+                        <a:cs typeface="Arial" panose="020B0604020202020204" pitchFamily="34" charset="0"/>
+                      </a:endParaRPr>
+                    </a:p>
+                  </a:txBody>
+                  <a:tcPr marL="60165" marR="60165" marT="30082" marB="30082"/>
+                </a:tc>
+                <a:tc>
+                  <a:txBody>
+                    <a:bodyPr/>
+                    <a:lstStyle/>
+                    <a:p>
+                      <a:pPr>
+                        <a:lnSpc>
+                          <a:spcPct val="115000"/>
+                        </a:lnSpc>
+                        <a:spcAft>
+                          <a:spcPts val="800"/>
+                        </a:spcAft>
+                        <a:buNone/>
+                      </a:pPr>
+                      <a:r>
+                        <a:rPr lang="en-US" sz="1000" kern="100">
+                          <a:effectLst/>
+                        </a:rPr>
+                        <a:t>9-12</a:t>
+                      </a:r>
+                      <a:endParaRPr lang="en-GB" sz="1000" kern="100">
+                        <a:effectLst/>
+                        <a:latin typeface="Aptos" panose="020B0004020202020204" pitchFamily="34" charset="0"/>
+                        <a:ea typeface="DengXian" panose="02010600030101010101" pitchFamily="2" charset="-122"/>
+                        <a:cs typeface="Arial" panose="020B0604020202020204" pitchFamily="34" charset="0"/>
+                      </a:endParaRPr>
+                    </a:p>
+                  </a:txBody>
+                  <a:tcPr marL="60165" marR="60165" marT="30082" marB="30082"/>
+                </a:tc>
+                <a:tc>
+                  <a:txBody>
+                    <a:bodyPr/>
+                    <a:lstStyle/>
+                    <a:p>
+                      <a:pPr>
+                        <a:lnSpc>
+                          <a:spcPct val="115000"/>
+                        </a:lnSpc>
+                        <a:spcAft>
+                          <a:spcPts val="800"/>
+                        </a:spcAft>
+                        <a:buNone/>
+                      </a:pPr>
+                      <a:r>
+                        <a:rPr lang="en-GB" sz="1000" kern="100">
+                          <a:effectLst/>
+                        </a:rPr>
+                        <a:t>CCZ312</a:t>
+                      </a:r>
+                      <a:endParaRPr lang="en-GB" sz="1000" kern="100">
+                        <a:effectLst/>
+                        <a:latin typeface="Aptos" panose="020B0004020202020204" pitchFamily="34" charset="0"/>
+                        <a:ea typeface="DengXian" panose="02010600030101010101" pitchFamily="2" charset="-122"/>
+                        <a:cs typeface="Arial" panose="020B0604020202020204" pitchFamily="34" charset="0"/>
+                      </a:endParaRPr>
+                    </a:p>
+                  </a:txBody>
+                  <a:tcPr marL="60165" marR="60165" marT="30082" marB="30082"/>
+                </a:tc>
+                <a:tc gridSpan="3">
+                  <a:txBody>
+                    <a:bodyPr/>
+                    <a:lstStyle/>
+                    <a:p>
+                      <a:pPr>
+                        <a:lnSpc>
+                          <a:spcPct val="115000"/>
+                        </a:lnSpc>
+                        <a:spcAft>
+                          <a:spcPts val="800"/>
+                        </a:spcAft>
+                        <a:buNone/>
+                      </a:pPr>
+                      <a:r>
+                        <a:rPr lang="en-US" sz="1000" kern="100">
+                          <a:effectLst/>
+                        </a:rPr>
+                        <a:t>Transmission Media</a:t>
+                      </a:r>
+                      <a:endParaRPr lang="en-GB" sz="1000" kern="100">
+                        <a:effectLst/>
+                        <a:latin typeface="Aptos" panose="020B0004020202020204" pitchFamily="34" charset="0"/>
+                        <a:ea typeface="DengXian" panose="02010600030101010101" pitchFamily="2" charset="-122"/>
+                        <a:cs typeface="Arial" panose="020B0604020202020204" pitchFamily="34" charset="0"/>
+                      </a:endParaRPr>
+                    </a:p>
+                  </a:txBody>
+                  <a:tcPr marL="60165" marR="60165" marT="30082" marB="30082"/>
+                </a:tc>
+                <a:tc hMerge="1">
+                  <a:txBody>
+                    <a:bodyPr/>
+                    <a:lstStyle/>
+                    <a:p>
+                      <a:endParaRPr lang="en-GB"/>
+                    </a:p>
+                  </a:txBody>
+                  <a:tcPr/>
+                </a:tc>
+                <a:tc hMerge="1">
+                  <a:txBody>
+                    <a:bodyPr/>
+                    <a:lstStyle/>
+                    <a:p>
+                      <a:endParaRPr lang="en-GB"/>
+                    </a:p>
+                  </a:txBody>
+                  <a:tcPr/>
+                </a:tc>
+                <a:tc>
+                  <a:txBody>
+                    <a:bodyPr/>
+                    <a:lstStyle/>
+                    <a:p>
+                      <a:pPr>
+                        <a:lnSpc>
+                          <a:spcPct val="115000"/>
+                        </a:lnSpc>
+                        <a:buNone/>
+                      </a:pPr>
+                      <a:endParaRPr lang="en-GB" sz="1000" kern="100">
+                        <a:effectLst/>
+                        <a:latin typeface="Aptos" panose="020B0004020202020204" pitchFamily="34" charset="0"/>
+                      </a:endParaRPr>
+                    </a:p>
+                  </a:txBody>
+                  <a:tcPr marL="60165" marR="60165" marT="30082" marB="30082"/>
+                </a:tc>
+                <a:tc gridSpan="2">
+                  <a:txBody>
+                    <a:bodyPr/>
+                    <a:lstStyle/>
+                    <a:p>
+                      <a:pPr>
+                        <a:lnSpc>
+                          <a:spcPct val="115000"/>
+                        </a:lnSpc>
+                        <a:spcAft>
+                          <a:spcPts val="800"/>
+                        </a:spcAft>
+                        <a:buNone/>
+                      </a:pPr>
+                      <a:r>
+                        <a:rPr lang="en-GB" sz="1000" kern="100">
+                          <a:effectLst/>
+                        </a:rPr>
+                        <a:t> </a:t>
+                      </a:r>
+                      <a:endParaRPr lang="en-GB" sz="1000" kern="100">
+                        <a:effectLst/>
+                        <a:latin typeface="Aptos" panose="020B0004020202020204" pitchFamily="34" charset="0"/>
+                        <a:ea typeface="DengXian" panose="02010600030101010101" pitchFamily="2" charset="-122"/>
+                        <a:cs typeface="Arial" panose="020B0604020202020204" pitchFamily="34" charset="0"/>
+                      </a:endParaRPr>
+                    </a:p>
+                  </a:txBody>
+                  <a:tcPr marL="0" marR="0" marT="0" marB="0" anchor="ctr"/>
+                </a:tc>
+                <a:tc hMerge="1">
+                  <a:txBody>
+                    <a:bodyPr/>
+                    <a:lstStyle/>
+                    <a:p>
+                      <a:endParaRPr lang="en-GB"/>
+                    </a:p>
+                  </a:txBody>
+                  <a:tcPr/>
+                </a:tc>
+                <a:extLst>
+                  <a:ext uri="{0D108BD9-81ED-4DB2-BD59-A6C34878D82A}">
+                    <a16:rowId xmlns:a16="http://schemas.microsoft.com/office/drawing/2014/main" val="3321457384"/>
+                  </a:ext>
+                </a:extLst>
+              </a:tr>
+              <a:tr h="296664">
+                <a:tc>
+                  <a:txBody>
+                    <a:bodyPr/>
+                    <a:lstStyle/>
+                    <a:p>
+                      <a:pPr>
+                        <a:lnSpc>
+                          <a:spcPct val="115000"/>
+                        </a:lnSpc>
+                        <a:spcAft>
+                          <a:spcPts val="800"/>
+                        </a:spcAft>
+                        <a:buNone/>
+                      </a:pPr>
+                      <a:r>
+                        <a:rPr lang="en-US" sz="1000" kern="100">
+                          <a:effectLst/>
+                        </a:rPr>
+                        <a:t>25 March</a:t>
+                      </a:r>
+                      <a:endParaRPr lang="en-GB" sz="1000" kern="100">
+                        <a:effectLst/>
+                        <a:latin typeface="Aptos" panose="020B0004020202020204" pitchFamily="34" charset="0"/>
+                        <a:ea typeface="DengXian" panose="02010600030101010101" pitchFamily="2" charset="-122"/>
+                        <a:cs typeface="Arial" panose="020B0604020202020204" pitchFamily="34" charset="0"/>
+                      </a:endParaRPr>
+                    </a:p>
+                  </a:txBody>
+                  <a:tcPr marL="60165" marR="60165" marT="30082" marB="30082"/>
+                </a:tc>
+                <a:tc>
+                  <a:txBody>
+                    <a:bodyPr/>
+                    <a:lstStyle/>
+                    <a:p>
+                      <a:pPr>
+                        <a:lnSpc>
+                          <a:spcPct val="115000"/>
+                        </a:lnSpc>
+                        <a:spcAft>
+                          <a:spcPts val="800"/>
+                        </a:spcAft>
+                        <a:buNone/>
+                      </a:pPr>
+                      <a:r>
+                        <a:rPr lang="en-US" sz="1000" kern="100">
+                          <a:effectLst/>
+                        </a:rPr>
+                        <a:t>4</a:t>
+                      </a:r>
+                      <a:endParaRPr lang="en-GB" sz="1000" kern="100">
+                        <a:effectLst/>
+                        <a:latin typeface="Aptos" panose="020B0004020202020204" pitchFamily="34" charset="0"/>
+                        <a:ea typeface="DengXian" panose="02010600030101010101" pitchFamily="2" charset="-122"/>
+                        <a:cs typeface="Arial" panose="020B0604020202020204" pitchFamily="34" charset="0"/>
+                      </a:endParaRPr>
+                    </a:p>
+                  </a:txBody>
+                  <a:tcPr marL="60165" marR="60165" marT="30082" marB="30082"/>
+                </a:tc>
+                <a:tc>
+                  <a:txBody>
+                    <a:bodyPr/>
+                    <a:lstStyle/>
+                    <a:p>
+                      <a:pPr>
+                        <a:lnSpc>
+                          <a:spcPct val="115000"/>
+                        </a:lnSpc>
+                        <a:spcAft>
+                          <a:spcPts val="800"/>
+                        </a:spcAft>
+                        <a:buNone/>
+                      </a:pPr>
+                      <a:r>
+                        <a:rPr lang="en-US" sz="1000" kern="100">
+                          <a:effectLst/>
+                        </a:rPr>
+                        <a:t>9-12</a:t>
+                      </a:r>
+                      <a:endParaRPr lang="en-GB" sz="1000" kern="100">
+                        <a:effectLst/>
+                        <a:latin typeface="Aptos" panose="020B0004020202020204" pitchFamily="34" charset="0"/>
+                        <a:ea typeface="DengXian" panose="02010600030101010101" pitchFamily="2" charset="-122"/>
+                        <a:cs typeface="Arial" panose="020B0604020202020204" pitchFamily="34" charset="0"/>
+                      </a:endParaRPr>
+                    </a:p>
+                  </a:txBody>
+                  <a:tcPr marL="60165" marR="60165" marT="30082" marB="30082"/>
+                </a:tc>
+                <a:tc>
+                  <a:txBody>
+                    <a:bodyPr/>
+                    <a:lstStyle/>
+                    <a:p>
+                      <a:pPr>
+                        <a:lnSpc>
+                          <a:spcPct val="115000"/>
+                        </a:lnSpc>
+                        <a:spcAft>
+                          <a:spcPts val="800"/>
+                        </a:spcAft>
+                        <a:buNone/>
+                      </a:pPr>
+                      <a:r>
+                        <a:rPr lang="en-GB" sz="1000" kern="100">
+                          <a:effectLst/>
+                        </a:rPr>
+                        <a:t>CMP168</a:t>
+                      </a:r>
+                      <a:endParaRPr lang="en-GB" sz="1000" kern="100">
+                        <a:effectLst/>
+                        <a:latin typeface="Aptos" panose="020B0004020202020204" pitchFamily="34" charset="0"/>
+                        <a:ea typeface="DengXian" panose="02010600030101010101" pitchFamily="2" charset="-122"/>
+                        <a:cs typeface="Arial" panose="020B0604020202020204" pitchFamily="34" charset="0"/>
+                      </a:endParaRPr>
+                    </a:p>
+                  </a:txBody>
+                  <a:tcPr marL="60165" marR="60165" marT="30082" marB="30082"/>
+                </a:tc>
+                <a:tc gridSpan="3">
+                  <a:txBody>
+                    <a:bodyPr/>
+                    <a:lstStyle/>
+                    <a:p>
+                      <a:pPr>
+                        <a:lnSpc>
+                          <a:spcPct val="115000"/>
+                        </a:lnSpc>
+                        <a:spcAft>
+                          <a:spcPts val="800"/>
+                        </a:spcAft>
+                        <a:buNone/>
+                      </a:pPr>
+                      <a:r>
+                        <a:rPr lang="en-US" sz="1000" kern="100">
+                          <a:effectLst/>
+                        </a:rPr>
+                        <a:t>Electrics, Shielding, Connectors</a:t>
+                      </a:r>
+                      <a:endParaRPr lang="en-GB" sz="1000" kern="100">
+                        <a:effectLst/>
+                        <a:latin typeface="Aptos" panose="020B0004020202020204" pitchFamily="34" charset="0"/>
+                        <a:ea typeface="DengXian" panose="02010600030101010101" pitchFamily="2" charset="-122"/>
+                        <a:cs typeface="Arial" panose="020B0604020202020204" pitchFamily="34" charset="0"/>
+                      </a:endParaRPr>
+                    </a:p>
+                  </a:txBody>
+                  <a:tcPr marL="60165" marR="60165" marT="30082" marB="30082"/>
+                </a:tc>
+                <a:tc hMerge="1">
+                  <a:txBody>
+                    <a:bodyPr/>
+                    <a:lstStyle/>
+                    <a:p>
+                      <a:endParaRPr lang="en-GB"/>
+                    </a:p>
+                  </a:txBody>
+                  <a:tcPr/>
+                </a:tc>
+                <a:tc hMerge="1">
+                  <a:txBody>
+                    <a:bodyPr/>
+                    <a:lstStyle/>
+                    <a:p>
+                      <a:endParaRPr lang="en-GB"/>
+                    </a:p>
+                  </a:txBody>
+                  <a:tcPr/>
+                </a:tc>
+                <a:tc>
+                  <a:txBody>
+                    <a:bodyPr/>
+                    <a:lstStyle/>
+                    <a:p>
+                      <a:pPr>
+                        <a:lnSpc>
+                          <a:spcPct val="115000"/>
+                        </a:lnSpc>
+                        <a:buNone/>
+                      </a:pPr>
+                      <a:endParaRPr lang="en-GB" sz="1000" kern="100">
+                        <a:effectLst/>
+                        <a:latin typeface="Aptos" panose="020B0004020202020204" pitchFamily="34" charset="0"/>
+                      </a:endParaRPr>
+                    </a:p>
+                  </a:txBody>
+                  <a:tcPr marL="60165" marR="60165" marT="30082" marB="30082"/>
+                </a:tc>
+                <a:tc gridSpan="2">
+                  <a:txBody>
+                    <a:bodyPr/>
+                    <a:lstStyle/>
+                    <a:p>
+                      <a:pPr>
+                        <a:lnSpc>
+                          <a:spcPct val="115000"/>
+                        </a:lnSpc>
+                        <a:spcAft>
+                          <a:spcPts val="800"/>
+                        </a:spcAft>
+                        <a:buNone/>
+                      </a:pPr>
+                      <a:r>
+                        <a:rPr lang="en-GB" sz="1000" kern="100">
+                          <a:effectLst/>
+                        </a:rPr>
+                        <a:t> </a:t>
+                      </a:r>
+                      <a:endParaRPr lang="en-GB" sz="1000" kern="100">
+                        <a:effectLst/>
+                        <a:latin typeface="Aptos" panose="020B0004020202020204" pitchFamily="34" charset="0"/>
+                        <a:ea typeface="DengXian" panose="02010600030101010101" pitchFamily="2" charset="-122"/>
+                        <a:cs typeface="Arial" panose="020B0604020202020204" pitchFamily="34" charset="0"/>
+                      </a:endParaRPr>
+                    </a:p>
+                  </a:txBody>
+                  <a:tcPr marL="0" marR="0" marT="0" marB="0" anchor="ctr"/>
+                </a:tc>
+                <a:tc hMerge="1">
+                  <a:txBody>
+                    <a:bodyPr/>
+                    <a:lstStyle/>
+                    <a:p>
+                      <a:endParaRPr lang="en-GB"/>
+                    </a:p>
+                  </a:txBody>
+                  <a:tcPr/>
+                </a:tc>
+                <a:extLst>
+                  <a:ext uri="{0D108BD9-81ED-4DB2-BD59-A6C34878D82A}">
+                    <a16:rowId xmlns:a16="http://schemas.microsoft.com/office/drawing/2014/main" val="886047537"/>
+                  </a:ext>
+                </a:extLst>
+              </a:tr>
+              <a:tr h="296664">
+                <a:tc>
+                  <a:txBody>
+                    <a:bodyPr/>
+                    <a:lstStyle/>
+                    <a:p>
+                      <a:pPr>
+                        <a:lnSpc>
+                          <a:spcPct val="115000"/>
+                        </a:lnSpc>
+                        <a:spcAft>
+                          <a:spcPts val="800"/>
+                        </a:spcAft>
+                        <a:buNone/>
+                      </a:pPr>
+                      <a:r>
+                        <a:rPr lang="en-US" sz="1000" kern="100">
+                          <a:effectLst/>
+                        </a:rPr>
+                        <a:t>26 March</a:t>
+                      </a:r>
+                      <a:endParaRPr lang="en-GB" sz="1000" kern="100">
+                        <a:effectLst/>
+                        <a:latin typeface="Aptos" panose="020B0004020202020204" pitchFamily="34" charset="0"/>
+                        <a:ea typeface="DengXian" panose="02010600030101010101" pitchFamily="2" charset="-122"/>
+                        <a:cs typeface="Arial" panose="020B0604020202020204" pitchFamily="34" charset="0"/>
+                      </a:endParaRPr>
+                    </a:p>
+                  </a:txBody>
+                  <a:tcPr marL="60165" marR="60165" marT="30082" marB="30082"/>
+                </a:tc>
+                <a:tc>
+                  <a:txBody>
+                    <a:bodyPr/>
+                    <a:lstStyle/>
+                    <a:p>
+                      <a:pPr>
+                        <a:lnSpc>
+                          <a:spcPct val="115000"/>
+                        </a:lnSpc>
+                        <a:spcAft>
+                          <a:spcPts val="800"/>
+                        </a:spcAft>
+                        <a:buNone/>
+                      </a:pPr>
+                      <a:r>
+                        <a:rPr lang="en-GB" sz="1000" kern="100">
+                          <a:effectLst/>
+                        </a:rPr>
+                        <a:t>5</a:t>
+                      </a:r>
+                      <a:endParaRPr lang="en-GB" sz="1000" kern="100">
+                        <a:effectLst/>
+                        <a:latin typeface="Aptos" panose="020B0004020202020204" pitchFamily="34" charset="0"/>
+                        <a:ea typeface="DengXian" panose="02010600030101010101" pitchFamily="2" charset="-122"/>
+                        <a:cs typeface="Arial" panose="020B0604020202020204" pitchFamily="34" charset="0"/>
+                      </a:endParaRPr>
+                    </a:p>
+                  </a:txBody>
+                  <a:tcPr marL="60165" marR="60165" marT="30082" marB="30082"/>
+                </a:tc>
+                <a:tc>
+                  <a:txBody>
+                    <a:bodyPr/>
+                    <a:lstStyle/>
+                    <a:p>
+                      <a:pPr>
+                        <a:lnSpc>
+                          <a:spcPct val="115000"/>
+                        </a:lnSpc>
+                        <a:spcAft>
+                          <a:spcPts val="800"/>
+                        </a:spcAft>
+                        <a:buNone/>
+                      </a:pPr>
+                      <a:r>
+                        <a:rPr lang="en-US" sz="1000" kern="100">
+                          <a:effectLst/>
+                        </a:rPr>
+                        <a:t>9-12</a:t>
+                      </a:r>
+                      <a:endParaRPr lang="en-GB" sz="1000" kern="100">
+                        <a:effectLst/>
+                        <a:latin typeface="Aptos" panose="020B0004020202020204" pitchFamily="34" charset="0"/>
+                        <a:ea typeface="DengXian" panose="02010600030101010101" pitchFamily="2" charset="-122"/>
+                        <a:cs typeface="Arial" panose="020B0604020202020204" pitchFamily="34" charset="0"/>
+                      </a:endParaRPr>
+                    </a:p>
+                  </a:txBody>
+                  <a:tcPr marL="60165" marR="60165" marT="30082" marB="30082"/>
+                </a:tc>
+                <a:tc>
+                  <a:txBody>
+                    <a:bodyPr/>
+                    <a:lstStyle/>
+                    <a:p>
+                      <a:pPr>
+                        <a:lnSpc>
+                          <a:spcPct val="115000"/>
+                        </a:lnSpc>
+                        <a:spcAft>
+                          <a:spcPts val="800"/>
+                        </a:spcAft>
+                        <a:buNone/>
+                      </a:pPr>
+                      <a:r>
+                        <a:rPr lang="en-GB" sz="1000" kern="100">
+                          <a:effectLst/>
+                        </a:rPr>
+                        <a:t>CMP211</a:t>
+                      </a:r>
+                      <a:endParaRPr lang="en-GB" sz="1000" kern="100">
+                        <a:effectLst/>
+                        <a:latin typeface="Aptos" panose="020B0004020202020204" pitchFamily="34" charset="0"/>
+                        <a:ea typeface="DengXian" panose="02010600030101010101" pitchFamily="2" charset="-122"/>
+                        <a:cs typeface="Arial" panose="020B0604020202020204" pitchFamily="34" charset="0"/>
+                      </a:endParaRPr>
+                    </a:p>
+                  </a:txBody>
+                  <a:tcPr marL="60165" marR="60165" marT="30082" marB="30082"/>
+                </a:tc>
+                <a:tc gridSpan="3">
+                  <a:txBody>
+                    <a:bodyPr/>
+                    <a:lstStyle/>
+                    <a:p>
+                      <a:pPr>
+                        <a:lnSpc>
+                          <a:spcPct val="115000"/>
+                        </a:lnSpc>
+                        <a:spcAft>
+                          <a:spcPts val="800"/>
+                        </a:spcAft>
+                        <a:buNone/>
+                      </a:pPr>
+                      <a:r>
+                        <a:rPr lang="en-US" sz="1000" kern="100">
+                          <a:effectLst/>
+                        </a:rPr>
+                        <a:t>Modulation and Multiplexing</a:t>
+                      </a:r>
+                      <a:endParaRPr lang="en-GB" sz="1000" kern="100">
+                        <a:effectLst/>
+                        <a:latin typeface="Aptos" panose="020B0004020202020204" pitchFamily="34" charset="0"/>
+                        <a:ea typeface="DengXian" panose="02010600030101010101" pitchFamily="2" charset="-122"/>
+                        <a:cs typeface="Arial" panose="020B0604020202020204" pitchFamily="34" charset="0"/>
+                      </a:endParaRPr>
+                    </a:p>
+                  </a:txBody>
+                  <a:tcPr marL="60165" marR="60165" marT="30082" marB="30082"/>
+                </a:tc>
+                <a:tc hMerge="1">
+                  <a:txBody>
+                    <a:bodyPr/>
+                    <a:lstStyle/>
+                    <a:p>
+                      <a:endParaRPr lang="en-GB"/>
+                    </a:p>
+                  </a:txBody>
+                  <a:tcPr/>
+                </a:tc>
+                <a:tc hMerge="1">
+                  <a:txBody>
+                    <a:bodyPr/>
+                    <a:lstStyle/>
+                    <a:p>
+                      <a:endParaRPr lang="en-GB"/>
+                    </a:p>
+                  </a:txBody>
+                  <a:tcPr/>
+                </a:tc>
+                <a:tc>
+                  <a:txBody>
+                    <a:bodyPr/>
+                    <a:lstStyle/>
+                    <a:p>
+                      <a:pPr>
+                        <a:lnSpc>
+                          <a:spcPct val="115000"/>
+                        </a:lnSpc>
+                        <a:buNone/>
+                      </a:pPr>
+                      <a:endParaRPr lang="en-GB" sz="1000" kern="100">
+                        <a:effectLst/>
+                        <a:latin typeface="Aptos" panose="020B0004020202020204" pitchFamily="34" charset="0"/>
+                      </a:endParaRPr>
+                    </a:p>
+                  </a:txBody>
+                  <a:tcPr marL="60165" marR="60165" marT="30082" marB="30082"/>
+                </a:tc>
+                <a:tc gridSpan="2">
+                  <a:txBody>
+                    <a:bodyPr/>
+                    <a:lstStyle/>
+                    <a:p>
+                      <a:pPr>
+                        <a:lnSpc>
+                          <a:spcPct val="115000"/>
+                        </a:lnSpc>
+                        <a:spcAft>
+                          <a:spcPts val="800"/>
+                        </a:spcAft>
+                        <a:buNone/>
+                      </a:pPr>
+                      <a:r>
+                        <a:rPr lang="en-GB" sz="1000" kern="100">
+                          <a:effectLst/>
+                        </a:rPr>
+                        <a:t> </a:t>
+                      </a:r>
+                      <a:endParaRPr lang="en-GB" sz="1000" kern="100">
+                        <a:effectLst/>
+                        <a:latin typeface="Aptos" panose="020B0004020202020204" pitchFamily="34" charset="0"/>
+                        <a:ea typeface="DengXian" panose="02010600030101010101" pitchFamily="2" charset="-122"/>
+                        <a:cs typeface="Arial" panose="020B0604020202020204" pitchFamily="34" charset="0"/>
+                      </a:endParaRPr>
+                    </a:p>
+                  </a:txBody>
+                  <a:tcPr marL="0" marR="0" marT="0" marB="0" anchor="ctr"/>
+                </a:tc>
+                <a:tc hMerge="1">
+                  <a:txBody>
+                    <a:bodyPr/>
+                    <a:lstStyle/>
+                    <a:p>
+                      <a:endParaRPr lang="en-GB"/>
+                    </a:p>
+                  </a:txBody>
+                  <a:tcPr/>
+                </a:tc>
+                <a:extLst>
+                  <a:ext uri="{0D108BD9-81ED-4DB2-BD59-A6C34878D82A}">
+                    <a16:rowId xmlns:a16="http://schemas.microsoft.com/office/drawing/2014/main" val="447019148"/>
+                  </a:ext>
+                </a:extLst>
+              </a:tr>
+              <a:tr h="296664">
+                <a:tc>
+                  <a:txBody>
+                    <a:bodyPr/>
+                    <a:lstStyle/>
+                    <a:p>
+                      <a:pPr>
+                        <a:lnSpc>
+                          <a:spcPct val="115000"/>
+                        </a:lnSpc>
+                        <a:spcAft>
+                          <a:spcPts val="800"/>
+                        </a:spcAft>
+                        <a:buNone/>
+                      </a:pPr>
+                      <a:r>
+                        <a:rPr lang="en-US" sz="1000" kern="100">
+                          <a:effectLst/>
+                        </a:rPr>
+                        <a:t>13 April </a:t>
+                      </a:r>
+                      <a:endParaRPr lang="en-GB" sz="1000" kern="100">
+                        <a:effectLst/>
+                        <a:latin typeface="Aptos" panose="020B0004020202020204" pitchFamily="34" charset="0"/>
+                        <a:ea typeface="DengXian" panose="02010600030101010101" pitchFamily="2" charset="-122"/>
+                        <a:cs typeface="Arial" panose="020B0604020202020204" pitchFamily="34" charset="0"/>
+                      </a:endParaRPr>
+                    </a:p>
+                  </a:txBody>
+                  <a:tcPr marL="60165" marR="60165" marT="30082" marB="30082"/>
+                </a:tc>
+                <a:tc>
+                  <a:txBody>
+                    <a:bodyPr/>
+                    <a:lstStyle/>
+                    <a:p>
+                      <a:pPr>
+                        <a:lnSpc>
+                          <a:spcPct val="115000"/>
+                        </a:lnSpc>
+                        <a:spcAft>
+                          <a:spcPts val="800"/>
+                        </a:spcAft>
+                        <a:buNone/>
+                      </a:pPr>
+                      <a:r>
+                        <a:rPr lang="en-GB" sz="1000" kern="100">
+                          <a:effectLst/>
+                        </a:rPr>
+                        <a:t>6</a:t>
+                      </a:r>
+                      <a:endParaRPr lang="en-GB" sz="1000" kern="100">
+                        <a:effectLst/>
+                        <a:latin typeface="Aptos" panose="020B0004020202020204" pitchFamily="34" charset="0"/>
+                        <a:ea typeface="DengXian" panose="02010600030101010101" pitchFamily="2" charset="-122"/>
+                        <a:cs typeface="Arial" panose="020B0604020202020204" pitchFamily="34" charset="0"/>
+                      </a:endParaRPr>
+                    </a:p>
+                  </a:txBody>
+                  <a:tcPr marL="60165" marR="60165" marT="30082" marB="30082"/>
+                </a:tc>
+                <a:tc>
+                  <a:txBody>
+                    <a:bodyPr/>
+                    <a:lstStyle/>
+                    <a:p>
+                      <a:pPr>
+                        <a:lnSpc>
+                          <a:spcPct val="115000"/>
+                        </a:lnSpc>
+                        <a:spcAft>
+                          <a:spcPts val="800"/>
+                        </a:spcAft>
+                        <a:buNone/>
+                      </a:pPr>
+                      <a:r>
+                        <a:rPr lang="en-US" sz="1000" kern="100">
+                          <a:effectLst/>
+                        </a:rPr>
+                        <a:t>9-12</a:t>
+                      </a:r>
+                      <a:endParaRPr lang="en-GB" sz="1000" kern="100">
+                        <a:effectLst/>
+                        <a:latin typeface="Aptos" panose="020B0004020202020204" pitchFamily="34" charset="0"/>
+                        <a:ea typeface="DengXian" panose="02010600030101010101" pitchFamily="2" charset="-122"/>
+                        <a:cs typeface="Arial" panose="020B0604020202020204" pitchFamily="34" charset="0"/>
+                      </a:endParaRPr>
+                    </a:p>
+                  </a:txBody>
+                  <a:tcPr marL="60165" marR="60165" marT="30082" marB="30082"/>
+                </a:tc>
+                <a:tc>
+                  <a:txBody>
+                    <a:bodyPr/>
+                    <a:lstStyle/>
+                    <a:p>
+                      <a:pPr>
+                        <a:lnSpc>
+                          <a:spcPct val="115000"/>
+                        </a:lnSpc>
+                        <a:spcAft>
+                          <a:spcPts val="800"/>
+                        </a:spcAft>
+                        <a:buNone/>
+                      </a:pPr>
+                      <a:r>
+                        <a:rPr lang="en-GB" sz="1000" kern="100">
+                          <a:effectLst/>
+                        </a:rPr>
+                        <a:t>CCZ269</a:t>
+                      </a:r>
+                      <a:endParaRPr lang="en-GB" sz="1000" kern="100">
+                        <a:effectLst/>
+                        <a:latin typeface="Aptos" panose="020B0004020202020204" pitchFamily="34" charset="0"/>
+                        <a:ea typeface="DengXian" panose="02010600030101010101" pitchFamily="2" charset="-122"/>
+                        <a:cs typeface="Arial" panose="020B0604020202020204" pitchFamily="34" charset="0"/>
+                      </a:endParaRPr>
+                    </a:p>
+                  </a:txBody>
+                  <a:tcPr marL="60165" marR="60165" marT="30082" marB="30082"/>
+                </a:tc>
+                <a:tc gridSpan="3">
+                  <a:txBody>
+                    <a:bodyPr/>
+                    <a:lstStyle/>
+                    <a:p>
+                      <a:pPr>
+                        <a:lnSpc>
+                          <a:spcPct val="115000"/>
+                        </a:lnSpc>
+                        <a:spcAft>
+                          <a:spcPts val="800"/>
+                        </a:spcAft>
+                        <a:buNone/>
+                      </a:pPr>
+                      <a:r>
+                        <a:rPr lang="en-US" sz="1000" kern="100">
+                          <a:effectLst/>
+                        </a:rPr>
+                        <a:t>Gamma, OOTF, PQ</a:t>
+                      </a:r>
+                      <a:endParaRPr lang="en-GB" sz="1000" kern="100">
+                        <a:effectLst/>
+                        <a:latin typeface="Aptos" panose="020B0004020202020204" pitchFamily="34" charset="0"/>
+                        <a:ea typeface="DengXian" panose="02010600030101010101" pitchFamily="2" charset="-122"/>
+                        <a:cs typeface="Arial" panose="020B0604020202020204" pitchFamily="34" charset="0"/>
+                      </a:endParaRPr>
+                    </a:p>
+                  </a:txBody>
+                  <a:tcPr marL="60165" marR="60165" marT="30082" marB="30082"/>
+                </a:tc>
+                <a:tc hMerge="1">
+                  <a:txBody>
+                    <a:bodyPr/>
+                    <a:lstStyle/>
+                    <a:p>
+                      <a:endParaRPr lang="en-GB"/>
+                    </a:p>
+                  </a:txBody>
+                  <a:tcPr/>
+                </a:tc>
+                <a:tc hMerge="1">
+                  <a:txBody>
+                    <a:bodyPr/>
+                    <a:lstStyle/>
+                    <a:p>
+                      <a:endParaRPr lang="en-GB"/>
+                    </a:p>
+                  </a:txBody>
+                  <a:tcPr/>
+                </a:tc>
+                <a:tc>
+                  <a:txBody>
+                    <a:bodyPr/>
+                    <a:lstStyle/>
+                    <a:p>
+                      <a:pPr>
+                        <a:lnSpc>
+                          <a:spcPct val="115000"/>
+                        </a:lnSpc>
+                        <a:buNone/>
+                      </a:pPr>
+                      <a:endParaRPr lang="en-GB" sz="1000" kern="100">
+                        <a:effectLst/>
+                        <a:latin typeface="Aptos" panose="020B0004020202020204" pitchFamily="34" charset="0"/>
+                      </a:endParaRPr>
+                    </a:p>
+                  </a:txBody>
+                  <a:tcPr marL="60165" marR="60165" marT="30082" marB="30082"/>
+                </a:tc>
+                <a:tc gridSpan="2">
+                  <a:txBody>
+                    <a:bodyPr/>
+                    <a:lstStyle/>
+                    <a:p>
+                      <a:pPr>
+                        <a:lnSpc>
+                          <a:spcPct val="115000"/>
+                        </a:lnSpc>
+                        <a:spcAft>
+                          <a:spcPts val="800"/>
+                        </a:spcAft>
+                        <a:buNone/>
+                      </a:pPr>
+                      <a:r>
+                        <a:rPr lang="en-GB" sz="1000" kern="100">
+                          <a:effectLst/>
+                        </a:rPr>
+                        <a:t> </a:t>
+                      </a:r>
+                      <a:endParaRPr lang="en-GB" sz="1000" kern="100">
+                        <a:effectLst/>
+                        <a:latin typeface="Aptos" panose="020B0004020202020204" pitchFamily="34" charset="0"/>
+                        <a:ea typeface="DengXian" panose="02010600030101010101" pitchFamily="2" charset="-122"/>
+                        <a:cs typeface="Arial" panose="020B0604020202020204" pitchFamily="34" charset="0"/>
+                      </a:endParaRPr>
+                    </a:p>
+                  </a:txBody>
+                  <a:tcPr marL="0" marR="0" marT="0" marB="0" anchor="ctr"/>
+                </a:tc>
+                <a:tc hMerge="1">
+                  <a:txBody>
+                    <a:bodyPr/>
+                    <a:lstStyle/>
+                    <a:p>
+                      <a:endParaRPr lang="en-GB"/>
+                    </a:p>
+                  </a:txBody>
+                  <a:tcPr/>
+                </a:tc>
+                <a:extLst>
+                  <a:ext uri="{0D108BD9-81ED-4DB2-BD59-A6C34878D82A}">
+                    <a16:rowId xmlns:a16="http://schemas.microsoft.com/office/drawing/2014/main" val="2358249755"/>
+                  </a:ext>
+                </a:extLst>
+              </a:tr>
+              <a:tr h="296664">
+                <a:tc>
+                  <a:txBody>
+                    <a:bodyPr/>
+                    <a:lstStyle/>
+                    <a:p>
+                      <a:pPr>
+                        <a:lnSpc>
+                          <a:spcPct val="115000"/>
+                        </a:lnSpc>
+                        <a:spcAft>
+                          <a:spcPts val="800"/>
+                        </a:spcAft>
+                        <a:buNone/>
+                      </a:pPr>
+                      <a:r>
+                        <a:rPr lang="en-US" sz="1000" kern="100">
+                          <a:effectLst/>
+                        </a:rPr>
+                        <a:t>14 April</a:t>
+                      </a:r>
+                      <a:endParaRPr lang="en-GB" sz="1000" kern="100">
+                        <a:effectLst/>
+                        <a:latin typeface="Aptos" panose="020B0004020202020204" pitchFamily="34" charset="0"/>
+                        <a:ea typeface="DengXian" panose="02010600030101010101" pitchFamily="2" charset="-122"/>
+                        <a:cs typeface="Arial" panose="020B0604020202020204" pitchFamily="34" charset="0"/>
+                      </a:endParaRPr>
+                    </a:p>
+                  </a:txBody>
+                  <a:tcPr marL="60165" marR="60165" marT="30082" marB="30082"/>
+                </a:tc>
+                <a:tc>
+                  <a:txBody>
+                    <a:bodyPr/>
+                    <a:lstStyle/>
+                    <a:p>
+                      <a:pPr>
+                        <a:lnSpc>
+                          <a:spcPct val="115000"/>
+                        </a:lnSpc>
+                        <a:spcAft>
+                          <a:spcPts val="800"/>
+                        </a:spcAft>
+                        <a:buNone/>
+                      </a:pPr>
+                      <a:r>
+                        <a:rPr lang="en-GB" sz="1000" kern="100">
+                          <a:effectLst/>
+                        </a:rPr>
+                        <a:t>7</a:t>
+                      </a:r>
+                      <a:endParaRPr lang="en-GB" sz="1000" kern="100">
+                        <a:effectLst/>
+                        <a:latin typeface="Aptos" panose="020B0004020202020204" pitchFamily="34" charset="0"/>
+                        <a:ea typeface="DengXian" panose="02010600030101010101" pitchFamily="2" charset="-122"/>
+                        <a:cs typeface="Arial" panose="020B0604020202020204" pitchFamily="34" charset="0"/>
+                      </a:endParaRPr>
+                    </a:p>
+                  </a:txBody>
+                  <a:tcPr marL="60165" marR="60165" marT="30082" marB="30082"/>
+                </a:tc>
+                <a:tc>
+                  <a:txBody>
+                    <a:bodyPr/>
+                    <a:lstStyle/>
+                    <a:p>
+                      <a:pPr>
+                        <a:lnSpc>
+                          <a:spcPct val="115000"/>
+                        </a:lnSpc>
+                        <a:spcAft>
+                          <a:spcPts val="800"/>
+                        </a:spcAft>
+                        <a:buNone/>
+                      </a:pPr>
+                      <a:r>
+                        <a:rPr lang="en-US" sz="1000" kern="100">
+                          <a:effectLst/>
+                        </a:rPr>
+                        <a:t>9-12</a:t>
+                      </a:r>
+                      <a:endParaRPr lang="en-GB" sz="1000" kern="100">
+                        <a:effectLst/>
+                        <a:latin typeface="Aptos" panose="020B0004020202020204" pitchFamily="34" charset="0"/>
+                        <a:ea typeface="DengXian" panose="02010600030101010101" pitchFamily="2" charset="-122"/>
+                        <a:cs typeface="Arial" panose="020B0604020202020204" pitchFamily="34" charset="0"/>
+                      </a:endParaRPr>
+                    </a:p>
+                  </a:txBody>
+                  <a:tcPr marL="60165" marR="60165" marT="30082" marB="30082"/>
+                </a:tc>
+                <a:tc>
+                  <a:txBody>
+                    <a:bodyPr/>
+                    <a:lstStyle/>
+                    <a:p>
+                      <a:pPr>
+                        <a:lnSpc>
+                          <a:spcPct val="115000"/>
+                        </a:lnSpc>
+                        <a:spcAft>
+                          <a:spcPts val="800"/>
+                        </a:spcAft>
+                        <a:buNone/>
+                      </a:pPr>
+                      <a:r>
+                        <a:rPr lang="en-GB" sz="1000" kern="100">
+                          <a:effectLst/>
+                        </a:rPr>
+                        <a:t>CCZ312</a:t>
+                      </a:r>
+                      <a:endParaRPr lang="en-GB" sz="1000" kern="100">
+                        <a:effectLst/>
+                        <a:latin typeface="Aptos" panose="020B0004020202020204" pitchFamily="34" charset="0"/>
+                        <a:ea typeface="DengXian" panose="02010600030101010101" pitchFamily="2" charset="-122"/>
+                        <a:cs typeface="Arial" panose="020B0604020202020204" pitchFamily="34" charset="0"/>
+                      </a:endParaRPr>
+                    </a:p>
+                  </a:txBody>
+                  <a:tcPr marL="60165" marR="60165" marT="30082" marB="30082"/>
+                </a:tc>
+                <a:tc gridSpan="3">
+                  <a:txBody>
+                    <a:bodyPr/>
+                    <a:lstStyle/>
+                    <a:p>
+                      <a:pPr>
+                        <a:lnSpc>
+                          <a:spcPct val="115000"/>
+                        </a:lnSpc>
+                        <a:spcAft>
+                          <a:spcPts val="800"/>
+                        </a:spcAft>
+                        <a:buNone/>
+                      </a:pPr>
+                      <a:r>
+                        <a:rPr lang="en-US" sz="1000" kern="100">
+                          <a:effectLst/>
+                        </a:rPr>
+                        <a:t>SDI; Video Test and Measurement</a:t>
+                      </a:r>
+                      <a:endParaRPr lang="en-GB" sz="1000" kern="100">
+                        <a:effectLst/>
+                        <a:latin typeface="Aptos" panose="020B0004020202020204" pitchFamily="34" charset="0"/>
+                        <a:ea typeface="DengXian" panose="02010600030101010101" pitchFamily="2" charset="-122"/>
+                        <a:cs typeface="Arial" panose="020B0604020202020204" pitchFamily="34" charset="0"/>
+                      </a:endParaRPr>
+                    </a:p>
+                  </a:txBody>
+                  <a:tcPr marL="60165" marR="60165" marT="30082" marB="30082"/>
+                </a:tc>
+                <a:tc hMerge="1">
+                  <a:txBody>
+                    <a:bodyPr/>
+                    <a:lstStyle/>
+                    <a:p>
+                      <a:endParaRPr lang="en-GB"/>
+                    </a:p>
+                  </a:txBody>
+                  <a:tcPr/>
+                </a:tc>
+                <a:tc hMerge="1">
+                  <a:txBody>
+                    <a:bodyPr/>
+                    <a:lstStyle/>
+                    <a:p>
+                      <a:endParaRPr lang="en-GB"/>
+                    </a:p>
+                  </a:txBody>
+                  <a:tcPr/>
+                </a:tc>
+                <a:tc>
+                  <a:txBody>
+                    <a:bodyPr/>
+                    <a:lstStyle/>
+                    <a:p>
+                      <a:pPr>
+                        <a:lnSpc>
+                          <a:spcPct val="115000"/>
+                        </a:lnSpc>
+                        <a:buNone/>
+                      </a:pPr>
+                      <a:endParaRPr lang="en-GB" sz="1000" kern="100">
+                        <a:effectLst/>
+                        <a:latin typeface="Aptos" panose="020B0004020202020204" pitchFamily="34" charset="0"/>
+                      </a:endParaRPr>
+                    </a:p>
+                  </a:txBody>
+                  <a:tcPr marL="60165" marR="60165" marT="30082" marB="30082"/>
+                </a:tc>
+                <a:tc gridSpan="2">
+                  <a:txBody>
+                    <a:bodyPr/>
+                    <a:lstStyle/>
+                    <a:p>
+                      <a:pPr>
+                        <a:lnSpc>
+                          <a:spcPct val="115000"/>
+                        </a:lnSpc>
+                        <a:spcAft>
+                          <a:spcPts val="800"/>
+                        </a:spcAft>
+                        <a:buNone/>
+                      </a:pPr>
+                      <a:r>
+                        <a:rPr lang="en-GB" sz="1000" kern="100">
+                          <a:effectLst/>
+                        </a:rPr>
+                        <a:t> </a:t>
+                      </a:r>
+                      <a:endParaRPr lang="en-GB" sz="1000" kern="100">
+                        <a:effectLst/>
+                        <a:latin typeface="Aptos" panose="020B0004020202020204" pitchFamily="34" charset="0"/>
+                        <a:ea typeface="DengXian" panose="02010600030101010101" pitchFamily="2" charset="-122"/>
+                        <a:cs typeface="Arial" panose="020B0604020202020204" pitchFamily="34" charset="0"/>
+                      </a:endParaRPr>
+                    </a:p>
+                  </a:txBody>
+                  <a:tcPr marL="0" marR="0" marT="0" marB="0" anchor="ctr"/>
+                </a:tc>
+                <a:tc hMerge="1">
+                  <a:txBody>
+                    <a:bodyPr/>
+                    <a:lstStyle/>
+                    <a:p>
+                      <a:endParaRPr lang="en-GB"/>
+                    </a:p>
+                  </a:txBody>
+                  <a:tcPr/>
+                </a:tc>
+                <a:extLst>
+                  <a:ext uri="{0D108BD9-81ED-4DB2-BD59-A6C34878D82A}">
+                    <a16:rowId xmlns:a16="http://schemas.microsoft.com/office/drawing/2014/main" val="3770158563"/>
+                  </a:ext>
+                </a:extLst>
+              </a:tr>
+              <a:tr h="296664">
+                <a:tc>
+                  <a:txBody>
+                    <a:bodyPr/>
+                    <a:lstStyle/>
+                    <a:p>
+                      <a:pPr>
+                        <a:lnSpc>
+                          <a:spcPct val="115000"/>
+                        </a:lnSpc>
+                        <a:spcAft>
+                          <a:spcPts val="800"/>
+                        </a:spcAft>
+                        <a:buNone/>
+                      </a:pPr>
+                      <a:r>
+                        <a:rPr lang="en-US" sz="1000" kern="100">
+                          <a:effectLst/>
+                        </a:rPr>
+                        <a:t>15 April</a:t>
+                      </a:r>
+                      <a:endParaRPr lang="en-GB" sz="1000" kern="100">
+                        <a:effectLst/>
+                        <a:latin typeface="Aptos" panose="020B0004020202020204" pitchFamily="34" charset="0"/>
+                        <a:ea typeface="DengXian" panose="02010600030101010101" pitchFamily="2" charset="-122"/>
+                        <a:cs typeface="Arial" panose="020B0604020202020204" pitchFamily="34" charset="0"/>
+                      </a:endParaRPr>
+                    </a:p>
+                  </a:txBody>
+                  <a:tcPr marL="60165" marR="60165" marT="30082" marB="30082"/>
+                </a:tc>
+                <a:tc>
+                  <a:txBody>
+                    <a:bodyPr/>
+                    <a:lstStyle/>
+                    <a:p>
+                      <a:pPr>
+                        <a:lnSpc>
+                          <a:spcPct val="115000"/>
+                        </a:lnSpc>
+                        <a:spcAft>
+                          <a:spcPts val="800"/>
+                        </a:spcAft>
+                        <a:buNone/>
+                      </a:pPr>
+                      <a:r>
+                        <a:rPr lang="en-US" sz="1000" kern="100">
+                          <a:effectLst/>
+                        </a:rPr>
+                        <a:t>8</a:t>
+                      </a:r>
+                      <a:endParaRPr lang="en-GB" sz="1000" kern="100">
+                        <a:effectLst/>
+                        <a:latin typeface="Aptos" panose="020B0004020202020204" pitchFamily="34" charset="0"/>
+                        <a:ea typeface="DengXian" panose="02010600030101010101" pitchFamily="2" charset="-122"/>
+                        <a:cs typeface="Arial" panose="020B0604020202020204" pitchFamily="34" charset="0"/>
+                      </a:endParaRPr>
+                    </a:p>
+                  </a:txBody>
+                  <a:tcPr marL="60165" marR="60165" marT="30082" marB="30082"/>
+                </a:tc>
+                <a:tc>
+                  <a:txBody>
+                    <a:bodyPr/>
+                    <a:lstStyle/>
+                    <a:p>
+                      <a:pPr>
+                        <a:lnSpc>
+                          <a:spcPct val="115000"/>
+                        </a:lnSpc>
+                        <a:spcAft>
+                          <a:spcPts val="800"/>
+                        </a:spcAft>
+                        <a:buNone/>
+                      </a:pPr>
+                      <a:r>
+                        <a:rPr lang="en-US" sz="1000" kern="100">
+                          <a:effectLst/>
+                        </a:rPr>
+                        <a:t>9-12</a:t>
+                      </a:r>
+                      <a:endParaRPr lang="en-GB" sz="1000" kern="100">
+                        <a:effectLst/>
+                        <a:latin typeface="Aptos" panose="020B0004020202020204" pitchFamily="34" charset="0"/>
+                        <a:ea typeface="DengXian" panose="02010600030101010101" pitchFamily="2" charset="-122"/>
+                        <a:cs typeface="Arial" panose="020B0604020202020204" pitchFamily="34" charset="0"/>
+                      </a:endParaRPr>
+                    </a:p>
+                  </a:txBody>
+                  <a:tcPr marL="60165" marR="60165" marT="30082" marB="30082"/>
+                </a:tc>
+                <a:tc>
+                  <a:txBody>
+                    <a:bodyPr/>
+                    <a:lstStyle/>
+                    <a:p>
+                      <a:pPr>
+                        <a:lnSpc>
+                          <a:spcPct val="115000"/>
+                        </a:lnSpc>
+                        <a:spcAft>
+                          <a:spcPts val="800"/>
+                        </a:spcAft>
+                        <a:buNone/>
+                      </a:pPr>
+                      <a:r>
+                        <a:rPr lang="en-US" sz="1000" kern="100">
+                          <a:effectLst/>
+                        </a:rPr>
+                        <a:t>CMP168</a:t>
+                      </a:r>
+                      <a:endParaRPr lang="en-GB" sz="1000" kern="100">
+                        <a:effectLst/>
+                        <a:latin typeface="Aptos" panose="020B0004020202020204" pitchFamily="34" charset="0"/>
+                        <a:ea typeface="DengXian" panose="02010600030101010101" pitchFamily="2" charset="-122"/>
+                        <a:cs typeface="Arial" panose="020B0604020202020204" pitchFamily="34" charset="0"/>
+                      </a:endParaRPr>
+                    </a:p>
+                  </a:txBody>
+                  <a:tcPr marL="60165" marR="60165" marT="30082" marB="30082"/>
+                </a:tc>
+                <a:tc gridSpan="3">
+                  <a:txBody>
+                    <a:bodyPr/>
+                    <a:lstStyle/>
+                    <a:p>
+                      <a:pPr>
+                        <a:lnSpc>
+                          <a:spcPct val="115000"/>
+                        </a:lnSpc>
+                        <a:spcAft>
+                          <a:spcPts val="800"/>
+                        </a:spcAft>
+                        <a:buNone/>
+                      </a:pPr>
+                      <a:r>
+                        <a:rPr lang="en-US" sz="1000" kern="100">
+                          <a:effectLst/>
+                        </a:rPr>
+                        <a:t>Packet Media, Compression</a:t>
+                      </a:r>
+                      <a:endParaRPr lang="en-GB" sz="1000" kern="100">
+                        <a:effectLst/>
+                        <a:latin typeface="Aptos" panose="020B0004020202020204" pitchFamily="34" charset="0"/>
+                        <a:ea typeface="DengXian" panose="02010600030101010101" pitchFamily="2" charset="-122"/>
+                        <a:cs typeface="Arial" panose="020B0604020202020204" pitchFamily="34" charset="0"/>
+                      </a:endParaRPr>
+                    </a:p>
+                  </a:txBody>
+                  <a:tcPr marL="60165" marR="60165" marT="30082" marB="30082"/>
+                </a:tc>
+                <a:tc hMerge="1">
+                  <a:txBody>
+                    <a:bodyPr/>
+                    <a:lstStyle/>
+                    <a:p>
+                      <a:endParaRPr lang="en-GB"/>
+                    </a:p>
+                  </a:txBody>
+                  <a:tcPr/>
+                </a:tc>
+                <a:tc hMerge="1">
+                  <a:txBody>
+                    <a:bodyPr/>
+                    <a:lstStyle/>
+                    <a:p>
+                      <a:endParaRPr lang="en-GB"/>
+                    </a:p>
+                  </a:txBody>
+                  <a:tcPr/>
+                </a:tc>
+                <a:tc>
+                  <a:txBody>
+                    <a:bodyPr/>
+                    <a:lstStyle/>
+                    <a:p>
+                      <a:pPr>
+                        <a:lnSpc>
+                          <a:spcPct val="115000"/>
+                        </a:lnSpc>
+                        <a:buNone/>
+                      </a:pPr>
+                      <a:endParaRPr lang="en-GB" sz="1000" kern="100">
+                        <a:effectLst/>
+                        <a:latin typeface="Aptos" panose="020B0004020202020204" pitchFamily="34" charset="0"/>
+                      </a:endParaRPr>
+                    </a:p>
+                  </a:txBody>
+                  <a:tcPr marL="60165" marR="60165" marT="30082" marB="30082"/>
+                </a:tc>
+                <a:tc gridSpan="2">
+                  <a:txBody>
+                    <a:bodyPr/>
+                    <a:lstStyle/>
+                    <a:p>
+                      <a:pPr>
+                        <a:lnSpc>
+                          <a:spcPct val="115000"/>
+                        </a:lnSpc>
+                        <a:spcAft>
+                          <a:spcPts val="800"/>
+                        </a:spcAft>
+                        <a:buNone/>
+                      </a:pPr>
+                      <a:r>
+                        <a:rPr lang="en-GB" sz="1000" kern="100">
+                          <a:effectLst/>
+                        </a:rPr>
+                        <a:t> </a:t>
+                      </a:r>
+                      <a:endParaRPr lang="en-GB" sz="1000" kern="100">
+                        <a:effectLst/>
+                        <a:latin typeface="Aptos" panose="020B0004020202020204" pitchFamily="34" charset="0"/>
+                        <a:ea typeface="DengXian" panose="02010600030101010101" pitchFamily="2" charset="-122"/>
+                        <a:cs typeface="Arial" panose="020B0604020202020204" pitchFamily="34" charset="0"/>
+                      </a:endParaRPr>
+                    </a:p>
+                  </a:txBody>
+                  <a:tcPr marL="0" marR="0" marT="0" marB="0" anchor="ctr"/>
+                </a:tc>
+                <a:tc hMerge="1">
+                  <a:txBody>
+                    <a:bodyPr/>
+                    <a:lstStyle/>
+                    <a:p>
+                      <a:endParaRPr lang="en-GB"/>
+                    </a:p>
+                  </a:txBody>
+                  <a:tcPr/>
+                </a:tc>
+                <a:extLst>
+                  <a:ext uri="{0D108BD9-81ED-4DB2-BD59-A6C34878D82A}">
+                    <a16:rowId xmlns:a16="http://schemas.microsoft.com/office/drawing/2014/main" val="3701156370"/>
+                  </a:ext>
+                </a:extLst>
+              </a:tr>
+              <a:tr h="296664">
+                <a:tc>
+                  <a:txBody>
+                    <a:bodyPr/>
+                    <a:lstStyle/>
+                    <a:p>
+                      <a:pPr>
+                        <a:lnSpc>
+                          <a:spcPct val="115000"/>
+                        </a:lnSpc>
+                        <a:spcAft>
+                          <a:spcPts val="800"/>
+                        </a:spcAft>
+                        <a:buNone/>
+                      </a:pPr>
+                      <a:r>
+                        <a:rPr lang="en-US" sz="1000" kern="100">
+                          <a:effectLst/>
+                        </a:rPr>
+                        <a:t>16 April</a:t>
+                      </a:r>
+                      <a:endParaRPr lang="en-GB" sz="1000" kern="100">
+                        <a:effectLst/>
+                        <a:latin typeface="Aptos" panose="020B0004020202020204" pitchFamily="34" charset="0"/>
+                        <a:ea typeface="DengXian" panose="02010600030101010101" pitchFamily="2" charset="-122"/>
+                        <a:cs typeface="Arial" panose="020B0604020202020204" pitchFamily="34" charset="0"/>
+                      </a:endParaRPr>
+                    </a:p>
+                  </a:txBody>
+                  <a:tcPr marL="60165" marR="60165" marT="30082" marB="30082"/>
+                </a:tc>
+                <a:tc>
+                  <a:txBody>
+                    <a:bodyPr/>
+                    <a:lstStyle/>
+                    <a:p>
+                      <a:pPr>
+                        <a:lnSpc>
+                          <a:spcPct val="115000"/>
+                        </a:lnSpc>
+                        <a:spcAft>
+                          <a:spcPts val="800"/>
+                        </a:spcAft>
+                        <a:buNone/>
+                      </a:pPr>
+                      <a:r>
+                        <a:rPr lang="en-US" sz="1000" kern="100">
+                          <a:effectLst/>
+                        </a:rPr>
+                        <a:t>9</a:t>
+                      </a:r>
+                      <a:endParaRPr lang="en-GB" sz="1000" kern="100">
+                        <a:effectLst/>
+                        <a:latin typeface="Aptos" panose="020B0004020202020204" pitchFamily="34" charset="0"/>
+                        <a:ea typeface="DengXian" panose="02010600030101010101" pitchFamily="2" charset="-122"/>
+                        <a:cs typeface="Arial" panose="020B0604020202020204" pitchFamily="34" charset="0"/>
+                      </a:endParaRPr>
+                    </a:p>
+                  </a:txBody>
+                  <a:tcPr marL="60165" marR="60165" marT="30082" marB="30082"/>
+                </a:tc>
+                <a:tc>
+                  <a:txBody>
+                    <a:bodyPr/>
+                    <a:lstStyle/>
+                    <a:p>
+                      <a:pPr>
+                        <a:lnSpc>
+                          <a:spcPct val="115000"/>
+                        </a:lnSpc>
+                        <a:spcAft>
+                          <a:spcPts val="800"/>
+                        </a:spcAft>
+                        <a:buNone/>
+                      </a:pPr>
+                      <a:r>
+                        <a:rPr lang="en-US" sz="1000" kern="100">
+                          <a:effectLst/>
+                        </a:rPr>
+                        <a:t>9-12</a:t>
+                      </a:r>
+                      <a:endParaRPr lang="en-GB" sz="1000" kern="100">
+                        <a:effectLst/>
+                        <a:latin typeface="Aptos" panose="020B0004020202020204" pitchFamily="34" charset="0"/>
+                        <a:ea typeface="DengXian" panose="02010600030101010101" pitchFamily="2" charset="-122"/>
+                        <a:cs typeface="Arial" panose="020B0604020202020204" pitchFamily="34" charset="0"/>
+                      </a:endParaRPr>
+                    </a:p>
+                  </a:txBody>
+                  <a:tcPr marL="60165" marR="60165" marT="30082" marB="30082"/>
+                </a:tc>
+                <a:tc>
+                  <a:txBody>
+                    <a:bodyPr/>
+                    <a:lstStyle/>
+                    <a:p>
+                      <a:pPr>
+                        <a:lnSpc>
+                          <a:spcPct val="115000"/>
+                        </a:lnSpc>
+                        <a:spcAft>
+                          <a:spcPts val="800"/>
+                        </a:spcAft>
+                        <a:buNone/>
+                      </a:pPr>
+                      <a:r>
+                        <a:rPr lang="en-GB" sz="1000" kern="100">
+                          <a:effectLst/>
+                        </a:rPr>
+                        <a:t>CMP211</a:t>
+                      </a:r>
+                      <a:endParaRPr lang="en-GB" sz="1000" kern="100">
+                        <a:effectLst/>
+                        <a:latin typeface="Aptos" panose="020B0004020202020204" pitchFamily="34" charset="0"/>
+                        <a:ea typeface="DengXian" panose="02010600030101010101" pitchFamily="2" charset="-122"/>
+                        <a:cs typeface="Arial" panose="020B0604020202020204" pitchFamily="34" charset="0"/>
+                      </a:endParaRPr>
+                    </a:p>
+                  </a:txBody>
+                  <a:tcPr marL="60165" marR="60165" marT="30082" marB="30082"/>
+                </a:tc>
+                <a:tc gridSpan="3">
+                  <a:txBody>
+                    <a:bodyPr/>
+                    <a:lstStyle/>
+                    <a:p>
+                      <a:pPr>
+                        <a:lnSpc>
+                          <a:spcPct val="115000"/>
+                        </a:lnSpc>
+                        <a:spcAft>
+                          <a:spcPts val="800"/>
+                        </a:spcAft>
+                        <a:buNone/>
+                      </a:pPr>
+                      <a:r>
+                        <a:rPr lang="en-US" sz="1000" kern="100">
+                          <a:effectLst/>
+                        </a:rPr>
+                        <a:t>Compression (cont’d), Packet Media Transport</a:t>
+                      </a:r>
+                      <a:endParaRPr lang="en-GB" sz="1000" kern="100">
+                        <a:effectLst/>
+                        <a:latin typeface="Aptos" panose="020B0004020202020204" pitchFamily="34" charset="0"/>
+                        <a:ea typeface="DengXian" panose="02010600030101010101" pitchFamily="2" charset="-122"/>
+                        <a:cs typeface="Arial" panose="020B0604020202020204" pitchFamily="34" charset="0"/>
+                      </a:endParaRPr>
+                    </a:p>
+                  </a:txBody>
+                  <a:tcPr marL="60165" marR="60165" marT="30082" marB="30082"/>
+                </a:tc>
+                <a:tc hMerge="1">
+                  <a:txBody>
+                    <a:bodyPr/>
+                    <a:lstStyle/>
+                    <a:p>
+                      <a:endParaRPr lang="en-GB"/>
+                    </a:p>
+                  </a:txBody>
+                  <a:tcPr/>
+                </a:tc>
+                <a:tc hMerge="1">
+                  <a:txBody>
+                    <a:bodyPr/>
+                    <a:lstStyle/>
+                    <a:p>
+                      <a:endParaRPr lang="en-GB"/>
+                    </a:p>
+                  </a:txBody>
+                  <a:tcPr/>
+                </a:tc>
+                <a:tc>
+                  <a:txBody>
+                    <a:bodyPr/>
+                    <a:lstStyle/>
+                    <a:p>
+                      <a:pPr>
+                        <a:lnSpc>
+                          <a:spcPct val="115000"/>
+                        </a:lnSpc>
+                        <a:buNone/>
+                      </a:pPr>
+                      <a:endParaRPr lang="en-GB" sz="1000" kern="100">
+                        <a:effectLst/>
+                        <a:latin typeface="Aptos" panose="020B0004020202020204" pitchFamily="34" charset="0"/>
+                      </a:endParaRPr>
+                    </a:p>
+                  </a:txBody>
+                  <a:tcPr marL="60165" marR="60165" marT="30082" marB="30082"/>
+                </a:tc>
+                <a:tc gridSpan="2">
+                  <a:txBody>
+                    <a:bodyPr/>
+                    <a:lstStyle/>
+                    <a:p>
+                      <a:pPr>
+                        <a:lnSpc>
+                          <a:spcPct val="115000"/>
+                        </a:lnSpc>
+                        <a:spcAft>
+                          <a:spcPts val="800"/>
+                        </a:spcAft>
+                        <a:buNone/>
+                      </a:pPr>
+                      <a:r>
+                        <a:rPr lang="en-GB" sz="1000" kern="100">
+                          <a:effectLst/>
+                        </a:rPr>
+                        <a:t> </a:t>
+                      </a:r>
+                      <a:endParaRPr lang="en-GB" sz="1000" kern="100">
+                        <a:effectLst/>
+                        <a:latin typeface="Aptos" panose="020B0004020202020204" pitchFamily="34" charset="0"/>
+                        <a:ea typeface="DengXian" panose="02010600030101010101" pitchFamily="2" charset="-122"/>
+                        <a:cs typeface="Arial" panose="020B0604020202020204" pitchFamily="34" charset="0"/>
+                      </a:endParaRPr>
+                    </a:p>
+                  </a:txBody>
+                  <a:tcPr marL="0" marR="0" marT="0" marB="0" anchor="ctr"/>
+                </a:tc>
+                <a:tc hMerge="1">
+                  <a:txBody>
+                    <a:bodyPr/>
+                    <a:lstStyle/>
+                    <a:p>
+                      <a:endParaRPr lang="en-GB"/>
+                    </a:p>
+                  </a:txBody>
+                  <a:tcPr/>
+                </a:tc>
+                <a:extLst>
+                  <a:ext uri="{0D108BD9-81ED-4DB2-BD59-A6C34878D82A}">
+                    <a16:rowId xmlns:a16="http://schemas.microsoft.com/office/drawing/2014/main" val="3846445602"/>
+                  </a:ext>
+                </a:extLst>
+              </a:tr>
+              <a:tr h="296664">
+                <a:tc>
+                  <a:txBody>
+                    <a:bodyPr/>
+                    <a:lstStyle/>
+                    <a:p>
+                      <a:pPr>
+                        <a:lnSpc>
+                          <a:spcPct val="115000"/>
+                        </a:lnSpc>
+                        <a:spcAft>
+                          <a:spcPts val="800"/>
+                        </a:spcAft>
+                        <a:buNone/>
+                      </a:pPr>
+                      <a:r>
+                        <a:rPr lang="en-US" sz="1000" kern="100">
+                          <a:effectLst/>
+                        </a:rPr>
+                        <a:t>21 April</a:t>
+                      </a:r>
+                      <a:endParaRPr lang="en-GB" sz="1000" kern="100">
+                        <a:effectLst/>
+                        <a:latin typeface="Aptos" panose="020B0004020202020204" pitchFamily="34" charset="0"/>
+                        <a:ea typeface="DengXian" panose="02010600030101010101" pitchFamily="2" charset="-122"/>
+                        <a:cs typeface="Arial" panose="020B0604020202020204" pitchFamily="34" charset="0"/>
+                      </a:endParaRPr>
+                    </a:p>
+                  </a:txBody>
+                  <a:tcPr marL="60165" marR="60165" marT="30082" marB="30082"/>
+                </a:tc>
+                <a:tc>
+                  <a:txBody>
+                    <a:bodyPr/>
+                    <a:lstStyle/>
+                    <a:p>
+                      <a:pPr>
+                        <a:lnSpc>
+                          <a:spcPct val="115000"/>
+                        </a:lnSpc>
+                        <a:spcAft>
+                          <a:spcPts val="800"/>
+                        </a:spcAft>
+                        <a:buNone/>
+                      </a:pPr>
+                      <a:r>
+                        <a:rPr lang="en-US" sz="1000" kern="100">
+                          <a:effectLst/>
+                        </a:rPr>
+                        <a:t>10</a:t>
+                      </a:r>
+                      <a:endParaRPr lang="en-GB" sz="1000" kern="100">
+                        <a:effectLst/>
+                        <a:latin typeface="Aptos" panose="020B0004020202020204" pitchFamily="34" charset="0"/>
+                        <a:ea typeface="DengXian" panose="02010600030101010101" pitchFamily="2" charset="-122"/>
+                        <a:cs typeface="Arial" panose="020B0604020202020204" pitchFamily="34" charset="0"/>
+                      </a:endParaRPr>
+                    </a:p>
+                  </a:txBody>
+                  <a:tcPr marL="60165" marR="60165" marT="30082" marB="30082"/>
+                </a:tc>
+                <a:tc>
+                  <a:txBody>
+                    <a:bodyPr/>
+                    <a:lstStyle/>
+                    <a:p>
+                      <a:pPr>
+                        <a:lnSpc>
+                          <a:spcPct val="115000"/>
+                        </a:lnSpc>
+                        <a:spcAft>
+                          <a:spcPts val="800"/>
+                        </a:spcAft>
+                        <a:buNone/>
+                      </a:pPr>
+                      <a:r>
+                        <a:rPr lang="en-US" sz="1000" kern="100">
+                          <a:effectLst/>
+                        </a:rPr>
+                        <a:t>9-12</a:t>
+                      </a:r>
+                      <a:endParaRPr lang="en-GB" sz="1000" kern="100">
+                        <a:effectLst/>
+                        <a:latin typeface="Aptos" panose="020B0004020202020204" pitchFamily="34" charset="0"/>
+                        <a:ea typeface="DengXian" panose="02010600030101010101" pitchFamily="2" charset="-122"/>
+                        <a:cs typeface="Arial" panose="020B0604020202020204" pitchFamily="34" charset="0"/>
+                      </a:endParaRPr>
+                    </a:p>
+                  </a:txBody>
+                  <a:tcPr marL="60165" marR="60165" marT="30082" marB="30082"/>
+                </a:tc>
+                <a:tc>
+                  <a:txBody>
+                    <a:bodyPr/>
+                    <a:lstStyle/>
+                    <a:p>
+                      <a:pPr>
+                        <a:lnSpc>
+                          <a:spcPct val="115000"/>
+                        </a:lnSpc>
+                        <a:spcAft>
+                          <a:spcPts val="800"/>
+                        </a:spcAft>
+                        <a:buNone/>
+                      </a:pPr>
+                      <a:r>
+                        <a:rPr lang="en-GB" sz="1000" kern="100">
+                          <a:effectLst/>
+                        </a:rPr>
+                        <a:t>online</a:t>
+                      </a:r>
+                      <a:endParaRPr lang="en-GB" sz="1000" kern="100">
+                        <a:effectLst/>
+                        <a:latin typeface="Aptos" panose="020B0004020202020204" pitchFamily="34" charset="0"/>
+                        <a:ea typeface="DengXian" panose="02010600030101010101" pitchFamily="2" charset="-122"/>
+                        <a:cs typeface="Arial" panose="020B0604020202020204" pitchFamily="34" charset="0"/>
+                      </a:endParaRPr>
+                    </a:p>
+                  </a:txBody>
+                  <a:tcPr marL="60165" marR="60165" marT="30082" marB="30082"/>
+                </a:tc>
+                <a:tc gridSpan="3">
+                  <a:txBody>
+                    <a:bodyPr/>
+                    <a:lstStyle/>
+                    <a:p>
+                      <a:pPr>
+                        <a:lnSpc>
+                          <a:spcPct val="115000"/>
+                        </a:lnSpc>
+                        <a:spcAft>
+                          <a:spcPts val="800"/>
+                        </a:spcAft>
+                        <a:buNone/>
+                      </a:pPr>
+                      <a:r>
+                        <a:rPr lang="en-US" sz="1000" kern="100">
+                          <a:effectLst/>
+                        </a:rPr>
+                        <a:t>The Legacy of Analogue; Light and Control</a:t>
+                      </a:r>
+                      <a:endParaRPr lang="en-GB" sz="1000" kern="100">
+                        <a:effectLst/>
+                        <a:latin typeface="Aptos" panose="020B0004020202020204" pitchFamily="34" charset="0"/>
+                        <a:ea typeface="DengXian" panose="02010600030101010101" pitchFamily="2" charset="-122"/>
+                        <a:cs typeface="Arial" panose="020B0604020202020204" pitchFamily="34" charset="0"/>
+                      </a:endParaRPr>
+                    </a:p>
+                  </a:txBody>
+                  <a:tcPr marL="60165" marR="60165" marT="30082" marB="30082"/>
+                </a:tc>
+                <a:tc hMerge="1">
+                  <a:txBody>
+                    <a:bodyPr/>
+                    <a:lstStyle/>
+                    <a:p>
+                      <a:endParaRPr lang="en-GB"/>
+                    </a:p>
+                  </a:txBody>
+                  <a:tcPr/>
+                </a:tc>
+                <a:tc hMerge="1">
+                  <a:txBody>
+                    <a:bodyPr/>
+                    <a:lstStyle/>
+                    <a:p>
+                      <a:endParaRPr lang="en-GB"/>
+                    </a:p>
+                  </a:txBody>
+                  <a:tcPr/>
+                </a:tc>
+                <a:tc>
+                  <a:txBody>
+                    <a:bodyPr/>
+                    <a:lstStyle/>
+                    <a:p>
+                      <a:pPr>
+                        <a:lnSpc>
+                          <a:spcPct val="115000"/>
+                        </a:lnSpc>
+                        <a:buNone/>
+                      </a:pPr>
+                      <a:endParaRPr lang="en-GB" sz="1000" kern="100">
+                        <a:effectLst/>
+                        <a:latin typeface="Aptos" panose="020B0004020202020204" pitchFamily="34" charset="0"/>
+                      </a:endParaRPr>
+                    </a:p>
+                  </a:txBody>
+                  <a:tcPr marL="60165" marR="60165" marT="30082" marB="30082"/>
+                </a:tc>
+                <a:tc gridSpan="2">
+                  <a:txBody>
+                    <a:bodyPr/>
+                    <a:lstStyle/>
+                    <a:p>
+                      <a:pPr>
+                        <a:lnSpc>
+                          <a:spcPct val="115000"/>
+                        </a:lnSpc>
+                        <a:spcAft>
+                          <a:spcPts val="800"/>
+                        </a:spcAft>
+                        <a:buNone/>
+                      </a:pPr>
+                      <a:r>
+                        <a:rPr lang="en-GB" sz="1000" kern="100">
+                          <a:effectLst/>
+                        </a:rPr>
+                        <a:t> </a:t>
+                      </a:r>
+                      <a:endParaRPr lang="en-GB" sz="1000" kern="100">
+                        <a:effectLst/>
+                        <a:latin typeface="Aptos" panose="020B0004020202020204" pitchFamily="34" charset="0"/>
+                        <a:ea typeface="DengXian" panose="02010600030101010101" pitchFamily="2" charset="-122"/>
+                        <a:cs typeface="Arial" panose="020B0604020202020204" pitchFamily="34" charset="0"/>
+                      </a:endParaRPr>
+                    </a:p>
+                  </a:txBody>
+                  <a:tcPr marL="0" marR="0" marT="0" marB="0" anchor="ctr"/>
+                </a:tc>
+                <a:tc hMerge="1">
+                  <a:txBody>
+                    <a:bodyPr/>
+                    <a:lstStyle/>
+                    <a:p>
+                      <a:endParaRPr lang="en-GB"/>
+                    </a:p>
+                  </a:txBody>
+                  <a:tcPr/>
+                </a:tc>
+                <a:extLst>
+                  <a:ext uri="{0D108BD9-81ED-4DB2-BD59-A6C34878D82A}">
+                    <a16:rowId xmlns:a16="http://schemas.microsoft.com/office/drawing/2014/main" val="2265997434"/>
+                  </a:ext>
+                </a:extLst>
+              </a:tr>
+              <a:tr h="296664">
+                <a:tc>
+                  <a:txBody>
+                    <a:bodyPr/>
+                    <a:lstStyle/>
+                    <a:p>
+                      <a:pPr>
+                        <a:lnSpc>
+                          <a:spcPct val="115000"/>
+                        </a:lnSpc>
+                        <a:spcAft>
+                          <a:spcPts val="800"/>
+                        </a:spcAft>
+                        <a:buNone/>
+                      </a:pPr>
+                      <a:r>
+                        <a:rPr lang="en-US" sz="1000" kern="100">
+                          <a:effectLst/>
+                        </a:rPr>
+                        <a:t>27 April</a:t>
+                      </a:r>
+                      <a:endParaRPr lang="en-GB" sz="1000" kern="100">
+                        <a:effectLst/>
+                        <a:latin typeface="Aptos" panose="020B0004020202020204" pitchFamily="34" charset="0"/>
+                        <a:ea typeface="DengXian" panose="02010600030101010101" pitchFamily="2" charset="-122"/>
+                        <a:cs typeface="Arial" panose="020B0604020202020204" pitchFamily="34" charset="0"/>
+                      </a:endParaRPr>
+                    </a:p>
+                  </a:txBody>
+                  <a:tcPr marL="60165" marR="60165" marT="30082" marB="30082"/>
+                </a:tc>
+                <a:tc>
+                  <a:txBody>
+                    <a:bodyPr/>
+                    <a:lstStyle/>
+                    <a:p>
+                      <a:pPr>
+                        <a:lnSpc>
+                          <a:spcPct val="115000"/>
+                        </a:lnSpc>
+                        <a:spcAft>
+                          <a:spcPts val="800"/>
+                        </a:spcAft>
+                        <a:buNone/>
+                      </a:pPr>
+                      <a:r>
+                        <a:rPr lang="en-US" sz="1000" kern="100">
+                          <a:effectLst/>
+                        </a:rPr>
+                        <a:t>11</a:t>
+                      </a:r>
+                      <a:endParaRPr lang="en-GB" sz="1000" kern="100">
+                        <a:effectLst/>
+                        <a:latin typeface="Aptos" panose="020B0004020202020204" pitchFamily="34" charset="0"/>
+                        <a:ea typeface="DengXian" panose="02010600030101010101" pitchFamily="2" charset="-122"/>
+                        <a:cs typeface="Arial" panose="020B0604020202020204" pitchFamily="34" charset="0"/>
+                      </a:endParaRPr>
+                    </a:p>
+                  </a:txBody>
+                  <a:tcPr marL="60165" marR="60165" marT="30082" marB="30082"/>
+                </a:tc>
+                <a:tc>
+                  <a:txBody>
+                    <a:bodyPr/>
+                    <a:lstStyle/>
+                    <a:p>
+                      <a:pPr>
+                        <a:lnSpc>
+                          <a:spcPct val="115000"/>
+                        </a:lnSpc>
+                        <a:spcAft>
+                          <a:spcPts val="800"/>
+                        </a:spcAft>
+                        <a:buNone/>
+                      </a:pPr>
+                      <a:r>
+                        <a:rPr lang="en-US" sz="1000" kern="100">
+                          <a:effectLst/>
+                        </a:rPr>
+                        <a:t>9-12</a:t>
+                      </a:r>
+                      <a:endParaRPr lang="en-GB" sz="1000" kern="100">
+                        <a:effectLst/>
+                        <a:latin typeface="Aptos" panose="020B0004020202020204" pitchFamily="34" charset="0"/>
+                        <a:ea typeface="DengXian" panose="02010600030101010101" pitchFamily="2" charset="-122"/>
+                        <a:cs typeface="Arial" panose="020B0604020202020204" pitchFamily="34" charset="0"/>
+                      </a:endParaRPr>
+                    </a:p>
+                  </a:txBody>
+                  <a:tcPr marL="60165" marR="60165" marT="30082" marB="30082"/>
+                </a:tc>
+                <a:tc>
+                  <a:txBody>
+                    <a:bodyPr/>
+                    <a:lstStyle/>
+                    <a:p>
+                      <a:pPr>
+                        <a:lnSpc>
+                          <a:spcPct val="115000"/>
+                        </a:lnSpc>
+                        <a:spcAft>
+                          <a:spcPts val="800"/>
+                        </a:spcAft>
+                        <a:buNone/>
+                      </a:pPr>
+                      <a:r>
+                        <a:rPr lang="en-GB" sz="1000" kern="100">
+                          <a:effectLst/>
+                        </a:rPr>
+                        <a:t>CCZ269</a:t>
+                      </a:r>
+                      <a:endParaRPr lang="en-GB" sz="1000" kern="100">
+                        <a:effectLst/>
+                        <a:latin typeface="Aptos" panose="020B0004020202020204" pitchFamily="34" charset="0"/>
+                        <a:ea typeface="DengXian" panose="02010600030101010101" pitchFamily="2" charset="-122"/>
+                        <a:cs typeface="Arial" panose="020B0604020202020204" pitchFamily="34" charset="0"/>
+                      </a:endParaRPr>
+                    </a:p>
+                  </a:txBody>
+                  <a:tcPr marL="60165" marR="60165" marT="30082" marB="30082"/>
+                </a:tc>
+                <a:tc gridSpan="3">
+                  <a:txBody>
+                    <a:bodyPr/>
+                    <a:lstStyle/>
+                    <a:p>
+                      <a:pPr>
+                        <a:lnSpc>
+                          <a:spcPct val="115000"/>
+                        </a:lnSpc>
+                        <a:spcAft>
+                          <a:spcPts val="800"/>
+                        </a:spcAft>
+                        <a:buNone/>
+                      </a:pPr>
+                      <a:r>
+                        <a:rPr lang="en-US" sz="1000" kern="100">
+                          <a:effectLst/>
+                        </a:rPr>
+                        <a:t>TV Standards</a:t>
+                      </a:r>
+                      <a:endParaRPr lang="en-GB" sz="1000" kern="100">
+                        <a:effectLst/>
+                        <a:latin typeface="Aptos" panose="020B0004020202020204" pitchFamily="34" charset="0"/>
+                        <a:ea typeface="DengXian" panose="02010600030101010101" pitchFamily="2" charset="-122"/>
+                        <a:cs typeface="Arial" panose="020B0604020202020204" pitchFamily="34" charset="0"/>
+                      </a:endParaRPr>
+                    </a:p>
+                  </a:txBody>
+                  <a:tcPr marL="60165" marR="60165" marT="30082" marB="30082"/>
+                </a:tc>
+                <a:tc hMerge="1">
+                  <a:txBody>
+                    <a:bodyPr/>
+                    <a:lstStyle/>
+                    <a:p>
+                      <a:endParaRPr lang="en-GB"/>
+                    </a:p>
+                  </a:txBody>
+                  <a:tcPr/>
+                </a:tc>
+                <a:tc hMerge="1">
+                  <a:txBody>
+                    <a:bodyPr/>
+                    <a:lstStyle/>
+                    <a:p>
+                      <a:endParaRPr lang="en-GB"/>
+                    </a:p>
+                  </a:txBody>
+                  <a:tcPr/>
+                </a:tc>
+                <a:tc>
+                  <a:txBody>
+                    <a:bodyPr/>
+                    <a:lstStyle/>
+                    <a:p>
+                      <a:pPr>
+                        <a:lnSpc>
+                          <a:spcPct val="115000"/>
+                        </a:lnSpc>
+                        <a:buNone/>
+                      </a:pPr>
+                      <a:endParaRPr lang="en-GB" sz="1000" kern="100">
+                        <a:effectLst/>
+                        <a:latin typeface="Aptos" panose="020B0004020202020204" pitchFamily="34" charset="0"/>
+                      </a:endParaRPr>
+                    </a:p>
+                  </a:txBody>
+                  <a:tcPr marL="60165" marR="60165" marT="30082" marB="30082"/>
+                </a:tc>
+                <a:tc gridSpan="2">
+                  <a:txBody>
+                    <a:bodyPr/>
+                    <a:lstStyle/>
+                    <a:p>
+                      <a:pPr>
+                        <a:lnSpc>
+                          <a:spcPct val="115000"/>
+                        </a:lnSpc>
+                        <a:spcAft>
+                          <a:spcPts val="800"/>
+                        </a:spcAft>
+                        <a:buNone/>
+                      </a:pPr>
+                      <a:r>
+                        <a:rPr lang="en-GB" sz="1000" kern="100">
+                          <a:effectLst/>
+                        </a:rPr>
+                        <a:t> </a:t>
+                      </a:r>
+                      <a:endParaRPr lang="en-GB" sz="1000" kern="100">
+                        <a:effectLst/>
+                        <a:latin typeface="Aptos" panose="020B0004020202020204" pitchFamily="34" charset="0"/>
+                        <a:ea typeface="DengXian" panose="02010600030101010101" pitchFamily="2" charset="-122"/>
+                        <a:cs typeface="Arial" panose="020B0604020202020204" pitchFamily="34" charset="0"/>
+                      </a:endParaRPr>
+                    </a:p>
+                  </a:txBody>
+                  <a:tcPr marL="0" marR="0" marT="0" marB="0" anchor="ctr"/>
+                </a:tc>
+                <a:tc hMerge="1">
+                  <a:txBody>
+                    <a:bodyPr/>
+                    <a:lstStyle/>
+                    <a:p>
+                      <a:endParaRPr lang="en-GB"/>
+                    </a:p>
+                  </a:txBody>
+                  <a:tcPr/>
+                </a:tc>
+                <a:extLst>
+                  <a:ext uri="{0D108BD9-81ED-4DB2-BD59-A6C34878D82A}">
+                    <a16:rowId xmlns:a16="http://schemas.microsoft.com/office/drawing/2014/main" val="975225885"/>
+                  </a:ext>
+                </a:extLst>
+              </a:tr>
+              <a:tr h="296664">
+                <a:tc>
+                  <a:txBody>
+                    <a:bodyPr/>
+                    <a:lstStyle/>
+                    <a:p>
+                      <a:pPr>
+                        <a:lnSpc>
+                          <a:spcPct val="115000"/>
+                        </a:lnSpc>
+                        <a:spcAft>
+                          <a:spcPts val="800"/>
+                        </a:spcAft>
+                        <a:buNone/>
+                      </a:pPr>
+                      <a:r>
+                        <a:rPr lang="en-GB" sz="1000" kern="100">
+                          <a:effectLst/>
+                        </a:rPr>
+                        <a:t>5 May</a:t>
+                      </a:r>
+                      <a:endParaRPr lang="en-GB" sz="1000" kern="100">
+                        <a:effectLst/>
+                        <a:latin typeface="Aptos" panose="020B0004020202020204" pitchFamily="34" charset="0"/>
+                        <a:ea typeface="DengXian" panose="02010600030101010101" pitchFamily="2" charset="-122"/>
+                        <a:cs typeface="Arial" panose="020B0604020202020204" pitchFamily="34" charset="0"/>
+                      </a:endParaRPr>
+                    </a:p>
+                  </a:txBody>
+                  <a:tcPr marL="60165" marR="60165" marT="30082" marB="30082"/>
+                </a:tc>
+                <a:tc>
+                  <a:txBody>
+                    <a:bodyPr/>
+                    <a:lstStyle/>
+                    <a:p>
+                      <a:pPr>
+                        <a:lnSpc>
+                          <a:spcPct val="115000"/>
+                        </a:lnSpc>
+                        <a:spcAft>
+                          <a:spcPts val="800"/>
+                        </a:spcAft>
+                        <a:buNone/>
+                      </a:pPr>
+                      <a:r>
+                        <a:rPr lang="en-GB" sz="1000" kern="100">
+                          <a:effectLst/>
+                        </a:rPr>
+                        <a:t>12</a:t>
+                      </a:r>
+                      <a:endParaRPr lang="en-GB" sz="1000" kern="100">
+                        <a:effectLst/>
+                        <a:latin typeface="Aptos" panose="020B0004020202020204" pitchFamily="34" charset="0"/>
+                        <a:ea typeface="DengXian" panose="02010600030101010101" pitchFamily="2" charset="-122"/>
+                        <a:cs typeface="Arial" panose="020B0604020202020204" pitchFamily="34" charset="0"/>
+                      </a:endParaRPr>
+                    </a:p>
+                  </a:txBody>
+                  <a:tcPr marL="60165" marR="60165" marT="30082" marB="30082"/>
+                </a:tc>
+                <a:tc>
+                  <a:txBody>
+                    <a:bodyPr/>
+                    <a:lstStyle/>
+                    <a:p>
+                      <a:pPr>
+                        <a:lnSpc>
+                          <a:spcPct val="115000"/>
+                        </a:lnSpc>
+                        <a:spcAft>
+                          <a:spcPts val="800"/>
+                        </a:spcAft>
+                        <a:buNone/>
+                      </a:pPr>
+                      <a:r>
+                        <a:rPr lang="en-GB" sz="1000" kern="100">
+                          <a:effectLst/>
+                        </a:rPr>
+                        <a:t>9-12</a:t>
+                      </a:r>
+                      <a:endParaRPr lang="en-GB" sz="1000" kern="100">
+                        <a:effectLst/>
+                        <a:latin typeface="Aptos" panose="020B0004020202020204" pitchFamily="34" charset="0"/>
+                        <a:ea typeface="DengXian" panose="02010600030101010101" pitchFamily="2" charset="-122"/>
+                        <a:cs typeface="Arial" panose="020B0604020202020204" pitchFamily="34" charset="0"/>
+                      </a:endParaRPr>
+                    </a:p>
+                  </a:txBody>
+                  <a:tcPr marL="60165" marR="60165" marT="30082" marB="30082"/>
+                </a:tc>
+                <a:tc>
+                  <a:txBody>
+                    <a:bodyPr/>
+                    <a:lstStyle/>
+                    <a:p>
+                      <a:pPr>
+                        <a:lnSpc>
+                          <a:spcPct val="115000"/>
+                        </a:lnSpc>
+                        <a:spcAft>
+                          <a:spcPts val="800"/>
+                        </a:spcAft>
+                        <a:buNone/>
+                      </a:pPr>
+                      <a:r>
+                        <a:rPr lang="en-GB" sz="1000" kern="100">
+                          <a:effectLst/>
+                        </a:rPr>
+                        <a:t>online</a:t>
+                      </a:r>
+                      <a:endParaRPr lang="en-GB" sz="1000" kern="100">
+                        <a:effectLst/>
+                        <a:latin typeface="Aptos" panose="020B0004020202020204" pitchFamily="34" charset="0"/>
+                        <a:ea typeface="DengXian" panose="02010600030101010101" pitchFamily="2" charset="-122"/>
+                        <a:cs typeface="Arial" panose="020B0604020202020204" pitchFamily="34" charset="0"/>
+                      </a:endParaRPr>
+                    </a:p>
+                  </a:txBody>
+                  <a:tcPr marL="60165" marR="60165" marT="30082" marB="30082"/>
+                </a:tc>
+                <a:tc gridSpan="3">
+                  <a:txBody>
+                    <a:bodyPr/>
+                    <a:lstStyle/>
+                    <a:p>
+                      <a:pPr>
+                        <a:lnSpc>
+                          <a:spcPct val="115000"/>
+                        </a:lnSpc>
+                        <a:spcAft>
+                          <a:spcPts val="800"/>
+                        </a:spcAft>
+                        <a:buNone/>
+                      </a:pPr>
+                      <a:r>
+                        <a:rPr lang="en-GB" sz="1000" kern="100">
+                          <a:effectLst/>
+                        </a:rPr>
+                        <a:t>Network media </a:t>
+                      </a:r>
+                      <a:endParaRPr lang="en-GB" sz="1000" kern="100">
+                        <a:effectLst/>
+                        <a:latin typeface="Aptos" panose="020B0004020202020204" pitchFamily="34" charset="0"/>
+                        <a:ea typeface="DengXian" panose="02010600030101010101" pitchFamily="2" charset="-122"/>
+                        <a:cs typeface="Arial" panose="020B0604020202020204" pitchFamily="34" charset="0"/>
+                      </a:endParaRPr>
+                    </a:p>
+                  </a:txBody>
+                  <a:tcPr marL="60165" marR="60165" marT="30082" marB="30082"/>
+                </a:tc>
+                <a:tc hMerge="1">
+                  <a:txBody>
+                    <a:bodyPr/>
+                    <a:lstStyle/>
+                    <a:p>
+                      <a:endParaRPr lang="en-GB"/>
+                    </a:p>
+                  </a:txBody>
+                  <a:tcPr/>
+                </a:tc>
+                <a:tc hMerge="1">
+                  <a:txBody>
+                    <a:bodyPr/>
+                    <a:lstStyle/>
+                    <a:p>
+                      <a:endParaRPr lang="en-GB"/>
+                    </a:p>
+                  </a:txBody>
+                  <a:tcPr/>
+                </a:tc>
+                <a:tc>
+                  <a:txBody>
+                    <a:bodyPr/>
+                    <a:lstStyle/>
+                    <a:p>
+                      <a:pPr>
+                        <a:lnSpc>
+                          <a:spcPct val="115000"/>
+                        </a:lnSpc>
+                        <a:buNone/>
+                      </a:pPr>
+                      <a:endParaRPr lang="en-GB" sz="1000" kern="100">
+                        <a:effectLst/>
+                        <a:latin typeface="Aptos" panose="020B0004020202020204" pitchFamily="34" charset="0"/>
+                      </a:endParaRPr>
+                    </a:p>
+                  </a:txBody>
+                  <a:tcPr marL="60165" marR="60165" marT="30082" marB="30082"/>
+                </a:tc>
+                <a:tc gridSpan="2">
+                  <a:txBody>
+                    <a:bodyPr/>
+                    <a:lstStyle/>
+                    <a:p>
+                      <a:pPr>
+                        <a:lnSpc>
+                          <a:spcPct val="115000"/>
+                        </a:lnSpc>
+                        <a:spcAft>
+                          <a:spcPts val="800"/>
+                        </a:spcAft>
+                        <a:buNone/>
+                      </a:pPr>
+                      <a:r>
+                        <a:rPr lang="en-GB" sz="1000" kern="100">
+                          <a:effectLst/>
+                        </a:rPr>
+                        <a:t> </a:t>
+                      </a:r>
+                      <a:endParaRPr lang="en-GB" sz="1000" kern="100">
+                        <a:effectLst/>
+                        <a:latin typeface="Aptos" panose="020B0004020202020204" pitchFamily="34" charset="0"/>
+                        <a:ea typeface="DengXian" panose="02010600030101010101" pitchFamily="2" charset="-122"/>
+                        <a:cs typeface="Arial" panose="020B0604020202020204" pitchFamily="34" charset="0"/>
+                      </a:endParaRPr>
+                    </a:p>
+                  </a:txBody>
+                  <a:tcPr marL="0" marR="0" marT="0" marB="0" anchor="ctr"/>
+                </a:tc>
+                <a:tc hMerge="1">
+                  <a:txBody>
+                    <a:bodyPr/>
+                    <a:lstStyle/>
+                    <a:p>
+                      <a:endParaRPr lang="en-GB"/>
+                    </a:p>
+                  </a:txBody>
+                  <a:tcPr/>
+                </a:tc>
+                <a:extLst>
+                  <a:ext uri="{0D108BD9-81ED-4DB2-BD59-A6C34878D82A}">
+                    <a16:rowId xmlns:a16="http://schemas.microsoft.com/office/drawing/2014/main" val="1784606043"/>
+                  </a:ext>
+                </a:extLst>
+              </a:tr>
+              <a:tr h="296664">
+                <a:tc>
+                  <a:txBody>
+                    <a:bodyPr/>
+                    <a:lstStyle/>
+                    <a:p>
+                      <a:pPr>
+                        <a:lnSpc>
+                          <a:spcPct val="115000"/>
+                        </a:lnSpc>
+                        <a:spcAft>
+                          <a:spcPts val="800"/>
+                        </a:spcAft>
+                        <a:buNone/>
+                      </a:pPr>
+                      <a:r>
+                        <a:rPr lang="en-US" sz="1000" kern="100">
+                          <a:effectLst/>
+                        </a:rPr>
+                        <a:t>12 May</a:t>
+                      </a:r>
+                      <a:endParaRPr lang="en-GB" sz="1000" kern="100">
+                        <a:effectLst/>
+                        <a:latin typeface="Aptos" panose="020B0004020202020204" pitchFamily="34" charset="0"/>
+                        <a:ea typeface="DengXian" panose="02010600030101010101" pitchFamily="2" charset="-122"/>
+                        <a:cs typeface="Arial" panose="020B0604020202020204" pitchFamily="34" charset="0"/>
+                      </a:endParaRPr>
+                    </a:p>
+                  </a:txBody>
+                  <a:tcPr marL="60165" marR="60165" marT="30082" marB="30082"/>
+                </a:tc>
+                <a:tc>
+                  <a:txBody>
+                    <a:bodyPr/>
+                    <a:lstStyle/>
+                    <a:p>
+                      <a:pPr>
+                        <a:lnSpc>
+                          <a:spcPct val="115000"/>
+                        </a:lnSpc>
+                        <a:spcAft>
+                          <a:spcPts val="800"/>
+                        </a:spcAft>
+                        <a:buNone/>
+                      </a:pPr>
+                      <a:r>
+                        <a:rPr lang="en-US" sz="1000" kern="100">
+                          <a:effectLst/>
+                        </a:rPr>
+                        <a:t>13</a:t>
+                      </a:r>
+                      <a:endParaRPr lang="en-GB" sz="1000" kern="100">
+                        <a:effectLst/>
+                        <a:latin typeface="Aptos" panose="020B0004020202020204" pitchFamily="34" charset="0"/>
+                        <a:ea typeface="DengXian" panose="02010600030101010101" pitchFamily="2" charset="-122"/>
+                        <a:cs typeface="Arial" panose="020B0604020202020204" pitchFamily="34" charset="0"/>
+                      </a:endParaRPr>
+                    </a:p>
+                  </a:txBody>
+                  <a:tcPr marL="60165" marR="60165" marT="30082" marB="30082"/>
+                </a:tc>
+                <a:tc>
+                  <a:txBody>
+                    <a:bodyPr/>
+                    <a:lstStyle/>
+                    <a:p>
+                      <a:pPr>
+                        <a:lnSpc>
+                          <a:spcPct val="115000"/>
+                        </a:lnSpc>
+                        <a:spcAft>
+                          <a:spcPts val="800"/>
+                        </a:spcAft>
+                        <a:buNone/>
+                      </a:pPr>
+                      <a:r>
+                        <a:rPr lang="en-US" sz="1000" kern="100">
+                          <a:effectLst/>
+                        </a:rPr>
+                        <a:t>9-12</a:t>
+                      </a:r>
+                      <a:endParaRPr lang="en-GB" sz="1000" kern="100">
+                        <a:effectLst/>
+                        <a:latin typeface="Aptos" panose="020B0004020202020204" pitchFamily="34" charset="0"/>
+                        <a:ea typeface="DengXian" panose="02010600030101010101" pitchFamily="2" charset="-122"/>
+                        <a:cs typeface="Arial" panose="020B0604020202020204" pitchFamily="34" charset="0"/>
+                      </a:endParaRPr>
+                    </a:p>
+                  </a:txBody>
+                  <a:tcPr marL="60165" marR="60165" marT="30082" marB="30082"/>
+                </a:tc>
+                <a:tc>
+                  <a:txBody>
+                    <a:bodyPr/>
+                    <a:lstStyle/>
+                    <a:p>
+                      <a:pPr>
+                        <a:lnSpc>
+                          <a:spcPct val="115000"/>
+                        </a:lnSpc>
+                        <a:spcAft>
+                          <a:spcPts val="800"/>
+                        </a:spcAft>
+                        <a:buNone/>
+                      </a:pPr>
+                      <a:r>
+                        <a:rPr lang="en-US" sz="1000" kern="100">
+                          <a:effectLst/>
+                        </a:rPr>
+                        <a:t>online</a:t>
+                      </a:r>
+                      <a:endParaRPr lang="en-GB" sz="1000" kern="100">
+                        <a:effectLst/>
+                        <a:latin typeface="Aptos" panose="020B0004020202020204" pitchFamily="34" charset="0"/>
+                        <a:ea typeface="DengXian" panose="02010600030101010101" pitchFamily="2" charset="-122"/>
+                        <a:cs typeface="Arial" panose="020B0604020202020204" pitchFamily="34" charset="0"/>
+                      </a:endParaRPr>
+                    </a:p>
+                  </a:txBody>
+                  <a:tcPr marL="60165" marR="60165" marT="30082" marB="30082"/>
+                </a:tc>
+                <a:tc gridSpan="3">
+                  <a:txBody>
+                    <a:bodyPr/>
+                    <a:lstStyle/>
+                    <a:p>
+                      <a:pPr>
+                        <a:lnSpc>
+                          <a:spcPct val="115000"/>
+                        </a:lnSpc>
+                        <a:spcAft>
+                          <a:spcPts val="800"/>
+                        </a:spcAft>
+                        <a:buNone/>
+                      </a:pPr>
+                      <a:r>
+                        <a:rPr lang="en-US" sz="1000" kern="100">
+                          <a:effectLst/>
+                        </a:rPr>
+                        <a:t>Media Distribution Networks</a:t>
+                      </a:r>
+                      <a:endParaRPr lang="en-GB" sz="1000" kern="100">
+                        <a:effectLst/>
+                        <a:latin typeface="Aptos" panose="020B0004020202020204" pitchFamily="34" charset="0"/>
+                        <a:ea typeface="DengXian" panose="02010600030101010101" pitchFamily="2" charset="-122"/>
+                        <a:cs typeface="Arial" panose="020B0604020202020204" pitchFamily="34" charset="0"/>
+                      </a:endParaRPr>
+                    </a:p>
+                  </a:txBody>
+                  <a:tcPr marL="60165" marR="60165" marT="30082" marB="30082"/>
+                </a:tc>
+                <a:tc hMerge="1">
+                  <a:txBody>
+                    <a:bodyPr/>
+                    <a:lstStyle/>
+                    <a:p>
+                      <a:endParaRPr lang="en-GB"/>
+                    </a:p>
+                  </a:txBody>
+                  <a:tcPr/>
+                </a:tc>
+                <a:tc hMerge="1">
+                  <a:txBody>
+                    <a:bodyPr/>
+                    <a:lstStyle/>
+                    <a:p>
+                      <a:endParaRPr lang="en-GB"/>
+                    </a:p>
+                  </a:txBody>
+                  <a:tcPr/>
+                </a:tc>
+                <a:tc>
+                  <a:txBody>
+                    <a:bodyPr/>
+                    <a:lstStyle/>
+                    <a:p>
+                      <a:pPr>
+                        <a:lnSpc>
+                          <a:spcPct val="115000"/>
+                        </a:lnSpc>
+                        <a:spcAft>
+                          <a:spcPts val="800"/>
+                        </a:spcAft>
+                        <a:buNone/>
+                      </a:pPr>
+                      <a:r>
+                        <a:rPr lang="en-GB" sz="1000" kern="100">
+                          <a:effectLst/>
+                        </a:rPr>
+                        <a:t> </a:t>
+                      </a:r>
+                      <a:endParaRPr lang="en-GB" sz="1000" kern="100">
+                        <a:effectLst/>
+                        <a:latin typeface="Aptos" panose="020B0004020202020204" pitchFamily="34" charset="0"/>
+                        <a:ea typeface="DengXian" panose="02010600030101010101" pitchFamily="2" charset="-122"/>
+                        <a:cs typeface="Arial" panose="020B0604020202020204" pitchFamily="34" charset="0"/>
+                      </a:endParaRPr>
+                    </a:p>
+                  </a:txBody>
+                  <a:tcPr marL="60165" marR="60165" marT="30082" marB="30082"/>
+                </a:tc>
+                <a:tc gridSpan="2">
+                  <a:txBody>
+                    <a:bodyPr/>
+                    <a:lstStyle/>
+                    <a:p>
+                      <a:pPr>
+                        <a:lnSpc>
+                          <a:spcPct val="115000"/>
+                        </a:lnSpc>
+                        <a:spcAft>
+                          <a:spcPts val="800"/>
+                        </a:spcAft>
+                        <a:buNone/>
+                      </a:pPr>
+                      <a:r>
+                        <a:rPr lang="en-GB" sz="1000" kern="100">
+                          <a:effectLst/>
+                        </a:rPr>
+                        <a:t> </a:t>
+                      </a:r>
+                      <a:endParaRPr lang="en-GB" sz="1000" kern="100">
+                        <a:effectLst/>
+                        <a:latin typeface="Aptos" panose="020B0004020202020204" pitchFamily="34" charset="0"/>
+                        <a:ea typeface="DengXian" panose="02010600030101010101" pitchFamily="2" charset="-122"/>
+                        <a:cs typeface="Arial" panose="020B0604020202020204" pitchFamily="34" charset="0"/>
+                      </a:endParaRPr>
+                    </a:p>
+                  </a:txBody>
+                  <a:tcPr marL="0" marR="0" marT="0" marB="0" anchor="ctr"/>
+                </a:tc>
+                <a:tc hMerge="1">
+                  <a:txBody>
+                    <a:bodyPr/>
+                    <a:lstStyle/>
+                    <a:p>
+                      <a:endParaRPr lang="en-GB"/>
+                    </a:p>
+                  </a:txBody>
+                  <a:tcPr/>
+                </a:tc>
+                <a:extLst>
+                  <a:ext uri="{0D108BD9-81ED-4DB2-BD59-A6C34878D82A}">
+                    <a16:rowId xmlns:a16="http://schemas.microsoft.com/office/drawing/2014/main" val="3000982803"/>
+                  </a:ext>
+                </a:extLst>
+              </a:tr>
+              <a:tr h="493808">
+                <a:tc>
+                  <a:txBody>
+                    <a:bodyPr/>
+                    <a:lstStyle/>
+                    <a:p>
+                      <a:pPr>
+                        <a:lnSpc>
+                          <a:spcPct val="115000"/>
+                        </a:lnSpc>
+                        <a:spcAft>
+                          <a:spcPts val="800"/>
+                        </a:spcAft>
+                        <a:buNone/>
+                      </a:pPr>
+                      <a:r>
+                        <a:rPr lang="en-US" sz="1000" kern="100">
+                          <a:effectLst/>
+                        </a:rPr>
+                        <a:t>20 May</a:t>
+                      </a:r>
+                      <a:endParaRPr lang="en-GB" sz="1000" kern="100">
+                        <a:effectLst/>
+                        <a:latin typeface="Aptos" panose="020B0004020202020204" pitchFamily="34" charset="0"/>
+                        <a:ea typeface="DengXian" panose="02010600030101010101" pitchFamily="2" charset="-122"/>
+                        <a:cs typeface="Arial" panose="020B0604020202020204" pitchFamily="34" charset="0"/>
+                      </a:endParaRPr>
+                    </a:p>
+                  </a:txBody>
+                  <a:tcPr marL="60165" marR="60165" marT="30082" marB="30082"/>
+                </a:tc>
+                <a:tc>
+                  <a:txBody>
+                    <a:bodyPr/>
+                    <a:lstStyle/>
+                    <a:p>
+                      <a:pPr>
+                        <a:lnSpc>
+                          <a:spcPct val="115000"/>
+                        </a:lnSpc>
+                        <a:spcAft>
+                          <a:spcPts val="800"/>
+                        </a:spcAft>
+                        <a:buNone/>
+                      </a:pPr>
+                      <a:r>
+                        <a:rPr lang="en-US" sz="1000" kern="100">
+                          <a:effectLst/>
+                        </a:rPr>
+                        <a:t>14</a:t>
+                      </a:r>
+                      <a:endParaRPr lang="en-GB" sz="1000" kern="100">
+                        <a:effectLst/>
+                        <a:latin typeface="Aptos" panose="020B0004020202020204" pitchFamily="34" charset="0"/>
+                        <a:ea typeface="DengXian" panose="02010600030101010101" pitchFamily="2" charset="-122"/>
+                        <a:cs typeface="Arial" panose="020B0604020202020204" pitchFamily="34" charset="0"/>
+                      </a:endParaRPr>
+                    </a:p>
+                  </a:txBody>
+                  <a:tcPr marL="60165" marR="60165" marT="30082" marB="30082"/>
+                </a:tc>
+                <a:tc>
+                  <a:txBody>
+                    <a:bodyPr/>
+                    <a:lstStyle/>
+                    <a:p>
+                      <a:pPr>
+                        <a:lnSpc>
+                          <a:spcPct val="115000"/>
+                        </a:lnSpc>
+                        <a:spcAft>
+                          <a:spcPts val="800"/>
+                        </a:spcAft>
+                        <a:buNone/>
+                      </a:pPr>
+                      <a:r>
+                        <a:rPr lang="en-GB" sz="1000" kern="100">
+                          <a:effectLst/>
+                        </a:rPr>
+                        <a:t>13-16</a:t>
+                      </a:r>
+                      <a:endParaRPr lang="en-GB" sz="1000" kern="100">
+                        <a:effectLst/>
+                        <a:latin typeface="Aptos" panose="020B0004020202020204" pitchFamily="34" charset="0"/>
+                        <a:ea typeface="DengXian" panose="02010600030101010101" pitchFamily="2" charset="-122"/>
+                        <a:cs typeface="Arial" panose="020B0604020202020204" pitchFamily="34" charset="0"/>
+                      </a:endParaRPr>
+                    </a:p>
+                  </a:txBody>
+                  <a:tcPr marL="60165" marR="60165" marT="30082" marB="30082"/>
+                </a:tc>
+                <a:tc>
+                  <a:txBody>
+                    <a:bodyPr/>
+                    <a:lstStyle/>
+                    <a:p>
+                      <a:pPr>
+                        <a:lnSpc>
+                          <a:spcPct val="115000"/>
+                        </a:lnSpc>
+                        <a:spcAft>
+                          <a:spcPts val="800"/>
+                        </a:spcAft>
+                        <a:buNone/>
+                      </a:pPr>
+                      <a:r>
+                        <a:rPr lang="en-GB" sz="1000" kern="100">
+                          <a:effectLst/>
+                        </a:rPr>
+                        <a:t>CMP211</a:t>
+                      </a:r>
+                      <a:endParaRPr lang="en-GB" sz="1000" kern="100">
+                        <a:effectLst/>
+                        <a:latin typeface="Aptos" panose="020B0004020202020204" pitchFamily="34" charset="0"/>
+                        <a:ea typeface="DengXian" panose="02010600030101010101" pitchFamily="2" charset="-122"/>
+                        <a:cs typeface="Arial" panose="020B0604020202020204" pitchFamily="34" charset="0"/>
+                      </a:endParaRPr>
+                    </a:p>
+                  </a:txBody>
+                  <a:tcPr marL="60165" marR="60165" marT="30082" marB="30082"/>
+                </a:tc>
+                <a:tc gridSpan="3">
+                  <a:txBody>
+                    <a:bodyPr/>
+                    <a:lstStyle/>
+                    <a:p>
+                      <a:pPr>
+                        <a:lnSpc>
+                          <a:spcPct val="115000"/>
+                        </a:lnSpc>
+                        <a:spcAft>
+                          <a:spcPts val="800"/>
+                        </a:spcAft>
+                        <a:buNone/>
+                      </a:pPr>
+                      <a:r>
+                        <a:rPr lang="en-US" sz="1000" kern="100">
+                          <a:effectLst/>
+                        </a:rPr>
+                        <a:t>Media Distribution Networks (cont’d), Broadcast Workflow</a:t>
+                      </a:r>
+                      <a:endParaRPr lang="en-GB" sz="1000" kern="100">
+                        <a:effectLst/>
+                        <a:latin typeface="Aptos" panose="020B0004020202020204" pitchFamily="34" charset="0"/>
+                        <a:ea typeface="DengXian" panose="02010600030101010101" pitchFamily="2" charset="-122"/>
+                        <a:cs typeface="Arial" panose="020B0604020202020204" pitchFamily="34" charset="0"/>
+                      </a:endParaRPr>
+                    </a:p>
+                  </a:txBody>
+                  <a:tcPr marL="60165" marR="60165" marT="30082" marB="30082"/>
+                </a:tc>
+                <a:tc hMerge="1">
+                  <a:txBody>
+                    <a:bodyPr/>
+                    <a:lstStyle/>
+                    <a:p>
+                      <a:endParaRPr lang="en-GB"/>
+                    </a:p>
+                  </a:txBody>
+                  <a:tcPr/>
+                </a:tc>
+                <a:tc hMerge="1">
+                  <a:txBody>
+                    <a:bodyPr/>
+                    <a:lstStyle/>
+                    <a:p>
+                      <a:endParaRPr lang="en-GB"/>
+                    </a:p>
+                  </a:txBody>
+                  <a:tcPr/>
+                </a:tc>
+                <a:tc>
+                  <a:txBody>
+                    <a:bodyPr/>
+                    <a:lstStyle/>
+                    <a:p>
+                      <a:pPr>
+                        <a:lnSpc>
+                          <a:spcPct val="115000"/>
+                        </a:lnSpc>
+                        <a:spcAft>
+                          <a:spcPts val="800"/>
+                        </a:spcAft>
+                        <a:buNone/>
+                      </a:pPr>
+                      <a:r>
+                        <a:rPr lang="en-GB" sz="1000" kern="100">
+                          <a:effectLst/>
+                        </a:rPr>
+                        <a:t> </a:t>
+                      </a:r>
+                      <a:endParaRPr lang="en-GB" sz="1000" kern="100">
+                        <a:effectLst/>
+                        <a:latin typeface="Aptos" panose="020B0004020202020204" pitchFamily="34" charset="0"/>
+                        <a:ea typeface="DengXian" panose="02010600030101010101" pitchFamily="2" charset="-122"/>
+                        <a:cs typeface="Arial" panose="020B0604020202020204" pitchFamily="34" charset="0"/>
+                      </a:endParaRPr>
+                    </a:p>
+                  </a:txBody>
+                  <a:tcPr marL="60165" marR="60165" marT="30082" marB="30082"/>
+                </a:tc>
+                <a:tc gridSpan="2">
+                  <a:txBody>
+                    <a:bodyPr/>
+                    <a:lstStyle/>
+                    <a:p>
+                      <a:pPr>
+                        <a:lnSpc>
+                          <a:spcPct val="115000"/>
+                        </a:lnSpc>
+                        <a:spcAft>
+                          <a:spcPts val="800"/>
+                        </a:spcAft>
+                        <a:buNone/>
+                      </a:pPr>
+                      <a:r>
+                        <a:rPr lang="en-GB" sz="1000" kern="100">
+                          <a:effectLst/>
+                        </a:rPr>
+                        <a:t> </a:t>
+                      </a:r>
+                      <a:endParaRPr lang="en-GB" sz="1000" kern="100">
+                        <a:effectLst/>
+                        <a:latin typeface="Aptos" panose="020B0004020202020204" pitchFamily="34" charset="0"/>
+                        <a:ea typeface="DengXian" panose="02010600030101010101" pitchFamily="2" charset="-122"/>
+                        <a:cs typeface="Arial" panose="020B0604020202020204" pitchFamily="34" charset="0"/>
+                      </a:endParaRPr>
+                    </a:p>
+                  </a:txBody>
+                  <a:tcPr marL="0" marR="0" marT="0" marB="0" anchor="ctr"/>
+                </a:tc>
+                <a:tc hMerge="1">
+                  <a:txBody>
+                    <a:bodyPr/>
+                    <a:lstStyle/>
+                    <a:p>
+                      <a:endParaRPr lang="en-GB"/>
+                    </a:p>
+                  </a:txBody>
+                  <a:tcPr/>
+                </a:tc>
+                <a:extLst>
+                  <a:ext uri="{0D108BD9-81ED-4DB2-BD59-A6C34878D82A}">
+                    <a16:rowId xmlns:a16="http://schemas.microsoft.com/office/drawing/2014/main" val="1060979805"/>
+                  </a:ext>
+                </a:extLst>
+              </a:tr>
+              <a:tr h="296664">
+                <a:tc>
+                  <a:txBody>
+                    <a:bodyPr/>
+                    <a:lstStyle/>
+                    <a:p>
+                      <a:pPr>
+                        <a:lnSpc>
+                          <a:spcPct val="115000"/>
+                        </a:lnSpc>
+                        <a:spcAft>
+                          <a:spcPts val="800"/>
+                        </a:spcAft>
+                        <a:buNone/>
+                      </a:pPr>
+                      <a:r>
+                        <a:rPr lang="en-US" sz="1000" kern="100">
+                          <a:effectLst/>
+                        </a:rPr>
+                        <a:t>21 May</a:t>
+                      </a:r>
+                      <a:endParaRPr lang="en-GB" sz="1000" kern="100">
+                        <a:effectLst/>
+                        <a:latin typeface="Aptos" panose="020B0004020202020204" pitchFamily="34" charset="0"/>
+                        <a:ea typeface="DengXian" panose="02010600030101010101" pitchFamily="2" charset="-122"/>
+                        <a:cs typeface="Arial" panose="020B0604020202020204" pitchFamily="34" charset="0"/>
+                      </a:endParaRPr>
+                    </a:p>
+                  </a:txBody>
+                  <a:tcPr marL="60165" marR="60165" marT="30082" marB="30082"/>
+                </a:tc>
+                <a:tc>
+                  <a:txBody>
+                    <a:bodyPr/>
+                    <a:lstStyle/>
+                    <a:p>
+                      <a:pPr>
+                        <a:lnSpc>
+                          <a:spcPct val="115000"/>
+                        </a:lnSpc>
+                        <a:spcAft>
+                          <a:spcPts val="800"/>
+                        </a:spcAft>
+                        <a:buNone/>
+                      </a:pPr>
+                      <a:r>
+                        <a:rPr lang="en-US" sz="1000" kern="100">
+                          <a:effectLst/>
+                        </a:rPr>
+                        <a:t>15,16</a:t>
+                      </a:r>
+                      <a:endParaRPr lang="en-GB" sz="1000" kern="100">
+                        <a:effectLst/>
+                        <a:latin typeface="Aptos" panose="020B0004020202020204" pitchFamily="34" charset="0"/>
+                        <a:ea typeface="DengXian" panose="02010600030101010101" pitchFamily="2" charset="-122"/>
+                        <a:cs typeface="Arial" panose="020B0604020202020204" pitchFamily="34" charset="0"/>
+                      </a:endParaRPr>
+                    </a:p>
+                  </a:txBody>
+                  <a:tcPr marL="60165" marR="60165" marT="30082" marB="30082"/>
+                </a:tc>
+                <a:tc>
+                  <a:txBody>
+                    <a:bodyPr/>
+                    <a:lstStyle/>
+                    <a:p>
+                      <a:pPr>
+                        <a:lnSpc>
+                          <a:spcPct val="115000"/>
+                        </a:lnSpc>
+                        <a:spcAft>
+                          <a:spcPts val="800"/>
+                        </a:spcAft>
+                        <a:buNone/>
+                      </a:pPr>
+                      <a:r>
+                        <a:rPr lang="en-US" sz="1000" kern="100">
+                          <a:effectLst/>
+                        </a:rPr>
+                        <a:t>9-12;</a:t>
+                      </a:r>
+                      <a:r>
+                        <a:rPr lang="en-GB" sz="1000" kern="100">
+                          <a:effectLst/>
+                        </a:rPr>
+                        <a:t> 13-16</a:t>
+                      </a:r>
+                      <a:endParaRPr lang="en-GB" sz="1000" kern="100">
+                        <a:effectLst/>
+                        <a:latin typeface="Aptos" panose="020B0004020202020204" pitchFamily="34" charset="0"/>
+                        <a:ea typeface="DengXian" panose="02010600030101010101" pitchFamily="2" charset="-122"/>
+                        <a:cs typeface="Arial" panose="020B0604020202020204" pitchFamily="34" charset="0"/>
+                      </a:endParaRPr>
+                    </a:p>
+                  </a:txBody>
+                  <a:tcPr marL="60165" marR="60165" marT="30082" marB="30082"/>
+                </a:tc>
+                <a:tc gridSpan="2">
+                  <a:txBody>
+                    <a:bodyPr/>
+                    <a:lstStyle/>
+                    <a:p>
+                      <a:pPr>
+                        <a:lnSpc>
+                          <a:spcPct val="115000"/>
+                        </a:lnSpc>
+                        <a:spcAft>
+                          <a:spcPts val="800"/>
+                        </a:spcAft>
+                        <a:buNone/>
+                      </a:pPr>
+                      <a:r>
+                        <a:rPr lang="en-GB" sz="1000" kern="100">
+                          <a:effectLst/>
+                        </a:rPr>
+                        <a:t>CMP211</a:t>
+                      </a:r>
+                      <a:endParaRPr lang="en-GB" sz="1000" kern="100">
+                        <a:effectLst/>
+                        <a:latin typeface="Aptos" panose="020B0004020202020204" pitchFamily="34" charset="0"/>
+                        <a:ea typeface="DengXian" panose="02010600030101010101" pitchFamily="2" charset="-122"/>
+                        <a:cs typeface="Arial" panose="020B0604020202020204" pitchFamily="34" charset="0"/>
+                      </a:endParaRPr>
+                    </a:p>
+                  </a:txBody>
+                  <a:tcPr marL="60165" marR="60165" marT="30082" marB="30082"/>
+                </a:tc>
+                <a:tc hMerge="1">
+                  <a:txBody>
+                    <a:bodyPr/>
+                    <a:lstStyle/>
+                    <a:p>
+                      <a:endParaRPr lang="en-GB"/>
+                    </a:p>
+                  </a:txBody>
+                  <a:tcPr/>
+                </a:tc>
+                <a:tc>
+                  <a:txBody>
+                    <a:bodyPr/>
+                    <a:lstStyle/>
+                    <a:p>
+                      <a:pPr>
+                        <a:lnSpc>
+                          <a:spcPct val="115000"/>
+                        </a:lnSpc>
+                        <a:spcAft>
+                          <a:spcPts val="800"/>
+                        </a:spcAft>
+                        <a:buNone/>
+                      </a:pPr>
+                      <a:r>
+                        <a:rPr lang="en-US" sz="1000" kern="100">
+                          <a:effectLst/>
+                        </a:rPr>
+                        <a:t>New Topics and Module Review</a:t>
+                      </a:r>
+                      <a:endParaRPr lang="en-GB" sz="1000" kern="100">
+                        <a:effectLst/>
+                        <a:latin typeface="Aptos" panose="020B0004020202020204" pitchFamily="34" charset="0"/>
+                        <a:ea typeface="DengXian" panose="02010600030101010101" pitchFamily="2" charset="-122"/>
+                        <a:cs typeface="Arial" panose="020B0604020202020204" pitchFamily="34" charset="0"/>
+                      </a:endParaRPr>
+                    </a:p>
+                  </a:txBody>
+                  <a:tcPr marL="0" marR="0" marT="0" marB="0"/>
+                </a:tc>
+                <a:tc gridSpan="2">
+                  <a:txBody>
+                    <a:bodyPr/>
+                    <a:lstStyle/>
+                    <a:p>
+                      <a:pPr>
+                        <a:lnSpc>
+                          <a:spcPct val="115000"/>
+                        </a:lnSpc>
+                        <a:spcAft>
+                          <a:spcPts val="800"/>
+                        </a:spcAft>
+                        <a:buNone/>
+                      </a:pPr>
+                      <a:r>
+                        <a:rPr lang="en-GB" sz="1000" kern="100">
+                          <a:effectLst/>
+                        </a:rPr>
+                        <a:t> </a:t>
+                      </a:r>
+                      <a:endParaRPr lang="en-GB" sz="1000" kern="100">
+                        <a:effectLst/>
+                        <a:latin typeface="Aptos" panose="020B0004020202020204" pitchFamily="34" charset="0"/>
+                        <a:ea typeface="DengXian" panose="02010600030101010101" pitchFamily="2" charset="-122"/>
+                        <a:cs typeface="Arial" panose="020B0604020202020204" pitchFamily="34" charset="0"/>
+                      </a:endParaRPr>
+                    </a:p>
+                  </a:txBody>
+                  <a:tcPr marL="0" marR="0" marT="0" marB="0"/>
+                </a:tc>
+                <a:tc hMerge="1">
+                  <a:txBody>
+                    <a:bodyPr/>
+                    <a:lstStyle/>
+                    <a:p>
+                      <a:endParaRPr lang="en-GB"/>
+                    </a:p>
+                  </a:txBody>
+                  <a:tcPr/>
+                </a:tc>
+                <a:tc>
+                  <a:txBody>
+                    <a:bodyPr/>
+                    <a:lstStyle/>
+                    <a:p>
+                      <a:pPr>
+                        <a:lnSpc>
+                          <a:spcPct val="115000"/>
+                        </a:lnSpc>
+                        <a:spcAft>
+                          <a:spcPts val="800"/>
+                        </a:spcAft>
+                        <a:buNone/>
+                      </a:pPr>
+                      <a:r>
+                        <a:rPr lang="en-GB" sz="1000" kern="100">
+                          <a:effectLst/>
+                        </a:rPr>
+                        <a:t> </a:t>
+                      </a:r>
+                      <a:endParaRPr lang="en-GB" sz="1000" kern="100">
+                        <a:effectLst/>
+                        <a:latin typeface="Aptos" panose="020B0004020202020204" pitchFamily="34" charset="0"/>
+                        <a:ea typeface="DengXian" panose="02010600030101010101" pitchFamily="2" charset="-122"/>
+                        <a:cs typeface="Arial" panose="020B0604020202020204" pitchFamily="34" charset="0"/>
+                      </a:endParaRPr>
+                    </a:p>
+                  </a:txBody>
+                  <a:tcPr marL="0" marR="0" marT="0" marB="0"/>
+                </a:tc>
+                <a:tc>
+                  <a:txBody>
+                    <a:bodyPr/>
+                    <a:lstStyle/>
+                    <a:p>
+                      <a:pPr>
+                        <a:lnSpc>
+                          <a:spcPct val="115000"/>
+                        </a:lnSpc>
+                        <a:spcAft>
+                          <a:spcPts val="800"/>
+                        </a:spcAft>
+                        <a:buNone/>
+                      </a:pPr>
+                      <a:r>
+                        <a:rPr lang="en-GB" sz="1000" kern="100">
+                          <a:effectLst/>
+                        </a:rPr>
+                        <a:t> </a:t>
+                      </a:r>
+                      <a:endParaRPr lang="en-GB" sz="1000" kern="100">
+                        <a:effectLst/>
+                        <a:latin typeface="Aptos" panose="020B0004020202020204" pitchFamily="34" charset="0"/>
+                        <a:ea typeface="DengXian" panose="02010600030101010101" pitchFamily="2" charset="-122"/>
+                        <a:cs typeface="Arial" panose="020B0604020202020204" pitchFamily="34" charset="0"/>
+                      </a:endParaRPr>
+                    </a:p>
+                  </a:txBody>
+                  <a:tcPr marL="0" marR="0" marT="0" marB="0"/>
+                </a:tc>
+                <a:extLst>
+                  <a:ext uri="{0D108BD9-81ED-4DB2-BD59-A6C34878D82A}">
+                    <a16:rowId xmlns:a16="http://schemas.microsoft.com/office/drawing/2014/main" val="3853128071"/>
+                  </a:ext>
+                </a:extLst>
+              </a:tr>
+              <a:tr h="296664">
+                <a:tc>
+                  <a:txBody>
+                    <a:bodyPr/>
+                    <a:lstStyle/>
+                    <a:p>
+                      <a:pPr>
+                        <a:lnSpc>
+                          <a:spcPct val="115000"/>
+                        </a:lnSpc>
+                        <a:spcAft>
+                          <a:spcPts val="800"/>
+                        </a:spcAft>
+                        <a:buNone/>
+                      </a:pPr>
+                      <a:r>
+                        <a:rPr lang="en-US" sz="1000" kern="100">
+                          <a:effectLst/>
+                        </a:rPr>
+                        <a:t>22 May</a:t>
+                      </a:r>
+                      <a:endParaRPr lang="en-GB" sz="1000" kern="100">
+                        <a:effectLst/>
+                        <a:latin typeface="Aptos" panose="020B0004020202020204" pitchFamily="34" charset="0"/>
+                        <a:ea typeface="DengXian" panose="02010600030101010101" pitchFamily="2" charset="-122"/>
+                        <a:cs typeface="Arial" panose="020B0604020202020204" pitchFamily="34" charset="0"/>
+                      </a:endParaRPr>
+                    </a:p>
+                  </a:txBody>
+                  <a:tcPr marL="60165" marR="60165" marT="30082" marB="30082"/>
+                </a:tc>
+                <a:tc>
+                  <a:txBody>
+                    <a:bodyPr/>
+                    <a:lstStyle/>
+                    <a:p>
+                      <a:pPr>
+                        <a:lnSpc>
+                          <a:spcPct val="115000"/>
+                        </a:lnSpc>
+                        <a:spcAft>
+                          <a:spcPts val="800"/>
+                        </a:spcAft>
+                        <a:buNone/>
+                      </a:pPr>
+                      <a:r>
+                        <a:rPr lang="en-US" sz="1000" kern="100">
+                          <a:effectLst/>
+                        </a:rPr>
+                        <a:t>17</a:t>
+                      </a:r>
+                      <a:endParaRPr lang="en-GB" sz="1000" kern="100">
+                        <a:effectLst/>
+                        <a:latin typeface="Aptos" panose="020B0004020202020204" pitchFamily="34" charset="0"/>
+                        <a:ea typeface="DengXian" panose="02010600030101010101" pitchFamily="2" charset="-122"/>
+                        <a:cs typeface="Arial" panose="020B0604020202020204" pitchFamily="34" charset="0"/>
+                      </a:endParaRPr>
+                    </a:p>
+                  </a:txBody>
+                  <a:tcPr marL="60165" marR="60165" marT="30082" marB="30082"/>
+                </a:tc>
+                <a:tc>
+                  <a:txBody>
+                    <a:bodyPr/>
+                    <a:lstStyle/>
+                    <a:p>
+                      <a:pPr>
+                        <a:lnSpc>
+                          <a:spcPct val="115000"/>
+                        </a:lnSpc>
+                        <a:spcAft>
+                          <a:spcPts val="800"/>
+                        </a:spcAft>
+                        <a:buNone/>
+                      </a:pPr>
+                      <a:r>
+                        <a:rPr lang="en-GB" sz="1000" kern="100">
+                          <a:effectLst/>
+                        </a:rPr>
+                        <a:t>9-12;</a:t>
+                      </a:r>
+                      <a:endParaRPr lang="en-GB" sz="1000" kern="100">
+                        <a:effectLst/>
+                        <a:latin typeface="Aptos" panose="020B0004020202020204" pitchFamily="34" charset="0"/>
+                        <a:ea typeface="DengXian" panose="02010600030101010101" pitchFamily="2" charset="-122"/>
+                        <a:cs typeface="Arial" panose="020B0604020202020204" pitchFamily="34" charset="0"/>
+                      </a:endParaRPr>
+                    </a:p>
+                  </a:txBody>
+                  <a:tcPr marL="60165" marR="60165" marT="30082" marB="30082"/>
+                </a:tc>
+                <a:tc>
+                  <a:txBody>
+                    <a:bodyPr/>
+                    <a:lstStyle/>
+                    <a:p>
+                      <a:pPr>
+                        <a:lnSpc>
+                          <a:spcPct val="115000"/>
+                        </a:lnSpc>
+                        <a:spcAft>
+                          <a:spcPts val="800"/>
+                        </a:spcAft>
+                        <a:buNone/>
+                      </a:pPr>
+                      <a:r>
+                        <a:rPr lang="en-GB" sz="1000" kern="100">
+                          <a:effectLst/>
+                        </a:rPr>
+                        <a:t>CMP211 </a:t>
+                      </a:r>
+                      <a:endParaRPr lang="en-GB" sz="1000" kern="100">
+                        <a:effectLst/>
+                        <a:latin typeface="Aptos" panose="020B0004020202020204" pitchFamily="34" charset="0"/>
+                        <a:ea typeface="DengXian" panose="02010600030101010101" pitchFamily="2" charset="-122"/>
+                        <a:cs typeface="Arial" panose="020B0604020202020204" pitchFamily="34" charset="0"/>
+                      </a:endParaRPr>
+                    </a:p>
+                  </a:txBody>
+                  <a:tcPr marL="60165" marR="60165" marT="30082" marB="30082"/>
+                </a:tc>
+                <a:tc gridSpan="4">
+                  <a:txBody>
+                    <a:bodyPr/>
+                    <a:lstStyle/>
+                    <a:p>
+                      <a:pPr>
+                        <a:lnSpc>
+                          <a:spcPct val="115000"/>
+                        </a:lnSpc>
+                        <a:spcAft>
+                          <a:spcPts val="800"/>
+                        </a:spcAft>
+                        <a:buNone/>
+                      </a:pPr>
+                      <a:r>
+                        <a:rPr lang="en-GB" sz="1000" kern="100">
+                          <a:effectLst/>
+                        </a:rPr>
+                        <a:t>EXAM</a:t>
+                      </a:r>
+                      <a:endParaRPr lang="en-GB" sz="1000" kern="100">
+                        <a:effectLst/>
+                        <a:latin typeface="Aptos" panose="020B0004020202020204" pitchFamily="34" charset="0"/>
+                        <a:ea typeface="DengXian" panose="02010600030101010101" pitchFamily="2" charset="-122"/>
+                        <a:cs typeface="Arial" panose="020B0604020202020204" pitchFamily="34" charset="0"/>
+                      </a:endParaRPr>
+                    </a:p>
+                  </a:txBody>
+                  <a:tcPr marL="0" marR="0" marT="0" marB="0"/>
+                </a:tc>
+                <a:tc hMerge="1">
+                  <a:txBody>
+                    <a:bodyPr/>
+                    <a:lstStyle/>
+                    <a:p>
+                      <a:endParaRPr lang="en-GB"/>
+                    </a:p>
+                  </a:txBody>
+                  <a:tcPr/>
+                </a:tc>
+                <a:tc hMerge="1">
+                  <a:txBody>
+                    <a:bodyPr/>
+                    <a:lstStyle/>
+                    <a:p>
+                      <a:endParaRPr lang="en-GB"/>
+                    </a:p>
+                  </a:txBody>
+                  <a:tcPr/>
+                </a:tc>
+                <a:tc hMerge="1">
+                  <a:txBody>
+                    <a:bodyPr/>
+                    <a:lstStyle/>
+                    <a:p>
+                      <a:endParaRPr lang="en-GB"/>
+                    </a:p>
+                  </a:txBody>
+                  <a:tcPr/>
+                </a:tc>
+                <a:tc gridSpan="2">
+                  <a:txBody>
+                    <a:bodyPr/>
+                    <a:lstStyle/>
+                    <a:p>
+                      <a:pPr>
+                        <a:lnSpc>
+                          <a:spcPct val="115000"/>
+                        </a:lnSpc>
+                        <a:spcAft>
+                          <a:spcPts val="800"/>
+                        </a:spcAft>
+                        <a:buNone/>
+                      </a:pPr>
+                      <a:r>
+                        <a:rPr lang="en-GB" sz="1000" kern="100" dirty="0">
+                          <a:effectLst/>
+                        </a:rPr>
+                        <a:t> </a:t>
+                      </a:r>
+                      <a:endParaRPr lang="en-GB" sz="1000" kern="100" dirty="0">
+                        <a:effectLst/>
+                        <a:latin typeface="Aptos" panose="020B0004020202020204" pitchFamily="34" charset="0"/>
+                        <a:ea typeface="DengXian" panose="02010600030101010101" pitchFamily="2" charset="-122"/>
+                        <a:cs typeface="Arial" panose="020B0604020202020204" pitchFamily="34" charset="0"/>
+                      </a:endParaRPr>
+                    </a:p>
+                  </a:txBody>
+                  <a:tcPr marL="0" marR="0" marT="0" marB="0" anchor="ctr"/>
+                </a:tc>
+                <a:tc hMerge="1">
+                  <a:txBody>
+                    <a:bodyPr/>
+                    <a:lstStyle/>
+                    <a:p>
+                      <a:endParaRPr lang="en-GB"/>
+                    </a:p>
+                  </a:txBody>
+                  <a:tcPr/>
+                </a:tc>
+                <a:extLst>
+                  <a:ext uri="{0D108BD9-81ED-4DB2-BD59-A6C34878D82A}">
+                    <a16:rowId xmlns:a16="http://schemas.microsoft.com/office/drawing/2014/main" val="1548783090"/>
                   </a:ext>
                 </a:extLst>
               </a:tr>
